--- a/slides/CSC336-Lecture-14-Regular-Expressions-and-JSON.pptx
+++ b/slides/CSC336-Lecture-14-Regular-Expressions-and-JSON.pptx
@@ -3103,79 +3103,44 @@
       </p:sp>
       <p:sp>
         <p:nvSpPr>
-          <p:cNvPr id="6" name="Text 4"/>
-          <p:cNvSpPr txBox="1"/>
-          <p:nvPr/>
-        </p:nvSpPr>
-        <p:spPr>
-          <a:xfrm>
-            <a:off x="640080" y="6446520"/>
-            <a:ext cx="8686800" cy="292608"/>
-          </a:xfrm>
-          <a:prstGeom prst="rect">
-            <a:avLst/>
-          </a:prstGeom>
-          <a:noFill/>
-          <a:ln/>
-        </p:spPr>
-        <p:txBody>
-          <a:bodyPr wrap="square" lIns="0" tIns="0" rIns="0" bIns="0" rtlCol="0" anchor="ctr"/>
-          <a:lstStyle/>
-          <a:p>
-            <a:pPr algn="l" indent="0" marL="0">
-              <a:buNone/>
-            </a:pPr>
-            <a:r>
-              <a:rPr lang="en-US" sz="900" dirty="0">
-                <a:solidFill>
-                  <a:srgbClr val="9AA3D8"/>
-                </a:solidFill>
-                <a:latin typeface="Calibri" pitchFamily="34" charset="0"/>
-                <a:ea typeface="Calibri" pitchFamily="34" charset="-122"/>
-                <a:cs typeface="Calibri" pitchFamily="34" charset="-120"/>
-              </a:rPr>
-              <a:t>Usman Akram  •  COMSATS University Islamabad</a:t>
-            </a:r>
-            <a:endParaRPr lang="en-US" sz="900" dirty="0"/>
-          </a:p>
-        </p:txBody>
-      </p:sp>
-      <p:sp>
-        <p:nvSpPr>
-          <p:cNvPr id="7" name="Text 5"/>
-          <p:cNvSpPr txBox="1"/>
-          <p:nvPr/>
-        </p:nvSpPr>
-        <p:spPr>
-          <a:xfrm>
-            <a:off x="11155680" y="6446520"/>
-            <a:ext cx="457200" cy="292608"/>
-          </a:xfrm>
-          <a:prstGeom prst="rect">
-            <a:avLst/>
-          </a:prstGeom>
-          <a:noFill/>
-          <a:ln/>
-        </p:spPr>
-        <p:txBody>
-          <a:bodyPr wrap="square" lIns="0" tIns="0" rIns="0" bIns="0" rtlCol="0" anchor="ctr"/>
-          <a:lstStyle/>
-          <a:p>
-            <a:pPr algn="r" indent="0" marL="0">
-              <a:buNone/>
-            </a:pPr>
-            <a:r>
-              <a:rPr lang="en-US" sz="900" dirty="0">
-                <a:solidFill>
-                  <a:srgbClr val="9AA3D8"/>
-                </a:solidFill>
-                <a:latin typeface="Calibri" pitchFamily="34" charset="0"/>
-                <a:ea typeface="Calibri" pitchFamily="34" charset="-122"/>
-                <a:cs typeface="Calibri" pitchFamily="34" charset="-120"/>
-              </a:rPr>
-              <a:t>1</a:t>
-            </a:r>
-            <a:endParaRPr lang="en-US" sz="900" dirty="0"/>
+          <p:cNvPr id="8" name="cuinotes-footer-mark"/>
+          <p:cNvSpPr txBox="1"/>
+          <p:nvPr/>
+        </p:nvSpPr>
+        <p:spPr>
+          <a:xfrm>
+            <a:off x="9951720" y="6455664"/>
+            <a:ext cx="2011680" cy="292608"/>
+          </a:xfrm>
+          <a:prstGeom prst="rect">
+            <a:avLst/>
+          </a:prstGeom>
+          <a:noFill/>
+        </p:spPr>
+        <p:txBody>
+          <a:bodyPr wrap="none" lIns="0" rIns="0" tIns="0" bIns="0">
+            <a:spAutoFit/>
+          </a:bodyPr>
+          <a:lstStyle/>
+          <a:p>
+            <a:pPr algn="r"/>
+            <a:r>
+              <a:rPr sz="1000">
+                <a:solidFill>
+                  <a:srgbClr val="8A939B"/>
+                </a:solidFill>
+                <a:hlinkClick r:id="rId3"/>
+              </a:rPr>
+              <a:t>cuinotes.com</a:t>
+            </a:r>
+            <a:r>
+              <a:rPr sz="1000">
+                <a:solidFill>
+                  <a:srgbClr val="8A939B"/>
+                </a:solidFill>
+              </a:rPr>
+              <a:t>  ·  1</a:t>
+            </a:r>
           </a:p>
         </p:txBody>
       </p:sp>
@@ -3310,6 +3275,10 @@
           </a:solidFill>
           <a:ln/>
         </p:spPr>
+        <p:txBody>
+          <a:bodyPr/>
+          <a:p/>
+        </p:txBody>
       </p:sp>
       <p:sp>
         <p:nvSpPr>
@@ -3504,79 +3473,44 @@
       </p:sp>
       <p:sp>
         <p:nvSpPr>
-          <p:cNvPr id="6" name="Text 4"/>
-          <p:cNvSpPr txBox="1"/>
-          <p:nvPr/>
-        </p:nvSpPr>
-        <p:spPr>
-          <a:xfrm>
-            <a:off x="640080" y="6446520"/>
-            <a:ext cx="8686800" cy="292608"/>
-          </a:xfrm>
-          <a:prstGeom prst="rect">
-            <a:avLst/>
-          </a:prstGeom>
-          <a:noFill/>
-          <a:ln/>
-        </p:spPr>
-        <p:txBody>
-          <a:bodyPr wrap="square" lIns="0" tIns="0" rIns="0" bIns="0" rtlCol="0" anchor="ctr"/>
-          <a:lstStyle/>
-          <a:p>
-            <a:pPr algn="l" indent="0" marL="0">
-              <a:buNone/>
-            </a:pPr>
-            <a:r>
-              <a:rPr lang="en-US" sz="900" dirty="0">
-                <a:solidFill>
-                  <a:srgbClr val="5D5D72"/>
-                </a:solidFill>
-                <a:latin typeface="Calibri" pitchFamily="34" charset="0"/>
-                <a:ea typeface="Calibri" pitchFamily="34" charset="-122"/>
-                <a:cs typeface="Calibri" pitchFamily="34" charset="-120"/>
-              </a:rPr>
-              <a:t>Usman Akram  •  COMSATS University Islamabad</a:t>
-            </a:r>
-            <a:endParaRPr lang="en-US" sz="900" dirty="0"/>
-          </a:p>
-        </p:txBody>
-      </p:sp>
-      <p:sp>
-        <p:nvSpPr>
-          <p:cNvPr id="7" name="Text 5"/>
-          <p:cNvSpPr txBox="1"/>
-          <p:nvPr/>
-        </p:nvSpPr>
-        <p:spPr>
-          <a:xfrm>
-            <a:off x="11155680" y="6446520"/>
-            <a:ext cx="457200" cy="292608"/>
-          </a:xfrm>
-          <a:prstGeom prst="rect">
-            <a:avLst/>
-          </a:prstGeom>
-          <a:noFill/>
-          <a:ln/>
-        </p:spPr>
-        <p:txBody>
-          <a:bodyPr wrap="square" lIns="0" tIns="0" rIns="0" bIns="0" rtlCol="0" anchor="ctr"/>
-          <a:lstStyle/>
-          <a:p>
-            <a:pPr algn="r" indent="0" marL="0">
-              <a:buNone/>
-            </a:pPr>
-            <a:r>
-              <a:rPr lang="en-US" sz="900" dirty="0">
-                <a:solidFill>
-                  <a:srgbClr val="5D5D72"/>
-                </a:solidFill>
-                <a:latin typeface="Calibri" pitchFamily="34" charset="0"/>
-                <a:ea typeface="Calibri" pitchFamily="34" charset="-122"/>
-                <a:cs typeface="Calibri" pitchFamily="34" charset="-120"/>
-              </a:rPr>
-              <a:t>10</a:t>
-            </a:r>
-            <a:endParaRPr lang="en-US" sz="900" dirty="0"/>
+          <p:cNvPr id="8" name="cuinotes-footer-mark"/>
+          <p:cNvSpPr txBox="1"/>
+          <p:nvPr/>
+        </p:nvSpPr>
+        <p:spPr>
+          <a:xfrm>
+            <a:off x="9951720" y="6455664"/>
+            <a:ext cx="2011680" cy="292608"/>
+          </a:xfrm>
+          <a:prstGeom prst="rect">
+            <a:avLst/>
+          </a:prstGeom>
+          <a:noFill/>
+        </p:spPr>
+        <p:txBody>
+          <a:bodyPr wrap="none" lIns="0" rIns="0" tIns="0" bIns="0">
+            <a:spAutoFit/>
+          </a:bodyPr>
+          <a:lstStyle/>
+          <a:p>
+            <a:pPr algn="r"/>
+            <a:r>
+              <a:rPr sz="1000">
+                <a:solidFill>
+                  <a:srgbClr val="8A939B"/>
+                </a:solidFill>
+                <a:hlinkClick r:id="rId3"/>
+              </a:rPr>
+              <a:t>cuinotes.com</a:t>
+            </a:r>
+            <a:r>
+              <a:rPr sz="1000">
+                <a:solidFill>
+                  <a:srgbClr val="8A939B"/>
+                </a:solidFill>
+              </a:rPr>
+              <a:t>  ·  10</a:t>
+            </a:r>
           </a:p>
         </p:txBody>
       </p:sp>
@@ -3711,6 +3645,10 @@
           </a:solidFill>
           <a:ln/>
         </p:spPr>
+        <p:txBody>
+          <a:bodyPr/>
+          <a:p/>
+        </p:txBody>
       </p:sp>
       <p:sp>
         <p:nvSpPr>
@@ -3835,79 +3773,44 @@
       </p:sp>
       <p:sp>
         <p:nvSpPr>
-          <p:cNvPr id="7" name="Text 5"/>
-          <p:cNvSpPr txBox="1"/>
-          <p:nvPr/>
-        </p:nvSpPr>
-        <p:spPr>
-          <a:xfrm>
-            <a:off x="640080" y="6446520"/>
-            <a:ext cx="8686800" cy="292608"/>
-          </a:xfrm>
-          <a:prstGeom prst="rect">
-            <a:avLst/>
-          </a:prstGeom>
-          <a:noFill/>
-          <a:ln/>
-        </p:spPr>
-        <p:txBody>
-          <a:bodyPr wrap="square" lIns="0" tIns="0" rIns="0" bIns="0" rtlCol="0" anchor="ctr"/>
-          <a:lstStyle/>
-          <a:p>
-            <a:pPr algn="l" indent="0" marL="0">
-              <a:buNone/>
-            </a:pPr>
-            <a:r>
-              <a:rPr lang="en-US" sz="900" dirty="0">
-                <a:solidFill>
-                  <a:srgbClr val="5D5D72"/>
-                </a:solidFill>
-                <a:latin typeface="Calibri" pitchFamily="34" charset="0"/>
-                <a:ea typeface="Calibri" pitchFamily="34" charset="-122"/>
-                <a:cs typeface="Calibri" pitchFamily="34" charset="-120"/>
-              </a:rPr>
-              <a:t>Usman Akram  •  COMSATS University Islamabad</a:t>
-            </a:r>
-            <a:endParaRPr lang="en-US" sz="900" dirty="0"/>
-          </a:p>
-        </p:txBody>
-      </p:sp>
-      <p:sp>
-        <p:nvSpPr>
-          <p:cNvPr id="8" name="Text 6"/>
-          <p:cNvSpPr txBox="1"/>
-          <p:nvPr/>
-        </p:nvSpPr>
-        <p:spPr>
-          <a:xfrm>
-            <a:off x="11155680" y="6446520"/>
-            <a:ext cx="457200" cy="292608"/>
-          </a:xfrm>
-          <a:prstGeom prst="rect">
-            <a:avLst/>
-          </a:prstGeom>
-          <a:noFill/>
-          <a:ln/>
-        </p:spPr>
-        <p:txBody>
-          <a:bodyPr wrap="square" lIns="0" tIns="0" rIns="0" bIns="0" rtlCol="0" anchor="ctr"/>
-          <a:lstStyle/>
-          <a:p>
-            <a:pPr algn="r" indent="0" marL="0">
-              <a:buNone/>
-            </a:pPr>
-            <a:r>
-              <a:rPr lang="en-US" sz="900" dirty="0">
-                <a:solidFill>
-                  <a:srgbClr val="5D5D72"/>
-                </a:solidFill>
-                <a:latin typeface="Calibri" pitchFamily="34" charset="0"/>
-                <a:ea typeface="Calibri" pitchFamily="34" charset="-122"/>
-                <a:cs typeface="Calibri" pitchFamily="34" charset="-120"/>
-              </a:rPr>
-              <a:t>11</a:t>
-            </a:r>
-            <a:endParaRPr lang="en-US" sz="900" dirty="0"/>
+          <p:cNvPr id="9" name="cuinotes-footer-mark"/>
+          <p:cNvSpPr txBox="1"/>
+          <p:nvPr/>
+        </p:nvSpPr>
+        <p:spPr>
+          <a:xfrm>
+            <a:off x="9951720" y="6455664"/>
+            <a:ext cx="2011680" cy="292608"/>
+          </a:xfrm>
+          <a:prstGeom prst="rect">
+            <a:avLst/>
+          </a:prstGeom>
+          <a:noFill/>
+        </p:spPr>
+        <p:txBody>
+          <a:bodyPr wrap="none" lIns="0" rIns="0" tIns="0" bIns="0">
+            <a:spAutoFit/>
+          </a:bodyPr>
+          <a:lstStyle/>
+          <a:p>
+            <a:pPr algn="r"/>
+            <a:r>
+              <a:rPr sz="1000">
+                <a:solidFill>
+                  <a:srgbClr val="8A939B"/>
+                </a:solidFill>
+                <a:hlinkClick r:id="rId3"/>
+              </a:rPr>
+              <a:t>cuinotes.com</a:t>
+            </a:r>
+            <a:r>
+              <a:rPr sz="1000">
+                <a:solidFill>
+                  <a:srgbClr val="8A939B"/>
+                </a:solidFill>
+              </a:rPr>
+              <a:t>  ·  11</a:t>
+            </a:r>
           </a:p>
         </p:txBody>
       </p:sp>
@@ -4042,6 +3945,10 @@
           </a:solidFill>
           <a:ln/>
         </p:spPr>
+        <p:txBody>
+          <a:bodyPr/>
+          <a:p/>
+        </p:txBody>
       </p:sp>
       <p:sp>
         <p:nvSpPr>
@@ -4225,79 +4132,44 @@
       </p:sp>
       <p:sp>
         <p:nvSpPr>
-          <p:cNvPr id="6" name="Text 4"/>
-          <p:cNvSpPr txBox="1"/>
-          <p:nvPr/>
-        </p:nvSpPr>
-        <p:spPr>
-          <a:xfrm>
-            <a:off x="640080" y="6446520"/>
-            <a:ext cx="8686800" cy="292608"/>
-          </a:xfrm>
-          <a:prstGeom prst="rect">
-            <a:avLst/>
-          </a:prstGeom>
-          <a:noFill/>
-          <a:ln/>
-        </p:spPr>
-        <p:txBody>
-          <a:bodyPr wrap="square" lIns="0" tIns="0" rIns="0" bIns="0" rtlCol="0" anchor="ctr"/>
-          <a:lstStyle/>
-          <a:p>
-            <a:pPr algn="l" indent="0" marL="0">
-              <a:buNone/>
-            </a:pPr>
-            <a:r>
-              <a:rPr lang="en-US" sz="900" dirty="0">
-                <a:solidFill>
-                  <a:srgbClr val="5D5D72"/>
-                </a:solidFill>
-                <a:latin typeface="Calibri" pitchFamily="34" charset="0"/>
-                <a:ea typeface="Calibri" pitchFamily="34" charset="-122"/>
-                <a:cs typeface="Calibri" pitchFamily="34" charset="-120"/>
-              </a:rPr>
-              <a:t>Usman Akram  •  COMSATS University Islamabad</a:t>
-            </a:r>
-            <a:endParaRPr lang="en-US" sz="900" dirty="0"/>
-          </a:p>
-        </p:txBody>
-      </p:sp>
-      <p:sp>
-        <p:nvSpPr>
-          <p:cNvPr id="7" name="Text 5"/>
-          <p:cNvSpPr txBox="1"/>
-          <p:nvPr/>
-        </p:nvSpPr>
-        <p:spPr>
-          <a:xfrm>
-            <a:off x="11155680" y="6446520"/>
-            <a:ext cx="457200" cy="292608"/>
-          </a:xfrm>
-          <a:prstGeom prst="rect">
-            <a:avLst/>
-          </a:prstGeom>
-          <a:noFill/>
-          <a:ln/>
-        </p:spPr>
-        <p:txBody>
-          <a:bodyPr wrap="square" lIns="0" tIns="0" rIns="0" bIns="0" rtlCol="0" anchor="ctr"/>
-          <a:lstStyle/>
-          <a:p>
-            <a:pPr algn="r" indent="0" marL="0">
-              <a:buNone/>
-            </a:pPr>
-            <a:r>
-              <a:rPr lang="en-US" sz="900" dirty="0">
-                <a:solidFill>
-                  <a:srgbClr val="5D5D72"/>
-                </a:solidFill>
-                <a:latin typeface="Calibri" pitchFamily="34" charset="0"/>
-                <a:ea typeface="Calibri" pitchFamily="34" charset="-122"/>
-                <a:cs typeface="Calibri" pitchFamily="34" charset="-120"/>
-              </a:rPr>
-              <a:t>12</a:t>
-            </a:r>
-            <a:endParaRPr lang="en-US" sz="900" dirty="0"/>
+          <p:cNvPr id="8" name="cuinotes-footer-mark"/>
+          <p:cNvSpPr txBox="1"/>
+          <p:nvPr/>
+        </p:nvSpPr>
+        <p:spPr>
+          <a:xfrm>
+            <a:off x="9951720" y="6455664"/>
+            <a:ext cx="2011680" cy="292608"/>
+          </a:xfrm>
+          <a:prstGeom prst="rect">
+            <a:avLst/>
+          </a:prstGeom>
+          <a:noFill/>
+        </p:spPr>
+        <p:txBody>
+          <a:bodyPr wrap="none" lIns="0" rIns="0" tIns="0" bIns="0">
+            <a:spAutoFit/>
+          </a:bodyPr>
+          <a:lstStyle/>
+          <a:p>
+            <a:pPr algn="r"/>
+            <a:r>
+              <a:rPr sz="1000">
+                <a:solidFill>
+                  <a:srgbClr val="8A939B"/>
+                </a:solidFill>
+                <a:hlinkClick r:id="rId3"/>
+              </a:rPr>
+              <a:t>cuinotes.com</a:t>
+            </a:r>
+            <a:r>
+              <a:rPr sz="1000">
+                <a:solidFill>
+                  <a:srgbClr val="8A939B"/>
+                </a:solidFill>
+              </a:rPr>
+              <a:t>  ·  12</a:t>
+            </a:r>
           </a:p>
         </p:txBody>
       </p:sp>
@@ -4432,6 +4304,10 @@
           </a:solidFill>
           <a:ln/>
         </p:spPr>
+        <p:txBody>
+          <a:bodyPr/>
+          <a:p/>
+        </p:txBody>
       </p:sp>
       <p:sp>
         <p:nvSpPr>
@@ -4726,79 +4602,44 @@
       </p:sp>
       <p:sp>
         <p:nvSpPr>
-          <p:cNvPr id="6" name="Text 4"/>
-          <p:cNvSpPr txBox="1"/>
-          <p:nvPr/>
-        </p:nvSpPr>
-        <p:spPr>
-          <a:xfrm>
-            <a:off x="640080" y="6446520"/>
-            <a:ext cx="8686800" cy="292608"/>
-          </a:xfrm>
-          <a:prstGeom prst="rect">
-            <a:avLst/>
-          </a:prstGeom>
-          <a:noFill/>
-          <a:ln/>
-        </p:spPr>
-        <p:txBody>
-          <a:bodyPr wrap="square" lIns="0" tIns="0" rIns="0" bIns="0" rtlCol="0" anchor="ctr"/>
-          <a:lstStyle/>
-          <a:p>
-            <a:pPr algn="l" indent="0" marL="0">
-              <a:buNone/>
-            </a:pPr>
-            <a:r>
-              <a:rPr lang="en-US" sz="900" dirty="0">
-                <a:solidFill>
-                  <a:srgbClr val="5D5D72"/>
-                </a:solidFill>
-                <a:latin typeface="Calibri" pitchFamily="34" charset="0"/>
-                <a:ea typeface="Calibri" pitchFamily="34" charset="-122"/>
-                <a:cs typeface="Calibri" pitchFamily="34" charset="-120"/>
-              </a:rPr>
-              <a:t>Usman Akram  •  COMSATS University Islamabad</a:t>
-            </a:r>
-            <a:endParaRPr lang="en-US" sz="900" dirty="0"/>
-          </a:p>
-        </p:txBody>
-      </p:sp>
-      <p:sp>
-        <p:nvSpPr>
-          <p:cNvPr id="7" name="Text 5"/>
-          <p:cNvSpPr txBox="1"/>
-          <p:nvPr/>
-        </p:nvSpPr>
-        <p:spPr>
-          <a:xfrm>
-            <a:off x="11155680" y="6446520"/>
-            <a:ext cx="457200" cy="292608"/>
-          </a:xfrm>
-          <a:prstGeom prst="rect">
-            <a:avLst/>
-          </a:prstGeom>
-          <a:noFill/>
-          <a:ln/>
-        </p:spPr>
-        <p:txBody>
-          <a:bodyPr wrap="square" lIns="0" tIns="0" rIns="0" bIns="0" rtlCol="0" anchor="ctr"/>
-          <a:lstStyle/>
-          <a:p>
-            <a:pPr algn="r" indent="0" marL="0">
-              <a:buNone/>
-            </a:pPr>
-            <a:r>
-              <a:rPr lang="en-US" sz="900" dirty="0">
-                <a:solidFill>
-                  <a:srgbClr val="5D5D72"/>
-                </a:solidFill>
-                <a:latin typeface="Calibri" pitchFamily="34" charset="0"/>
-                <a:ea typeface="Calibri" pitchFamily="34" charset="-122"/>
-                <a:cs typeface="Calibri" pitchFamily="34" charset="-120"/>
-              </a:rPr>
-              <a:t>13</a:t>
-            </a:r>
-            <a:endParaRPr lang="en-US" sz="900" dirty="0"/>
+          <p:cNvPr id="8" name="cuinotes-footer-mark"/>
+          <p:cNvSpPr txBox="1"/>
+          <p:nvPr/>
+        </p:nvSpPr>
+        <p:spPr>
+          <a:xfrm>
+            <a:off x="9951720" y="6455664"/>
+            <a:ext cx="2011680" cy="292608"/>
+          </a:xfrm>
+          <a:prstGeom prst="rect">
+            <a:avLst/>
+          </a:prstGeom>
+          <a:noFill/>
+        </p:spPr>
+        <p:txBody>
+          <a:bodyPr wrap="none" lIns="0" rIns="0" tIns="0" bIns="0">
+            <a:spAutoFit/>
+          </a:bodyPr>
+          <a:lstStyle/>
+          <a:p>
+            <a:pPr algn="r"/>
+            <a:r>
+              <a:rPr sz="1000">
+                <a:solidFill>
+                  <a:srgbClr val="8A939B"/>
+                </a:solidFill>
+                <a:hlinkClick r:id="rId3"/>
+              </a:rPr>
+              <a:t>cuinotes.com</a:t>
+            </a:r>
+            <a:r>
+              <a:rPr sz="1000">
+                <a:solidFill>
+                  <a:srgbClr val="8A939B"/>
+                </a:solidFill>
+              </a:rPr>
+              <a:t>  ·  13</a:t>
+            </a:r>
           </a:p>
         </p:txBody>
       </p:sp>
@@ -4933,6 +4774,10 @@
           </a:solidFill>
           <a:ln/>
         </p:spPr>
+        <p:txBody>
+          <a:bodyPr/>
+          <a:p/>
+        </p:txBody>
       </p:sp>
       <p:sp>
         <p:nvSpPr>
@@ -5058,79 +4903,44 @@
       </p:sp>
       <p:sp>
         <p:nvSpPr>
-          <p:cNvPr id="6" name="Text 4"/>
-          <p:cNvSpPr txBox="1"/>
-          <p:nvPr/>
-        </p:nvSpPr>
-        <p:spPr>
-          <a:xfrm>
-            <a:off x="640080" y="6446520"/>
-            <a:ext cx="8686800" cy="292608"/>
-          </a:xfrm>
-          <a:prstGeom prst="rect">
-            <a:avLst/>
-          </a:prstGeom>
-          <a:noFill/>
-          <a:ln/>
-        </p:spPr>
-        <p:txBody>
-          <a:bodyPr wrap="square" lIns="0" tIns="0" rIns="0" bIns="0" rtlCol="0" anchor="ctr"/>
-          <a:lstStyle/>
-          <a:p>
-            <a:pPr algn="l" indent="0" marL="0">
-              <a:buNone/>
-            </a:pPr>
-            <a:r>
-              <a:rPr lang="en-US" sz="900" dirty="0">
-                <a:solidFill>
-                  <a:srgbClr val="5D5D72"/>
-                </a:solidFill>
-                <a:latin typeface="Calibri" pitchFamily="34" charset="0"/>
-                <a:ea typeface="Calibri" pitchFamily="34" charset="-122"/>
-                <a:cs typeface="Calibri" pitchFamily="34" charset="-120"/>
-              </a:rPr>
-              <a:t>Usman Akram  •  COMSATS University Islamabad</a:t>
-            </a:r>
-            <a:endParaRPr lang="en-US" sz="900" dirty="0"/>
-          </a:p>
-        </p:txBody>
-      </p:sp>
-      <p:sp>
-        <p:nvSpPr>
-          <p:cNvPr id="7" name="Text 5"/>
-          <p:cNvSpPr txBox="1"/>
-          <p:nvPr/>
-        </p:nvSpPr>
-        <p:spPr>
-          <a:xfrm>
-            <a:off x="11155680" y="6446520"/>
-            <a:ext cx="457200" cy="292608"/>
-          </a:xfrm>
-          <a:prstGeom prst="rect">
-            <a:avLst/>
-          </a:prstGeom>
-          <a:noFill/>
-          <a:ln/>
-        </p:spPr>
-        <p:txBody>
-          <a:bodyPr wrap="square" lIns="0" tIns="0" rIns="0" bIns="0" rtlCol="0" anchor="ctr"/>
-          <a:lstStyle/>
-          <a:p>
-            <a:pPr algn="r" indent="0" marL="0">
-              <a:buNone/>
-            </a:pPr>
-            <a:r>
-              <a:rPr lang="en-US" sz="900" dirty="0">
-                <a:solidFill>
-                  <a:srgbClr val="5D5D72"/>
-                </a:solidFill>
-                <a:latin typeface="Calibri" pitchFamily="34" charset="0"/>
-                <a:ea typeface="Calibri" pitchFamily="34" charset="-122"/>
-                <a:cs typeface="Calibri" pitchFamily="34" charset="-120"/>
-              </a:rPr>
-              <a:t>14</a:t>
-            </a:r>
-            <a:endParaRPr lang="en-US" sz="900" dirty="0"/>
+          <p:cNvPr id="8" name="cuinotes-footer-mark"/>
+          <p:cNvSpPr txBox="1"/>
+          <p:nvPr/>
+        </p:nvSpPr>
+        <p:spPr>
+          <a:xfrm>
+            <a:off x="9951720" y="6455664"/>
+            <a:ext cx="2011680" cy="292608"/>
+          </a:xfrm>
+          <a:prstGeom prst="rect">
+            <a:avLst/>
+          </a:prstGeom>
+          <a:noFill/>
+        </p:spPr>
+        <p:txBody>
+          <a:bodyPr wrap="none" lIns="0" rIns="0" tIns="0" bIns="0">
+            <a:spAutoFit/>
+          </a:bodyPr>
+          <a:lstStyle/>
+          <a:p>
+            <a:pPr algn="r"/>
+            <a:r>
+              <a:rPr sz="1000">
+                <a:solidFill>
+                  <a:srgbClr val="8A939B"/>
+                </a:solidFill>
+                <a:hlinkClick r:id="rId3"/>
+              </a:rPr>
+              <a:t>cuinotes.com</a:t>
+            </a:r>
+            <a:r>
+              <a:rPr sz="1000">
+                <a:solidFill>
+                  <a:srgbClr val="8A939B"/>
+                </a:solidFill>
+              </a:rPr>
+              <a:t>  ·  14</a:t>
+            </a:r>
           </a:p>
         </p:txBody>
       </p:sp>
@@ -5270,6 +5080,10 @@
             <a:prstDash val="solid"/>
           </a:ln>
         </p:spPr>
+        <p:txBody>
+          <a:bodyPr/>
+          <a:p/>
+        </p:txBody>
       </p:sp>
       <p:sp>
         <p:nvSpPr>
@@ -5351,79 +5165,44 @@
       </p:sp>
       <p:sp>
         <p:nvSpPr>
-          <p:cNvPr id="7" name="Text 5"/>
-          <p:cNvSpPr txBox="1"/>
-          <p:nvPr/>
-        </p:nvSpPr>
-        <p:spPr>
-          <a:xfrm>
-            <a:off x="640080" y="6446520"/>
-            <a:ext cx="8686800" cy="292608"/>
-          </a:xfrm>
-          <a:prstGeom prst="rect">
-            <a:avLst/>
-          </a:prstGeom>
-          <a:noFill/>
-          <a:ln/>
-        </p:spPr>
-        <p:txBody>
-          <a:bodyPr wrap="square" lIns="0" tIns="0" rIns="0" bIns="0" rtlCol="0" anchor="ctr"/>
-          <a:lstStyle/>
-          <a:p>
-            <a:pPr algn="l" indent="0" marL="0">
-              <a:buNone/>
-            </a:pPr>
-            <a:r>
-              <a:rPr lang="en-US" sz="900" dirty="0">
-                <a:solidFill>
-                  <a:srgbClr val="5D5D72"/>
-                </a:solidFill>
-                <a:latin typeface="Calibri" pitchFamily="34" charset="0"/>
-                <a:ea typeface="Calibri" pitchFamily="34" charset="-122"/>
-                <a:cs typeface="Calibri" pitchFamily="34" charset="-120"/>
-              </a:rPr>
-              <a:t>Usman Akram  •  COMSATS University Islamabad</a:t>
-            </a:r>
-            <a:endParaRPr lang="en-US" sz="900" dirty="0"/>
-          </a:p>
-        </p:txBody>
-      </p:sp>
-      <p:sp>
-        <p:nvSpPr>
-          <p:cNvPr id="8" name="Text 6"/>
-          <p:cNvSpPr txBox="1"/>
-          <p:nvPr/>
-        </p:nvSpPr>
-        <p:spPr>
-          <a:xfrm>
-            <a:off x="11155680" y="6446520"/>
-            <a:ext cx="457200" cy="292608"/>
-          </a:xfrm>
-          <a:prstGeom prst="rect">
-            <a:avLst/>
-          </a:prstGeom>
-          <a:noFill/>
-          <a:ln/>
-        </p:spPr>
-        <p:txBody>
-          <a:bodyPr wrap="square" lIns="0" tIns="0" rIns="0" bIns="0" rtlCol="0" anchor="ctr"/>
-          <a:lstStyle/>
-          <a:p>
-            <a:pPr algn="r" indent="0" marL="0">
-              <a:buNone/>
-            </a:pPr>
-            <a:r>
-              <a:rPr lang="en-US" sz="900" dirty="0">
-                <a:solidFill>
-                  <a:srgbClr val="5D5D72"/>
-                </a:solidFill>
-                <a:latin typeface="Calibri" pitchFamily="34" charset="0"/>
-                <a:ea typeface="Calibri" pitchFamily="34" charset="-122"/>
-                <a:cs typeface="Calibri" pitchFamily="34" charset="-120"/>
-              </a:rPr>
-              <a:t>15</a:t>
-            </a:r>
-            <a:endParaRPr lang="en-US" sz="900" dirty="0"/>
+          <p:cNvPr id="9" name="cuinotes-footer-mark"/>
+          <p:cNvSpPr txBox="1"/>
+          <p:nvPr/>
+        </p:nvSpPr>
+        <p:spPr>
+          <a:xfrm>
+            <a:off x="9951720" y="6455664"/>
+            <a:ext cx="2011680" cy="292608"/>
+          </a:xfrm>
+          <a:prstGeom prst="rect">
+            <a:avLst/>
+          </a:prstGeom>
+          <a:noFill/>
+        </p:spPr>
+        <p:txBody>
+          <a:bodyPr wrap="none" lIns="0" rIns="0" tIns="0" bIns="0">
+            <a:spAutoFit/>
+          </a:bodyPr>
+          <a:lstStyle/>
+          <a:p>
+            <a:pPr algn="r"/>
+            <a:r>
+              <a:rPr sz="1000">
+                <a:solidFill>
+                  <a:srgbClr val="8A939B"/>
+                </a:solidFill>
+                <a:hlinkClick r:id="rId3"/>
+              </a:rPr>
+              <a:t>cuinotes.com</a:t>
+            </a:r>
+            <a:r>
+              <a:rPr sz="1000">
+                <a:solidFill>
+                  <a:srgbClr val="8A939B"/>
+                </a:solidFill>
+              </a:rPr>
+              <a:t>  ·  15</a:t>
+            </a:r>
           </a:p>
         </p:txBody>
       </p:sp>
@@ -5563,6 +5342,10 @@
             <a:prstDash val="solid"/>
           </a:ln>
         </p:spPr>
+        <p:txBody>
+          <a:bodyPr/>
+          <a:p/>
+        </p:txBody>
       </p:sp>
       <p:sp>
         <p:nvSpPr>
@@ -5644,79 +5427,44 @@
       </p:sp>
       <p:sp>
         <p:nvSpPr>
-          <p:cNvPr id="7" name="Text 5"/>
-          <p:cNvSpPr txBox="1"/>
-          <p:nvPr/>
-        </p:nvSpPr>
-        <p:spPr>
-          <a:xfrm>
-            <a:off x="640080" y="6446520"/>
-            <a:ext cx="8686800" cy="292608"/>
-          </a:xfrm>
-          <a:prstGeom prst="rect">
-            <a:avLst/>
-          </a:prstGeom>
-          <a:noFill/>
-          <a:ln/>
-        </p:spPr>
-        <p:txBody>
-          <a:bodyPr wrap="square" lIns="0" tIns="0" rIns="0" bIns="0" rtlCol="0" anchor="ctr"/>
-          <a:lstStyle/>
-          <a:p>
-            <a:pPr algn="l" indent="0" marL="0">
-              <a:buNone/>
-            </a:pPr>
-            <a:r>
-              <a:rPr lang="en-US" sz="900" dirty="0">
-                <a:solidFill>
-                  <a:srgbClr val="5D5D72"/>
-                </a:solidFill>
-                <a:latin typeface="Calibri" pitchFamily="34" charset="0"/>
-                <a:ea typeface="Calibri" pitchFamily="34" charset="-122"/>
-                <a:cs typeface="Calibri" pitchFamily="34" charset="-120"/>
-              </a:rPr>
-              <a:t>Usman Akram  •  COMSATS University Islamabad</a:t>
-            </a:r>
-            <a:endParaRPr lang="en-US" sz="900" dirty="0"/>
-          </a:p>
-        </p:txBody>
-      </p:sp>
-      <p:sp>
-        <p:nvSpPr>
-          <p:cNvPr id="8" name="Text 6"/>
-          <p:cNvSpPr txBox="1"/>
-          <p:nvPr/>
-        </p:nvSpPr>
-        <p:spPr>
-          <a:xfrm>
-            <a:off x="11155680" y="6446520"/>
-            <a:ext cx="457200" cy="292608"/>
-          </a:xfrm>
-          <a:prstGeom prst="rect">
-            <a:avLst/>
-          </a:prstGeom>
-          <a:noFill/>
-          <a:ln/>
-        </p:spPr>
-        <p:txBody>
-          <a:bodyPr wrap="square" lIns="0" tIns="0" rIns="0" bIns="0" rtlCol="0" anchor="ctr"/>
-          <a:lstStyle/>
-          <a:p>
-            <a:pPr algn="r" indent="0" marL="0">
-              <a:buNone/>
-            </a:pPr>
-            <a:r>
-              <a:rPr lang="en-US" sz="900" dirty="0">
-                <a:solidFill>
-                  <a:srgbClr val="5D5D72"/>
-                </a:solidFill>
-                <a:latin typeface="Calibri" pitchFamily="34" charset="0"/>
-                <a:ea typeface="Calibri" pitchFamily="34" charset="-122"/>
-                <a:cs typeface="Calibri" pitchFamily="34" charset="-120"/>
-              </a:rPr>
-              <a:t>16</a:t>
-            </a:r>
-            <a:endParaRPr lang="en-US" sz="900" dirty="0"/>
+          <p:cNvPr id="9" name="cuinotes-footer-mark"/>
+          <p:cNvSpPr txBox="1"/>
+          <p:nvPr/>
+        </p:nvSpPr>
+        <p:spPr>
+          <a:xfrm>
+            <a:off x="9951720" y="6455664"/>
+            <a:ext cx="2011680" cy="292608"/>
+          </a:xfrm>
+          <a:prstGeom prst="rect">
+            <a:avLst/>
+          </a:prstGeom>
+          <a:noFill/>
+        </p:spPr>
+        <p:txBody>
+          <a:bodyPr wrap="none" lIns="0" rIns="0" tIns="0" bIns="0">
+            <a:spAutoFit/>
+          </a:bodyPr>
+          <a:lstStyle/>
+          <a:p>
+            <a:pPr algn="r"/>
+            <a:r>
+              <a:rPr sz="1000">
+                <a:solidFill>
+                  <a:srgbClr val="8A939B"/>
+                </a:solidFill>
+                <a:hlinkClick r:id="rId3"/>
+              </a:rPr>
+              <a:t>cuinotes.com</a:t>
+            </a:r>
+            <a:r>
+              <a:rPr sz="1000">
+                <a:solidFill>
+                  <a:srgbClr val="8A939B"/>
+                </a:solidFill>
+              </a:rPr>
+              <a:t>  ·  16</a:t>
+            </a:r>
           </a:p>
         </p:txBody>
       </p:sp>
@@ -5851,6 +5599,10 @@
           </a:solidFill>
           <a:ln/>
         </p:spPr>
+        <p:txBody>
+          <a:bodyPr/>
+          <a:p/>
+        </p:txBody>
       </p:sp>
       <p:sp>
         <p:nvSpPr>
@@ -6075,79 +5827,44 @@
       </p:sp>
       <p:sp>
         <p:nvSpPr>
-          <p:cNvPr id="7" name="Text 5"/>
-          <p:cNvSpPr txBox="1"/>
-          <p:nvPr/>
-        </p:nvSpPr>
-        <p:spPr>
-          <a:xfrm>
-            <a:off x="640080" y="6446520"/>
-            <a:ext cx="8686800" cy="292608"/>
-          </a:xfrm>
-          <a:prstGeom prst="rect">
-            <a:avLst/>
-          </a:prstGeom>
-          <a:noFill/>
-          <a:ln/>
-        </p:spPr>
-        <p:txBody>
-          <a:bodyPr wrap="square" lIns="0" tIns="0" rIns="0" bIns="0" rtlCol="0" anchor="ctr"/>
-          <a:lstStyle/>
-          <a:p>
-            <a:pPr algn="l" indent="0" marL="0">
-              <a:buNone/>
-            </a:pPr>
-            <a:r>
-              <a:rPr lang="en-US" sz="900" dirty="0">
-                <a:solidFill>
-                  <a:srgbClr val="5D5D72"/>
-                </a:solidFill>
-                <a:latin typeface="Calibri" pitchFamily="34" charset="0"/>
-                <a:ea typeface="Calibri" pitchFamily="34" charset="-122"/>
-                <a:cs typeface="Calibri" pitchFamily="34" charset="-120"/>
-              </a:rPr>
-              <a:t>Usman Akram  •  COMSATS University Islamabad</a:t>
-            </a:r>
-            <a:endParaRPr lang="en-US" sz="900" dirty="0"/>
-          </a:p>
-        </p:txBody>
-      </p:sp>
-      <p:sp>
-        <p:nvSpPr>
-          <p:cNvPr id="8" name="Text 6"/>
-          <p:cNvSpPr txBox="1"/>
-          <p:nvPr/>
-        </p:nvSpPr>
-        <p:spPr>
-          <a:xfrm>
-            <a:off x="11155680" y="6446520"/>
-            <a:ext cx="457200" cy="292608"/>
-          </a:xfrm>
-          <a:prstGeom prst="rect">
-            <a:avLst/>
-          </a:prstGeom>
-          <a:noFill/>
-          <a:ln/>
-        </p:spPr>
-        <p:txBody>
-          <a:bodyPr wrap="square" lIns="0" tIns="0" rIns="0" bIns="0" rtlCol="0" anchor="ctr"/>
-          <a:lstStyle/>
-          <a:p>
-            <a:pPr algn="r" indent="0" marL="0">
-              <a:buNone/>
-            </a:pPr>
-            <a:r>
-              <a:rPr lang="en-US" sz="900" dirty="0">
-                <a:solidFill>
-                  <a:srgbClr val="5D5D72"/>
-                </a:solidFill>
-                <a:latin typeface="Calibri" pitchFamily="34" charset="0"/>
-                <a:ea typeface="Calibri" pitchFamily="34" charset="-122"/>
-                <a:cs typeface="Calibri" pitchFamily="34" charset="-120"/>
-              </a:rPr>
-              <a:t>17</a:t>
-            </a:r>
-            <a:endParaRPr lang="en-US" sz="900" dirty="0"/>
+          <p:cNvPr id="9" name="cuinotes-footer-mark"/>
+          <p:cNvSpPr txBox="1"/>
+          <p:nvPr/>
+        </p:nvSpPr>
+        <p:spPr>
+          <a:xfrm>
+            <a:off x="9951720" y="6455664"/>
+            <a:ext cx="2011680" cy="292608"/>
+          </a:xfrm>
+          <a:prstGeom prst="rect">
+            <a:avLst/>
+          </a:prstGeom>
+          <a:noFill/>
+        </p:spPr>
+        <p:txBody>
+          <a:bodyPr wrap="none" lIns="0" rIns="0" tIns="0" bIns="0">
+            <a:spAutoFit/>
+          </a:bodyPr>
+          <a:lstStyle/>
+          <a:p>
+            <a:pPr algn="r"/>
+            <a:r>
+              <a:rPr sz="1000">
+                <a:solidFill>
+                  <a:srgbClr val="8A939B"/>
+                </a:solidFill>
+                <a:hlinkClick r:id="rId3"/>
+              </a:rPr>
+              <a:t>cuinotes.com</a:t>
+            </a:r>
+            <a:r>
+              <a:rPr sz="1000">
+                <a:solidFill>
+                  <a:srgbClr val="8A939B"/>
+                </a:solidFill>
+              </a:rPr>
+              <a:t>  ·  17</a:t>
+            </a:r>
           </a:p>
         </p:txBody>
       </p:sp>
@@ -6280,6 +5997,10 @@
           </a:solidFill>
           <a:ln/>
         </p:spPr>
+        <p:txBody>
+          <a:bodyPr/>
+          <a:p/>
+        </p:txBody>
       </p:sp>
       <p:sp>
         <p:nvSpPr>
@@ -6378,6 +6099,10 @@
           </a:solidFill>
           <a:ln/>
         </p:spPr>
+        <p:txBody>
+          <a:bodyPr/>
+          <a:p/>
+        </p:txBody>
       </p:sp>
       <p:sp>
         <p:nvSpPr>
@@ -6476,6 +6201,10 @@
           </a:solidFill>
           <a:ln/>
         </p:spPr>
+        <p:txBody>
+          <a:bodyPr/>
+          <a:p/>
+        </p:txBody>
       </p:sp>
       <p:sp>
         <p:nvSpPr>
@@ -6574,6 +6303,10 @@
           </a:solidFill>
           <a:ln/>
         </p:spPr>
+        <p:txBody>
+          <a:bodyPr/>
+          <a:p/>
+        </p:txBody>
       </p:sp>
       <p:sp>
         <p:nvSpPr>
@@ -6672,6 +6405,10 @@
           </a:solidFill>
           <a:ln/>
         </p:spPr>
+        <p:txBody>
+          <a:bodyPr/>
+          <a:p/>
+        </p:txBody>
       </p:sp>
       <p:sp>
         <p:nvSpPr>
@@ -6753,79 +6490,44 @@
       </p:sp>
       <p:sp>
         <p:nvSpPr>
-          <p:cNvPr id="19" name="Text 17"/>
-          <p:cNvSpPr txBox="1"/>
-          <p:nvPr/>
-        </p:nvSpPr>
-        <p:spPr>
-          <a:xfrm>
-            <a:off x="640080" y="6446520"/>
-            <a:ext cx="8686800" cy="292608"/>
-          </a:xfrm>
-          <a:prstGeom prst="rect">
-            <a:avLst/>
-          </a:prstGeom>
-          <a:noFill/>
-          <a:ln/>
-        </p:spPr>
-        <p:txBody>
-          <a:bodyPr wrap="square" lIns="0" tIns="0" rIns="0" bIns="0" rtlCol="0" anchor="ctr"/>
-          <a:lstStyle/>
-          <a:p>
-            <a:pPr algn="l" indent="0" marL="0">
-              <a:buNone/>
-            </a:pPr>
-            <a:r>
-              <a:rPr lang="en-US" sz="900" dirty="0">
-                <a:solidFill>
-                  <a:srgbClr val="5D5D72"/>
-                </a:solidFill>
-                <a:latin typeface="Calibri" pitchFamily="34" charset="0"/>
-                <a:ea typeface="Calibri" pitchFamily="34" charset="-122"/>
-                <a:cs typeface="Calibri" pitchFamily="34" charset="-120"/>
-              </a:rPr>
-              <a:t>Usman Akram  •  COMSATS University Islamabad</a:t>
-            </a:r>
-            <a:endParaRPr lang="en-US" sz="900" dirty="0"/>
-          </a:p>
-        </p:txBody>
-      </p:sp>
-      <p:sp>
-        <p:nvSpPr>
-          <p:cNvPr id="20" name="Text 18"/>
-          <p:cNvSpPr txBox="1"/>
-          <p:nvPr/>
-        </p:nvSpPr>
-        <p:spPr>
-          <a:xfrm>
-            <a:off x="11155680" y="6446520"/>
-            <a:ext cx="457200" cy="292608"/>
-          </a:xfrm>
-          <a:prstGeom prst="rect">
-            <a:avLst/>
-          </a:prstGeom>
-          <a:noFill/>
-          <a:ln/>
-        </p:spPr>
-        <p:txBody>
-          <a:bodyPr wrap="square" lIns="0" tIns="0" rIns="0" bIns="0" rtlCol="0" anchor="ctr"/>
-          <a:lstStyle/>
-          <a:p>
-            <a:pPr algn="r" indent="0" marL="0">
-              <a:buNone/>
-            </a:pPr>
-            <a:r>
-              <a:rPr lang="en-US" sz="900" dirty="0">
-                <a:solidFill>
-                  <a:srgbClr val="5D5D72"/>
-                </a:solidFill>
-                <a:latin typeface="Calibri" pitchFamily="34" charset="0"/>
-                <a:ea typeface="Calibri" pitchFamily="34" charset="-122"/>
-                <a:cs typeface="Calibri" pitchFamily="34" charset="-120"/>
-              </a:rPr>
-              <a:t>18</a:t>
-            </a:r>
-            <a:endParaRPr lang="en-US" sz="900" dirty="0"/>
+          <p:cNvPr id="21" name="cuinotes-footer-mark"/>
+          <p:cNvSpPr txBox="1"/>
+          <p:nvPr/>
+        </p:nvSpPr>
+        <p:spPr>
+          <a:xfrm>
+            <a:off x="9951720" y="6455664"/>
+            <a:ext cx="2011680" cy="292608"/>
+          </a:xfrm>
+          <a:prstGeom prst="rect">
+            <a:avLst/>
+          </a:prstGeom>
+          <a:noFill/>
+        </p:spPr>
+        <p:txBody>
+          <a:bodyPr wrap="none" lIns="0" rIns="0" tIns="0" bIns="0">
+            <a:spAutoFit/>
+          </a:bodyPr>
+          <a:lstStyle/>
+          <a:p>
+            <a:pPr algn="r"/>
+            <a:r>
+              <a:rPr sz="1000">
+                <a:solidFill>
+                  <a:srgbClr val="8A939B"/>
+                </a:solidFill>
+                <a:hlinkClick r:id="rId3"/>
+              </a:rPr>
+              <a:t>cuinotes.com</a:t>
+            </a:r>
+            <a:r>
+              <a:rPr sz="1000">
+                <a:solidFill>
+                  <a:srgbClr val="8A939B"/>
+                </a:solidFill>
+              </a:rPr>
+              <a:t>  ·  18</a:t>
+            </a:r>
           </a:p>
         </p:txBody>
       </p:sp>
@@ -6960,6 +6662,10 @@
           </a:solidFill>
           <a:ln/>
         </p:spPr>
+        <p:txBody>
+          <a:bodyPr/>
+          <a:p/>
+        </p:txBody>
       </p:sp>
       <p:sp>
         <p:nvSpPr>
@@ -7040,6 +6746,10 @@
             <a:tailEnd type="triangle"/>
           </a:ln>
         </p:spPr>
+        <p:txBody>
+          <a:bodyPr/>
+          <a:p/>
+        </p:txBody>
       </p:sp>
       <p:sp>
         <p:nvSpPr>
@@ -7062,6 +6772,10 @@
           </a:solidFill>
           <a:ln/>
         </p:spPr>
+        <p:txBody>
+          <a:bodyPr/>
+          <a:p/>
+        </p:txBody>
       </p:sp>
       <p:sp>
         <p:nvSpPr>
@@ -7142,6 +6856,10 @@
             <a:tailEnd type="triangle"/>
           </a:ln>
         </p:spPr>
+        <p:txBody>
+          <a:bodyPr/>
+          <a:p/>
+        </p:txBody>
       </p:sp>
       <p:sp>
         <p:nvSpPr>
@@ -7164,6 +6882,10 @@
           </a:solidFill>
           <a:ln/>
         </p:spPr>
+        <p:txBody>
+          <a:bodyPr/>
+          <a:p/>
+        </p:txBody>
       </p:sp>
       <p:sp>
         <p:nvSpPr>
@@ -7244,6 +6966,10 @@
             <a:tailEnd type="triangle"/>
           </a:ln>
         </p:spPr>
+        <p:txBody>
+          <a:bodyPr/>
+          <a:p/>
+        </p:txBody>
       </p:sp>
       <p:sp>
         <p:nvSpPr>
@@ -7266,6 +6992,10 @@
           </a:solidFill>
           <a:ln/>
         </p:spPr>
+        <p:txBody>
+          <a:bodyPr/>
+          <a:p/>
+        </p:txBody>
       </p:sp>
       <p:sp>
         <p:nvSpPr>
@@ -7364,79 +7094,44 @@
       </p:sp>
       <p:sp>
         <p:nvSpPr>
-          <p:cNvPr id="16" name="Text 14"/>
-          <p:cNvSpPr txBox="1"/>
-          <p:nvPr/>
-        </p:nvSpPr>
-        <p:spPr>
-          <a:xfrm>
-            <a:off x="640080" y="6446520"/>
-            <a:ext cx="8686800" cy="292608"/>
-          </a:xfrm>
-          <a:prstGeom prst="rect">
-            <a:avLst/>
-          </a:prstGeom>
-          <a:noFill/>
-          <a:ln/>
-        </p:spPr>
-        <p:txBody>
-          <a:bodyPr wrap="square" lIns="0" tIns="0" rIns="0" bIns="0" rtlCol="0" anchor="ctr"/>
-          <a:lstStyle/>
-          <a:p>
-            <a:pPr algn="l" indent="0" marL="0">
-              <a:buNone/>
-            </a:pPr>
-            <a:r>
-              <a:rPr lang="en-US" sz="900" dirty="0">
-                <a:solidFill>
-                  <a:srgbClr val="5D5D72"/>
-                </a:solidFill>
-                <a:latin typeface="Calibri" pitchFamily="34" charset="0"/>
-                <a:ea typeface="Calibri" pitchFamily="34" charset="-122"/>
-                <a:cs typeface="Calibri" pitchFamily="34" charset="-120"/>
-              </a:rPr>
-              <a:t>Usman Akram  •  COMSATS University Islamabad</a:t>
-            </a:r>
-            <a:endParaRPr lang="en-US" sz="900" dirty="0"/>
-          </a:p>
-        </p:txBody>
-      </p:sp>
-      <p:sp>
-        <p:nvSpPr>
-          <p:cNvPr id="17" name="Text 15"/>
-          <p:cNvSpPr txBox="1"/>
-          <p:nvPr/>
-        </p:nvSpPr>
-        <p:spPr>
-          <a:xfrm>
-            <a:off x="11155680" y="6446520"/>
-            <a:ext cx="457200" cy="292608"/>
-          </a:xfrm>
-          <a:prstGeom prst="rect">
-            <a:avLst/>
-          </a:prstGeom>
-          <a:noFill/>
-          <a:ln/>
-        </p:spPr>
-        <p:txBody>
-          <a:bodyPr wrap="square" lIns="0" tIns="0" rIns="0" bIns="0" rtlCol="0" anchor="ctr"/>
-          <a:lstStyle/>
-          <a:p>
-            <a:pPr algn="r" indent="0" marL="0">
-              <a:buNone/>
-            </a:pPr>
-            <a:r>
-              <a:rPr lang="en-US" sz="900" dirty="0">
-                <a:solidFill>
-                  <a:srgbClr val="5D5D72"/>
-                </a:solidFill>
-                <a:latin typeface="Calibri" pitchFamily="34" charset="0"/>
-                <a:ea typeface="Calibri" pitchFamily="34" charset="-122"/>
-                <a:cs typeface="Calibri" pitchFamily="34" charset="-120"/>
-              </a:rPr>
-              <a:t>19</a:t>
-            </a:r>
-            <a:endParaRPr lang="en-US" sz="900" dirty="0"/>
+          <p:cNvPr id="18" name="cuinotes-footer-mark"/>
+          <p:cNvSpPr txBox="1"/>
+          <p:nvPr/>
+        </p:nvSpPr>
+        <p:spPr>
+          <a:xfrm>
+            <a:off x="9951720" y="6455664"/>
+            <a:ext cx="2011680" cy="292608"/>
+          </a:xfrm>
+          <a:prstGeom prst="rect">
+            <a:avLst/>
+          </a:prstGeom>
+          <a:noFill/>
+        </p:spPr>
+        <p:txBody>
+          <a:bodyPr wrap="none" lIns="0" rIns="0" tIns="0" bIns="0">
+            <a:spAutoFit/>
+          </a:bodyPr>
+          <a:lstStyle/>
+          <a:p>
+            <a:pPr algn="r"/>
+            <a:r>
+              <a:rPr sz="1000">
+                <a:solidFill>
+                  <a:srgbClr val="8A939B"/>
+                </a:solidFill>
+                <a:hlinkClick r:id="rId3"/>
+              </a:rPr>
+              <a:t>cuinotes.com</a:t>
+            </a:r>
+            <a:r>
+              <a:rPr sz="1000">
+                <a:solidFill>
+                  <a:srgbClr val="8A939B"/>
+                </a:solidFill>
+              </a:rPr>
+              <a:t>  ·  19</a:t>
+            </a:r>
           </a:p>
         </p:txBody>
       </p:sp>
@@ -7569,6 +7264,10 @@
           </a:solidFill>
           <a:ln/>
         </p:spPr>
+        <p:txBody>
+          <a:bodyPr/>
+          <a:p/>
+        </p:txBody>
       </p:sp>
       <p:sp>
         <p:nvSpPr>
@@ -7667,6 +7366,10 @@
           </a:solidFill>
           <a:ln/>
         </p:spPr>
+        <p:txBody>
+          <a:bodyPr/>
+          <a:p/>
+        </p:txBody>
       </p:sp>
       <p:sp>
         <p:nvSpPr>
@@ -7765,6 +7468,10 @@
           </a:solidFill>
           <a:ln/>
         </p:spPr>
+        <p:txBody>
+          <a:bodyPr/>
+          <a:p/>
+        </p:txBody>
       </p:sp>
       <p:sp>
         <p:nvSpPr>
@@ -7863,6 +7570,10 @@
           </a:solidFill>
           <a:ln/>
         </p:spPr>
+        <p:txBody>
+          <a:bodyPr/>
+          <a:p/>
+        </p:txBody>
       </p:sp>
       <p:sp>
         <p:nvSpPr>
@@ -7961,6 +7672,10 @@
           </a:solidFill>
           <a:ln/>
         </p:spPr>
+        <p:txBody>
+          <a:bodyPr/>
+          <a:p/>
+        </p:txBody>
       </p:sp>
       <p:sp>
         <p:nvSpPr>
@@ -8042,79 +7757,44 @@
       </p:sp>
       <p:sp>
         <p:nvSpPr>
-          <p:cNvPr id="19" name="Text 17"/>
-          <p:cNvSpPr txBox="1"/>
-          <p:nvPr/>
-        </p:nvSpPr>
-        <p:spPr>
-          <a:xfrm>
-            <a:off x="640080" y="6446520"/>
-            <a:ext cx="8686800" cy="292608"/>
-          </a:xfrm>
-          <a:prstGeom prst="rect">
-            <a:avLst/>
-          </a:prstGeom>
-          <a:noFill/>
-          <a:ln/>
-        </p:spPr>
-        <p:txBody>
-          <a:bodyPr wrap="square" lIns="0" tIns="0" rIns="0" bIns="0" rtlCol="0" anchor="ctr"/>
-          <a:lstStyle/>
-          <a:p>
-            <a:pPr algn="l" indent="0" marL="0">
-              <a:buNone/>
-            </a:pPr>
-            <a:r>
-              <a:rPr lang="en-US" sz="900" dirty="0">
-                <a:solidFill>
-                  <a:srgbClr val="5D5D72"/>
-                </a:solidFill>
-                <a:latin typeface="Calibri" pitchFamily="34" charset="0"/>
-                <a:ea typeface="Calibri" pitchFamily="34" charset="-122"/>
-                <a:cs typeface="Calibri" pitchFamily="34" charset="-120"/>
-              </a:rPr>
-              <a:t>Usman Akram  •  COMSATS University Islamabad</a:t>
-            </a:r>
-            <a:endParaRPr lang="en-US" sz="900" dirty="0"/>
-          </a:p>
-        </p:txBody>
-      </p:sp>
-      <p:sp>
-        <p:nvSpPr>
-          <p:cNvPr id="20" name="Text 18"/>
-          <p:cNvSpPr txBox="1"/>
-          <p:nvPr/>
-        </p:nvSpPr>
-        <p:spPr>
-          <a:xfrm>
-            <a:off x="11155680" y="6446520"/>
-            <a:ext cx="457200" cy="292608"/>
-          </a:xfrm>
-          <a:prstGeom prst="rect">
-            <a:avLst/>
-          </a:prstGeom>
-          <a:noFill/>
-          <a:ln/>
-        </p:spPr>
-        <p:txBody>
-          <a:bodyPr wrap="square" lIns="0" tIns="0" rIns="0" bIns="0" rtlCol="0" anchor="ctr"/>
-          <a:lstStyle/>
-          <a:p>
-            <a:pPr algn="r" indent="0" marL="0">
-              <a:buNone/>
-            </a:pPr>
-            <a:r>
-              <a:rPr lang="en-US" sz="900" dirty="0">
-                <a:solidFill>
-                  <a:srgbClr val="5D5D72"/>
-                </a:solidFill>
-                <a:latin typeface="Calibri" pitchFamily="34" charset="0"/>
-                <a:ea typeface="Calibri" pitchFamily="34" charset="-122"/>
-                <a:cs typeface="Calibri" pitchFamily="34" charset="-120"/>
-              </a:rPr>
-              <a:t>2</a:t>
-            </a:r>
-            <a:endParaRPr lang="en-US" sz="900" dirty="0"/>
+          <p:cNvPr id="21" name="cuinotes-footer-mark"/>
+          <p:cNvSpPr txBox="1"/>
+          <p:nvPr/>
+        </p:nvSpPr>
+        <p:spPr>
+          <a:xfrm>
+            <a:off x="9951720" y="6455664"/>
+            <a:ext cx="2011680" cy="292608"/>
+          </a:xfrm>
+          <a:prstGeom prst="rect">
+            <a:avLst/>
+          </a:prstGeom>
+          <a:noFill/>
+        </p:spPr>
+        <p:txBody>
+          <a:bodyPr wrap="none" lIns="0" rIns="0" tIns="0" bIns="0">
+            <a:spAutoFit/>
+          </a:bodyPr>
+          <a:lstStyle/>
+          <a:p>
+            <a:pPr algn="r"/>
+            <a:r>
+              <a:rPr sz="1000">
+                <a:solidFill>
+                  <a:srgbClr val="8A939B"/>
+                </a:solidFill>
+                <a:hlinkClick r:id="rId3"/>
+              </a:rPr>
+              <a:t>cuinotes.com</a:t>
+            </a:r>
+            <a:r>
+              <a:rPr sz="1000">
+                <a:solidFill>
+                  <a:srgbClr val="8A939B"/>
+                </a:solidFill>
+              </a:rPr>
+              <a:t>  ·  2</a:t>
+            </a:r>
           </a:p>
         </p:txBody>
       </p:sp>
@@ -8249,6 +7929,10 @@
           </a:solidFill>
           <a:ln/>
         </p:spPr>
+        <p:txBody>
+          <a:bodyPr/>
+          <a:p/>
+        </p:txBody>
       </p:sp>
       <p:sp>
         <p:nvSpPr>
@@ -8492,79 +8176,44 @@
       </p:sp>
       <p:sp>
         <p:nvSpPr>
-          <p:cNvPr id="6" name="Text 4"/>
-          <p:cNvSpPr txBox="1"/>
-          <p:nvPr/>
-        </p:nvSpPr>
-        <p:spPr>
-          <a:xfrm>
-            <a:off x="640080" y="6446520"/>
-            <a:ext cx="8686800" cy="292608"/>
-          </a:xfrm>
-          <a:prstGeom prst="rect">
-            <a:avLst/>
-          </a:prstGeom>
-          <a:noFill/>
-          <a:ln/>
-        </p:spPr>
-        <p:txBody>
-          <a:bodyPr wrap="square" lIns="0" tIns="0" rIns="0" bIns="0" rtlCol="0" anchor="ctr"/>
-          <a:lstStyle/>
-          <a:p>
-            <a:pPr algn="l" indent="0" marL="0">
-              <a:buNone/>
-            </a:pPr>
-            <a:r>
-              <a:rPr lang="en-US" sz="900" dirty="0">
-                <a:solidFill>
-                  <a:srgbClr val="5D5D72"/>
-                </a:solidFill>
-                <a:latin typeface="Calibri" pitchFamily="34" charset="0"/>
-                <a:ea typeface="Calibri" pitchFamily="34" charset="-122"/>
-                <a:cs typeface="Calibri" pitchFamily="34" charset="-120"/>
-              </a:rPr>
-              <a:t>Usman Akram  •  COMSATS University Islamabad</a:t>
-            </a:r>
-            <a:endParaRPr lang="en-US" sz="900" dirty="0"/>
-          </a:p>
-        </p:txBody>
-      </p:sp>
-      <p:sp>
-        <p:nvSpPr>
-          <p:cNvPr id="7" name="Text 5"/>
-          <p:cNvSpPr txBox="1"/>
-          <p:nvPr/>
-        </p:nvSpPr>
-        <p:spPr>
-          <a:xfrm>
-            <a:off x="11155680" y="6446520"/>
-            <a:ext cx="457200" cy="292608"/>
-          </a:xfrm>
-          <a:prstGeom prst="rect">
-            <a:avLst/>
-          </a:prstGeom>
-          <a:noFill/>
-          <a:ln/>
-        </p:spPr>
-        <p:txBody>
-          <a:bodyPr wrap="square" lIns="0" tIns="0" rIns="0" bIns="0" rtlCol="0" anchor="ctr"/>
-          <a:lstStyle/>
-          <a:p>
-            <a:pPr algn="r" indent="0" marL="0">
-              <a:buNone/>
-            </a:pPr>
-            <a:r>
-              <a:rPr lang="en-US" sz="900" dirty="0">
-                <a:solidFill>
-                  <a:srgbClr val="5D5D72"/>
-                </a:solidFill>
-                <a:latin typeface="Calibri" pitchFamily="34" charset="0"/>
-                <a:ea typeface="Calibri" pitchFamily="34" charset="-122"/>
-                <a:cs typeface="Calibri" pitchFamily="34" charset="-120"/>
-              </a:rPr>
-              <a:t>20</a:t>
-            </a:r>
-            <a:endParaRPr lang="en-US" sz="900" dirty="0"/>
+          <p:cNvPr id="8" name="cuinotes-footer-mark"/>
+          <p:cNvSpPr txBox="1"/>
+          <p:nvPr/>
+        </p:nvSpPr>
+        <p:spPr>
+          <a:xfrm>
+            <a:off x="9951720" y="6455664"/>
+            <a:ext cx="2011680" cy="292608"/>
+          </a:xfrm>
+          <a:prstGeom prst="rect">
+            <a:avLst/>
+          </a:prstGeom>
+          <a:noFill/>
+        </p:spPr>
+        <p:txBody>
+          <a:bodyPr wrap="none" lIns="0" rIns="0" tIns="0" bIns="0">
+            <a:spAutoFit/>
+          </a:bodyPr>
+          <a:lstStyle/>
+          <a:p>
+            <a:pPr algn="r"/>
+            <a:r>
+              <a:rPr sz="1000">
+                <a:solidFill>
+                  <a:srgbClr val="8A939B"/>
+                </a:solidFill>
+                <a:hlinkClick r:id="rId3"/>
+              </a:rPr>
+              <a:t>cuinotes.com</a:t>
+            </a:r>
+            <a:r>
+              <a:rPr sz="1000">
+                <a:solidFill>
+                  <a:srgbClr val="8A939B"/>
+                </a:solidFill>
+              </a:rPr>
+              <a:t>  ·  20</a:t>
+            </a:r>
           </a:p>
         </p:txBody>
       </p:sp>
@@ -8699,6 +8348,10 @@
           </a:solidFill>
           <a:ln/>
         </p:spPr>
+        <p:txBody>
+          <a:bodyPr/>
+          <a:p/>
+        </p:txBody>
       </p:sp>
       <p:sp>
         <p:nvSpPr>
@@ -8804,79 +8457,44 @@
       </p:sp>
       <p:sp>
         <p:nvSpPr>
-          <p:cNvPr id="6" name="Text 4"/>
-          <p:cNvSpPr txBox="1"/>
-          <p:nvPr/>
-        </p:nvSpPr>
-        <p:spPr>
-          <a:xfrm>
-            <a:off x="640080" y="6446520"/>
-            <a:ext cx="8686800" cy="292608"/>
-          </a:xfrm>
-          <a:prstGeom prst="rect">
-            <a:avLst/>
-          </a:prstGeom>
-          <a:noFill/>
-          <a:ln/>
-        </p:spPr>
-        <p:txBody>
-          <a:bodyPr wrap="square" lIns="0" tIns="0" rIns="0" bIns="0" rtlCol="0" anchor="ctr"/>
-          <a:lstStyle/>
-          <a:p>
-            <a:pPr algn="l" indent="0" marL="0">
-              <a:buNone/>
-            </a:pPr>
-            <a:r>
-              <a:rPr lang="en-US" sz="900" dirty="0">
-                <a:solidFill>
-                  <a:srgbClr val="5D5D72"/>
-                </a:solidFill>
-                <a:latin typeface="Calibri" pitchFamily="34" charset="0"/>
-                <a:ea typeface="Calibri" pitchFamily="34" charset="-122"/>
-                <a:cs typeface="Calibri" pitchFamily="34" charset="-120"/>
-              </a:rPr>
-              <a:t>Usman Akram  •  COMSATS University Islamabad</a:t>
-            </a:r>
-            <a:endParaRPr lang="en-US" sz="900" dirty="0"/>
-          </a:p>
-        </p:txBody>
-      </p:sp>
-      <p:sp>
-        <p:nvSpPr>
-          <p:cNvPr id="7" name="Text 5"/>
-          <p:cNvSpPr txBox="1"/>
-          <p:nvPr/>
-        </p:nvSpPr>
-        <p:spPr>
-          <a:xfrm>
-            <a:off x="11155680" y="6446520"/>
-            <a:ext cx="457200" cy="292608"/>
-          </a:xfrm>
-          <a:prstGeom prst="rect">
-            <a:avLst/>
-          </a:prstGeom>
-          <a:noFill/>
-          <a:ln/>
-        </p:spPr>
-        <p:txBody>
-          <a:bodyPr wrap="square" lIns="0" tIns="0" rIns="0" bIns="0" rtlCol="0" anchor="ctr"/>
-          <a:lstStyle/>
-          <a:p>
-            <a:pPr algn="r" indent="0" marL="0">
-              <a:buNone/>
-            </a:pPr>
-            <a:r>
-              <a:rPr lang="en-US" sz="900" dirty="0">
-                <a:solidFill>
-                  <a:srgbClr val="5D5D72"/>
-                </a:solidFill>
-                <a:latin typeface="Calibri" pitchFamily="34" charset="0"/>
-                <a:ea typeface="Calibri" pitchFamily="34" charset="-122"/>
-                <a:cs typeface="Calibri" pitchFamily="34" charset="-120"/>
-              </a:rPr>
-              <a:t>21</a:t>
-            </a:r>
-            <a:endParaRPr lang="en-US" sz="900" dirty="0"/>
+          <p:cNvPr id="8" name="cuinotes-footer-mark"/>
+          <p:cNvSpPr txBox="1"/>
+          <p:nvPr/>
+        </p:nvSpPr>
+        <p:spPr>
+          <a:xfrm>
+            <a:off x="9951720" y="6455664"/>
+            <a:ext cx="2011680" cy="292608"/>
+          </a:xfrm>
+          <a:prstGeom prst="rect">
+            <a:avLst/>
+          </a:prstGeom>
+          <a:noFill/>
+        </p:spPr>
+        <p:txBody>
+          <a:bodyPr wrap="none" lIns="0" rIns="0" tIns="0" bIns="0">
+            <a:spAutoFit/>
+          </a:bodyPr>
+          <a:lstStyle/>
+          <a:p>
+            <a:pPr algn="r"/>
+            <a:r>
+              <a:rPr sz="1000">
+                <a:solidFill>
+                  <a:srgbClr val="8A939B"/>
+                </a:solidFill>
+                <a:hlinkClick r:id="rId3"/>
+              </a:rPr>
+              <a:t>cuinotes.com</a:t>
+            </a:r>
+            <a:r>
+              <a:rPr sz="1000">
+                <a:solidFill>
+                  <a:srgbClr val="8A939B"/>
+                </a:solidFill>
+              </a:rPr>
+              <a:t>  ·  21</a:t>
+            </a:r>
           </a:p>
         </p:txBody>
       </p:sp>
@@ -9016,6 +8634,10 @@
             <a:prstDash val="solid"/>
           </a:ln>
         </p:spPr>
+        <p:txBody>
+          <a:bodyPr/>
+          <a:p/>
+        </p:txBody>
       </p:sp>
       <p:sp>
         <p:nvSpPr>
@@ -9097,79 +8719,44 @@
       </p:sp>
       <p:sp>
         <p:nvSpPr>
-          <p:cNvPr id="7" name="Text 5"/>
-          <p:cNvSpPr txBox="1"/>
-          <p:nvPr/>
-        </p:nvSpPr>
-        <p:spPr>
-          <a:xfrm>
-            <a:off x="640080" y="6446520"/>
-            <a:ext cx="8686800" cy="292608"/>
-          </a:xfrm>
-          <a:prstGeom prst="rect">
-            <a:avLst/>
-          </a:prstGeom>
-          <a:noFill/>
-          <a:ln/>
-        </p:spPr>
-        <p:txBody>
-          <a:bodyPr wrap="square" lIns="0" tIns="0" rIns="0" bIns="0" rtlCol="0" anchor="ctr"/>
-          <a:lstStyle/>
-          <a:p>
-            <a:pPr algn="l" indent="0" marL="0">
-              <a:buNone/>
-            </a:pPr>
-            <a:r>
-              <a:rPr lang="en-US" sz="900" dirty="0">
-                <a:solidFill>
-                  <a:srgbClr val="5D5D72"/>
-                </a:solidFill>
-                <a:latin typeface="Calibri" pitchFamily="34" charset="0"/>
-                <a:ea typeface="Calibri" pitchFamily="34" charset="-122"/>
-                <a:cs typeface="Calibri" pitchFamily="34" charset="-120"/>
-              </a:rPr>
-              <a:t>Usman Akram  •  COMSATS University Islamabad</a:t>
-            </a:r>
-            <a:endParaRPr lang="en-US" sz="900" dirty="0"/>
-          </a:p>
-        </p:txBody>
-      </p:sp>
-      <p:sp>
-        <p:nvSpPr>
-          <p:cNvPr id="8" name="Text 6"/>
-          <p:cNvSpPr txBox="1"/>
-          <p:nvPr/>
-        </p:nvSpPr>
-        <p:spPr>
-          <a:xfrm>
-            <a:off x="11155680" y="6446520"/>
-            <a:ext cx="457200" cy="292608"/>
-          </a:xfrm>
-          <a:prstGeom prst="rect">
-            <a:avLst/>
-          </a:prstGeom>
-          <a:noFill/>
-          <a:ln/>
-        </p:spPr>
-        <p:txBody>
-          <a:bodyPr wrap="square" lIns="0" tIns="0" rIns="0" bIns="0" rtlCol="0" anchor="ctr"/>
-          <a:lstStyle/>
-          <a:p>
-            <a:pPr algn="r" indent="0" marL="0">
-              <a:buNone/>
-            </a:pPr>
-            <a:r>
-              <a:rPr lang="en-US" sz="900" dirty="0">
-                <a:solidFill>
-                  <a:srgbClr val="5D5D72"/>
-                </a:solidFill>
-                <a:latin typeface="Calibri" pitchFamily="34" charset="0"/>
-                <a:ea typeface="Calibri" pitchFamily="34" charset="-122"/>
-                <a:cs typeface="Calibri" pitchFamily="34" charset="-120"/>
-              </a:rPr>
-              <a:t>22</a:t>
-            </a:r>
-            <a:endParaRPr lang="en-US" sz="900" dirty="0"/>
+          <p:cNvPr id="9" name="cuinotes-footer-mark"/>
+          <p:cNvSpPr txBox="1"/>
+          <p:nvPr/>
+        </p:nvSpPr>
+        <p:spPr>
+          <a:xfrm>
+            <a:off x="9951720" y="6455664"/>
+            <a:ext cx="2011680" cy="292608"/>
+          </a:xfrm>
+          <a:prstGeom prst="rect">
+            <a:avLst/>
+          </a:prstGeom>
+          <a:noFill/>
+        </p:spPr>
+        <p:txBody>
+          <a:bodyPr wrap="none" lIns="0" rIns="0" tIns="0" bIns="0">
+            <a:spAutoFit/>
+          </a:bodyPr>
+          <a:lstStyle/>
+          <a:p>
+            <a:pPr algn="r"/>
+            <a:r>
+              <a:rPr sz="1000">
+                <a:solidFill>
+                  <a:srgbClr val="8A939B"/>
+                </a:solidFill>
+                <a:hlinkClick r:id="rId3"/>
+              </a:rPr>
+              <a:t>cuinotes.com</a:t>
+            </a:r>
+            <a:r>
+              <a:rPr sz="1000">
+                <a:solidFill>
+                  <a:srgbClr val="8A939B"/>
+                </a:solidFill>
+              </a:rPr>
+              <a:t>  ·  22</a:t>
+            </a:r>
           </a:p>
         </p:txBody>
       </p:sp>
@@ -9304,6 +8891,10 @@
           </a:solidFill>
           <a:ln/>
         </p:spPr>
+        <p:txBody>
+          <a:bodyPr/>
+          <a:p/>
+        </p:txBody>
       </p:sp>
       <p:sp>
         <p:nvSpPr>
@@ -9468,79 +9059,44 @@
       </p:sp>
       <p:sp>
         <p:nvSpPr>
-          <p:cNvPr id="7" name="Text 5"/>
-          <p:cNvSpPr txBox="1"/>
-          <p:nvPr/>
-        </p:nvSpPr>
-        <p:spPr>
-          <a:xfrm>
-            <a:off x="640080" y="6446520"/>
-            <a:ext cx="8686800" cy="292608"/>
-          </a:xfrm>
-          <a:prstGeom prst="rect">
-            <a:avLst/>
-          </a:prstGeom>
-          <a:noFill/>
-          <a:ln/>
-        </p:spPr>
-        <p:txBody>
-          <a:bodyPr wrap="square" lIns="0" tIns="0" rIns="0" bIns="0" rtlCol="0" anchor="ctr"/>
-          <a:lstStyle/>
-          <a:p>
-            <a:pPr algn="l" indent="0" marL="0">
-              <a:buNone/>
-            </a:pPr>
-            <a:r>
-              <a:rPr lang="en-US" sz="900" dirty="0">
-                <a:solidFill>
-                  <a:srgbClr val="5D5D72"/>
-                </a:solidFill>
-                <a:latin typeface="Calibri" pitchFamily="34" charset="0"/>
-                <a:ea typeface="Calibri" pitchFamily="34" charset="-122"/>
-                <a:cs typeface="Calibri" pitchFamily="34" charset="-120"/>
-              </a:rPr>
-              <a:t>Usman Akram  •  COMSATS University Islamabad</a:t>
-            </a:r>
-            <a:endParaRPr lang="en-US" sz="900" dirty="0"/>
-          </a:p>
-        </p:txBody>
-      </p:sp>
-      <p:sp>
-        <p:nvSpPr>
-          <p:cNvPr id="8" name="Text 6"/>
-          <p:cNvSpPr txBox="1"/>
-          <p:nvPr/>
-        </p:nvSpPr>
-        <p:spPr>
-          <a:xfrm>
-            <a:off x="11155680" y="6446520"/>
-            <a:ext cx="457200" cy="292608"/>
-          </a:xfrm>
-          <a:prstGeom prst="rect">
-            <a:avLst/>
-          </a:prstGeom>
-          <a:noFill/>
-          <a:ln/>
-        </p:spPr>
-        <p:txBody>
-          <a:bodyPr wrap="square" lIns="0" tIns="0" rIns="0" bIns="0" rtlCol="0" anchor="ctr"/>
-          <a:lstStyle/>
-          <a:p>
-            <a:pPr algn="r" indent="0" marL="0">
-              <a:buNone/>
-            </a:pPr>
-            <a:r>
-              <a:rPr lang="en-US" sz="900" dirty="0">
-                <a:solidFill>
-                  <a:srgbClr val="5D5D72"/>
-                </a:solidFill>
-                <a:latin typeface="Calibri" pitchFamily="34" charset="0"/>
-                <a:ea typeface="Calibri" pitchFamily="34" charset="-122"/>
-                <a:cs typeface="Calibri" pitchFamily="34" charset="-120"/>
-              </a:rPr>
-              <a:t>23</a:t>
-            </a:r>
-            <a:endParaRPr lang="en-US" sz="900" dirty="0"/>
+          <p:cNvPr id="9" name="cuinotes-footer-mark"/>
+          <p:cNvSpPr txBox="1"/>
+          <p:nvPr/>
+        </p:nvSpPr>
+        <p:spPr>
+          <a:xfrm>
+            <a:off x="9951720" y="6455664"/>
+            <a:ext cx="2011680" cy="292608"/>
+          </a:xfrm>
+          <a:prstGeom prst="rect">
+            <a:avLst/>
+          </a:prstGeom>
+          <a:noFill/>
+        </p:spPr>
+        <p:txBody>
+          <a:bodyPr wrap="none" lIns="0" rIns="0" tIns="0" bIns="0">
+            <a:spAutoFit/>
+          </a:bodyPr>
+          <a:lstStyle/>
+          <a:p>
+            <a:pPr algn="r"/>
+            <a:r>
+              <a:rPr sz="1000">
+                <a:solidFill>
+                  <a:srgbClr val="8A939B"/>
+                </a:solidFill>
+                <a:hlinkClick r:id="rId3"/>
+              </a:rPr>
+              <a:t>cuinotes.com</a:t>
+            </a:r>
+            <a:r>
+              <a:rPr sz="1000">
+                <a:solidFill>
+                  <a:srgbClr val="8A939B"/>
+                </a:solidFill>
+              </a:rPr>
+              <a:t>  ·  23</a:t>
+            </a:r>
           </a:p>
         </p:txBody>
       </p:sp>
@@ -9673,6 +9229,10 @@
           </a:solidFill>
           <a:ln/>
         </p:spPr>
+        <p:txBody>
+          <a:bodyPr/>
+          <a:p/>
+        </p:txBody>
       </p:sp>
       <p:sp>
         <p:nvSpPr>
@@ -9771,6 +9331,10 @@
           </a:solidFill>
           <a:ln/>
         </p:spPr>
+        <p:txBody>
+          <a:bodyPr/>
+          <a:p/>
+        </p:txBody>
       </p:sp>
       <p:sp>
         <p:nvSpPr>
@@ -9869,6 +9433,10 @@
           </a:solidFill>
           <a:ln/>
         </p:spPr>
+        <p:txBody>
+          <a:bodyPr/>
+          <a:p/>
+        </p:txBody>
       </p:sp>
       <p:sp>
         <p:nvSpPr>
@@ -9967,6 +9535,10 @@
           </a:solidFill>
           <a:ln/>
         </p:spPr>
+        <p:txBody>
+          <a:bodyPr/>
+          <a:p/>
+        </p:txBody>
       </p:sp>
       <p:sp>
         <p:nvSpPr>
@@ -10065,6 +9637,10 @@
           </a:solidFill>
           <a:ln/>
         </p:spPr>
+        <p:txBody>
+          <a:bodyPr/>
+          <a:p/>
+        </p:txBody>
       </p:sp>
       <p:sp>
         <p:nvSpPr>
@@ -10163,6 +9739,10 @@
           </a:solidFill>
           <a:ln/>
         </p:spPr>
+        <p:txBody>
+          <a:bodyPr/>
+          <a:p/>
+        </p:txBody>
       </p:sp>
       <p:sp>
         <p:nvSpPr>
@@ -10261,6 +9841,10 @@
           </a:solidFill>
           <a:ln/>
         </p:spPr>
+        <p:txBody>
+          <a:bodyPr/>
+          <a:p/>
+        </p:txBody>
       </p:sp>
       <p:sp>
         <p:nvSpPr>
@@ -10342,79 +9926,44 @@
       </p:sp>
       <p:sp>
         <p:nvSpPr>
-          <p:cNvPr id="25" name="Text 23"/>
-          <p:cNvSpPr txBox="1"/>
-          <p:nvPr/>
-        </p:nvSpPr>
-        <p:spPr>
-          <a:xfrm>
-            <a:off x="640080" y="6446520"/>
-            <a:ext cx="8686800" cy="292608"/>
-          </a:xfrm>
-          <a:prstGeom prst="rect">
-            <a:avLst/>
-          </a:prstGeom>
-          <a:noFill/>
-          <a:ln/>
-        </p:spPr>
-        <p:txBody>
-          <a:bodyPr wrap="square" lIns="0" tIns="0" rIns="0" bIns="0" rtlCol="0" anchor="ctr"/>
-          <a:lstStyle/>
-          <a:p>
-            <a:pPr algn="l" indent="0" marL="0">
-              <a:buNone/>
-            </a:pPr>
-            <a:r>
-              <a:rPr lang="en-US" sz="900" dirty="0">
-                <a:solidFill>
-                  <a:srgbClr val="9AA3D8"/>
-                </a:solidFill>
-                <a:latin typeface="Calibri" pitchFamily="34" charset="0"/>
-                <a:ea typeface="Calibri" pitchFamily="34" charset="-122"/>
-                <a:cs typeface="Calibri" pitchFamily="34" charset="-120"/>
-              </a:rPr>
-              <a:t>Usman Akram  •  COMSATS University Islamabad</a:t>
-            </a:r>
-            <a:endParaRPr lang="en-US" sz="900" dirty="0"/>
-          </a:p>
-        </p:txBody>
-      </p:sp>
-      <p:sp>
-        <p:nvSpPr>
-          <p:cNvPr id="26" name="Text 24"/>
-          <p:cNvSpPr txBox="1"/>
-          <p:nvPr/>
-        </p:nvSpPr>
-        <p:spPr>
-          <a:xfrm>
-            <a:off x="11155680" y="6446520"/>
-            <a:ext cx="457200" cy="292608"/>
-          </a:xfrm>
-          <a:prstGeom prst="rect">
-            <a:avLst/>
-          </a:prstGeom>
-          <a:noFill/>
-          <a:ln/>
-        </p:spPr>
-        <p:txBody>
-          <a:bodyPr wrap="square" lIns="0" tIns="0" rIns="0" bIns="0" rtlCol="0" anchor="ctr"/>
-          <a:lstStyle/>
-          <a:p>
-            <a:pPr algn="r" indent="0" marL="0">
-              <a:buNone/>
-            </a:pPr>
-            <a:r>
-              <a:rPr lang="en-US" sz="900" dirty="0">
-                <a:solidFill>
-                  <a:srgbClr val="9AA3D8"/>
-                </a:solidFill>
-                <a:latin typeface="Calibri" pitchFamily="34" charset="0"/>
-                <a:ea typeface="Calibri" pitchFamily="34" charset="-122"/>
-                <a:cs typeface="Calibri" pitchFamily="34" charset="-120"/>
-              </a:rPr>
-              <a:t>24</a:t>
-            </a:r>
-            <a:endParaRPr lang="en-US" sz="900" dirty="0"/>
+          <p:cNvPr id="27" name="cuinotes-footer-mark"/>
+          <p:cNvSpPr txBox="1"/>
+          <p:nvPr/>
+        </p:nvSpPr>
+        <p:spPr>
+          <a:xfrm>
+            <a:off x="9951720" y="6455664"/>
+            <a:ext cx="2011680" cy="292608"/>
+          </a:xfrm>
+          <a:prstGeom prst="rect">
+            <a:avLst/>
+          </a:prstGeom>
+          <a:noFill/>
+        </p:spPr>
+        <p:txBody>
+          <a:bodyPr wrap="none" lIns="0" rIns="0" tIns="0" bIns="0">
+            <a:spAutoFit/>
+          </a:bodyPr>
+          <a:lstStyle/>
+          <a:p>
+            <a:pPr algn="r"/>
+            <a:r>
+              <a:rPr sz="1000">
+                <a:solidFill>
+                  <a:srgbClr val="8A939B"/>
+                </a:solidFill>
+                <a:hlinkClick r:id="rId3"/>
+              </a:rPr>
+              <a:t>cuinotes.com</a:t>
+            </a:r>
+            <a:r>
+              <a:rPr sz="1000">
+                <a:solidFill>
+                  <a:srgbClr val="8A939B"/>
+                </a:solidFill>
+              </a:rPr>
+              <a:t>  ·  24</a:t>
+            </a:r>
           </a:p>
         </p:txBody>
       </p:sp>
@@ -10549,6 +10098,10 @@
           </a:solidFill>
           <a:ln/>
         </p:spPr>
+        <p:txBody>
+          <a:bodyPr/>
+          <a:p/>
+        </p:txBody>
       </p:sp>
       <p:sp>
         <p:nvSpPr>
@@ -10742,79 +10295,44 @@
       </p:sp>
       <p:sp>
         <p:nvSpPr>
-          <p:cNvPr id="7" name="Text 5"/>
-          <p:cNvSpPr txBox="1"/>
-          <p:nvPr/>
-        </p:nvSpPr>
-        <p:spPr>
-          <a:xfrm>
-            <a:off x="640080" y="6446520"/>
-            <a:ext cx="8686800" cy="292608"/>
-          </a:xfrm>
-          <a:prstGeom prst="rect">
-            <a:avLst/>
-          </a:prstGeom>
-          <a:noFill/>
-          <a:ln/>
-        </p:spPr>
-        <p:txBody>
-          <a:bodyPr wrap="square" lIns="0" tIns="0" rIns="0" bIns="0" rtlCol="0" anchor="ctr"/>
-          <a:lstStyle/>
-          <a:p>
-            <a:pPr algn="l" indent="0" marL="0">
-              <a:buNone/>
-            </a:pPr>
-            <a:r>
-              <a:rPr lang="en-US" sz="900" dirty="0">
-                <a:solidFill>
-                  <a:srgbClr val="5D5D72"/>
-                </a:solidFill>
-                <a:latin typeface="Calibri" pitchFamily="34" charset="0"/>
-                <a:ea typeface="Calibri" pitchFamily="34" charset="-122"/>
-                <a:cs typeface="Calibri" pitchFamily="34" charset="-120"/>
-              </a:rPr>
-              <a:t>Usman Akram  •  COMSATS University Islamabad</a:t>
-            </a:r>
-            <a:endParaRPr lang="en-US" sz="900" dirty="0"/>
-          </a:p>
-        </p:txBody>
-      </p:sp>
-      <p:sp>
-        <p:nvSpPr>
-          <p:cNvPr id="8" name="Text 6"/>
-          <p:cNvSpPr txBox="1"/>
-          <p:nvPr/>
-        </p:nvSpPr>
-        <p:spPr>
-          <a:xfrm>
-            <a:off x="11155680" y="6446520"/>
-            <a:ext cx="457200" cy="292608"/>
-          </a:xfrm>
-          <a:prstGeom prst="rect">
-            <a:avLst/>
-          </a:prstGeom>
-          <a:noFill/>
-          <a:ln/>
-        </p:spPr>
-        <p:txBody>
-          <a:bodyPr wrap="square" lIns="0" tIns="0" rIns="0" bIns="0" rtlCol="0" anchor="ctr"/>
-          <a:lstStyle/>
-          <a:p>
-            <a:pPr algn="r" indent="0" marL="0">
-              <a:buNone/>
-            </a:pPr>
-            <a:r>
-              <a:rPr lang="en-US" sz="900" dirty="0">
-                <a:solidFill>
-                  <a:srgbClr val="5D5D72"/>
-                </a:solidFill>
-                <a:latin typeface="Calibri" pitchFamily="34" charset="0"/>
-                <a:ea typeface="Calibri" pitchFamily="34" charset="-122"/>
-                <a:cs typeface="Calibri" pitchFamily="34" charset="-120"/>
-              </a:rPr>
-              <a:t>3</a:t>
-            </a:r>
-            <a:endParaRPr lang="en-US" sz="900" dirty="0"/>
+          <p:cNvPr id="9" name="cuinotes-footer-mark"/>
+          <p:cNvSpPr txBox="1"/>
+          <p:nvPr/>
+        </p:nvSpPr>
+        <p:spPr>
+          <a:xfrm>
+            <a:off x="9951720" y="6455664"/>
+            <a:ext cx="2011680" cy="292608"/>
+          </a:xfrm>
+          <a:prstGeom prst="rect">
+            <a:avLst/>
+          </a:prstGeom>
+          <a:noFill/>
+        </p:spPr>
+        <p:txBody>
+          <a:bodyPr wrap="none" lIns="0" rIns="0" tIns="0" bIns="0">
+            <a:spAutoFit/>
+          </a:bodyPr>
+          <a:lstStyle/>
+          <a:p>
+            <a:pPr algn="r"/>
+            <a:r>
+              <a:rPr sz="1000">
+                <a:solidFill>
+                  <a:srgbClr val="8A939B"/>
+                </a:solidFill>
+                <a:hlinkClick r:id="rId3"/>
+              </a:rPr>
+              <a:t>cuinotes.com</a:t>
+            </a:r>
+            <a:r>
+              <a:rPr sz="1000">
+                <a:solidFill>
+                  <a:srgbClr val="8A939B"/>
+                </a:solidFill>
+              </a:rPr>
+              <a:t>  ·  3</a:t>
+            </a:r>
           </a:p>
         </p:txBody>
       </p:sp>
@@ -10949,6 +10467,10 @@
           </a:solidFill>
           <a:ln/>
         </p:spPr>
+        <p:txBody>
+          <a:bodyPr/>
+          <a:p/>
+        </p:txBody>
       </p:sp>
       <p:sp>
         <p:nvSpPr>
@@ -11172,79 +10694,44 @@
       </p:sp>
       <p:sp>
         <p:nvSpPr>
-          <p:cNvPr id="6" name="Text 4"/>
-          <p:cNvSpPr txBox="1"/>
-          <p:nvPr/>
-        </p:nvSpPr>
-        <p:spPr>
-          <a:xfrm>
-            <a:off x="640080" y="6446520"/>
-            <a:ext cx="8686800" cy="292608"/>
-          </a:xfrm>
-          <a:prstGeom prst="rect">
-            <a:avLst/>
-          </a:prstGeom>
-          <a:noFill/>
-          <a:ln/>
-        </p:spPr>
-        <p:txBody>
-          <a:bodyPr wrap="square" lIns="0" tIns="0" rIns="0" bIns="0" rtlCol="0" anchor="ctr"/>
-          <a:lstStyle/>
-          <a:p>
-            <a:pPr algn="l" indent="0" marL="0">
-              <a:buNone/>
-            </a:pPr>
-            <a:r>
-              <a:rPr lang="en-US" sz="900" dirty="0">
-                <a:solidFill>
-                  <a:srgbClr val="5D5D72"/>
-                </a:solidFill>
-                <a:latin typeface="Calibri" pitchFamily="34" charset="0"/>
-                <a:ea typeface="Calibri" pitchFamily="34" charset="-122"/>
-                <a:cs typeface="Calibri" pitchFamily="34" charset="-120"/>
-              </a:rPr>
-              <a:t>Usman Akram  •  COMSATS University Islamabad</a:t>
-            </a:r>
-            <a:endParaRPr lang="en-US" sz="900" dirty="0"/>
-          </a:p>
-        </p:txBody>
-      </p:sp>
-      <p:sp>
-        <p:nvSpPr>
-          <p:cNvPr id="7" name="Text 5"/>
-          <p:cNvSpPr txBox="1"/>
-          <p:nvPr/>
-        </p:nvSpPr>
-        <p:spPr>
-          <a:xfrm>
-            <a:off x="11155680" y="6446520"/>
-            <a:ext cx="457200" cy="292608"/>
-          </a:xfrm>
-          <a:prstGeom prst="rect">
-            <a:avLst/>
-          </a:prstGeom>
-          <a:noFill/>
-          <a:ln/>
-        </p:spPr>
-        <p:txBody>
-          <a:bodyPr wrap="square" lIns="0" tIns="0" rIns="0" bIns="0" rtlCol="0" anchor="ctr"/>
-          <a:lstStyle/>
-          <a:p>
-            <a:pPr algn="r" indent="0" marL="0">
-              <a:buNone/>
-            </a:pPr>
-            <a:r>
-              <a:rPr lang="en-US" sz="900" dirty="0">
-                <a:solidFill>
-                  <a:srgbClr val="5D5D72"/>
-                </a:solidFill>
-                <a:latin typeface="Calibri" pitchFamily="34" charset="0"/>
-                <a:ea typeface="Calibri" pitchFamily="34" charset="-122"/>
-                <a:cs typeface="Calibri" pitchFamily="34" charset="-120"/>
-              </a:rPr>
-              <a:t>4</a:t>
-            </a:r>
-            <a:endParaRPr lang="en-US" sz="900" dirty="0"/>
+          <p:cNvPr id="8" name="cuinotes-footer-mark"/>
+          <p:cNvSpPr txBox="1"/>
+          <p:nvPr/>
+        </p:nvSpPr>
+        <p:spPr>
+          <a:xfrm>
+            <a:off x="9951720" y="6455664"/>
+            <a:ext cx="2011680" cy="292608"/>
+          </a:xfrm>
+          <a:prstGeom prst="rect">
+            <a:avLst/>
+          </a:prstGeom>
+          <a:noFill/>
+        </p:spPr>
+        <p:txBody>
+          <a:bodyPr wrap="none" lIns="0" rIns="0" tIns="0" bIns="0">
+            <a:spAutoFit/>
+          </a:bodyPr>
+          <a:lstStyle/>
+          <a:p>
+            <a:pPr algn="r"/>
+            <a:r>
+              <a:rPr sz="1000">
+                <a:solidFill>
+                  <a:srgbClr val="8A939B"/>
+                </a:solidFill>
+                <a:hlinkClick r:id="rId3"/>
+              </a:rPr>
+              <a:t>cuinotes.com</a:t>
+            </a:r>
+            <a:r>
+              <a:rPr sz="1000">
+                <a:solidFill>
+                  <a:srgbClr val="8A939B"/>
+                </a:solidFill>
+              </a:rPr>
+              <a:t>  ·  4</a:t>
+            </a:r>
           </a:p>
         </p:txBody>
       </p:sp>
@@ -11379,6 +10866,10 @@
           </a:solidFill>
           <a:ln/>
         </p:spPr>
+        <p:txBody>
+          <a:bodyPr/>
+          <a:p/>
+        </p:txBody>
       </p:sp>
       <p:sp>
         <p:nvSpPr>
@@ -11524,79 +11015,44 @@
       </p:sp>
       <p:sp>
         <p:nvSpPr>
-          <p:cNvPr id="6" name="Text 4"/>
-          <p:cNvSpPr txBox="1"/>
-          <p:nvPr/>
-        </p:nvSpPr>
-        <p:spPr>
-          <a:xfrm>
-            <a:off x="640080" y="6446520"/>
-            <a:ext cx="8686800" cy="292608"/>
-          </a:xfrm>
-          <a:prstGeom prst="rect">
-            <a:avLst/>
-          </a:prstGeom>
-          <a:noFill/>
-          <a:ln/>
-        </p:spPr>
-        <p:txBody>
-          <a:bodyPr wrap="square" lIns="0" tIns="0" rIns="0" bIns="0" rtlCol="0" anchor="ctr"/>
-          <a:lstStyle/>
-          <a:p>
-            <a:pPr algn="l" indent="0" marL="0">
-              <a:buNone/>
-            </a:pPr>
-            <a:r>
-              <a:rPr lang="en-US" sz="900" dirty="0">
-                <a:solidFill>
-                  <a:srgbClr val="5D5D72"/>
-                </a:solidFill>
-                <a:latin typeface="Calibri" pitchFamily="34" charset="0"/>
-                <a:ea typeface="Calibri" pitchFamily="34" charset="-122"/>
-                <a:cs typeface="Calibri" pitchFamily="34" charset="-120"/>
-              </a:rPr>
-              <a:t>Usman Akram  •  COMSATS University Islamabad</a:t>
-            </a:r>
-            <a:endParaRPr lang="en-US" sz="900" dirty="0"/>
-          </a:p>
-        </p:txBody>
-      </p:sp>
-      <p:sp>
-        <p:nvSpPr>
-          <p:cNvPr id="7" name="Text 5"/>
-          <p:cNvSpPr txBox="1"/>
-          <p:nvPr/>
-        </p:nvSpPr>
-        <p:spPr>
-          <a:xfrm>
-            <a:off x="11155680" y="6446520"/>
-            <a:ext cx="457200" cy="292608"/>
-          </a:xfrm>
-          <a:prstGeom prst="rect">
-            <a:avLst/>
-          </a:prstGeom>
-          <a:noFill/>
-          <a:ln/>
-        </p:spPr>
-        <p:txBody>
-          <a:bodyPr wrap="square" lIns="0" tIns="0" rIns="0" bIns="0" rtlCol="0" anchor="ctr"/>
-          <a:lstStyle/>
-          <a:p>
-            <a:pPr algn="r" indent="0" marL="0">
-              <a:buNone/>
-            </a:pPr>
-            <a:r>
-              <a:rPr lang="en-US" sz="900" dirty="0">
-                <a:solidFill>
-                  <a:srgbClr val="5D5D72"/>
-                </a:solidFill>
-                <a:latin typeface="Calibri" pitchFamily="34" charset="0"/>
-                <a:ea typeface="Calibri" pitchFamily="34" charset="-122"/>
-                <a:cs typeface="Calibri" pitchFamily="34" charset="-120"/>
-              </a:rPr>
-              <a:t>5</a:t>
-            </a:r>
-            <a:endParaRPr lang="en-US" sz="900" dirty="0"/>
+          <p:cNvPr id="8" name="cuinotes-footer-mark"/>
+          <p:cNvSpPr txBox="1"/>
+          <p:nvPr/>
+        </p:nvSpPr>
+        <p:spPr>
+          <a:xfrm>
+            <a:off x="9951720" y="6455664"/>
+            <a:ext cx="2011680" cy="292608"/>
+          </a:xfrm>
+          <a:prstGeom prst="rect">
+            <a:avLst/>
+          </a:prstGeom>
+          <a:noFill/>
+        </p:spPr>
+        <p:txBody>
+          <a:bodyPr wrap="none" lIns="0" rIns="0" tIns="0" bIns="0">
+            <a:spAutoFit/>
+          </a:bodyPr>
+          <a:lstStyle/>
+          <a:p>
+            <a:pPr algn="r"/>
+            <a:r>
+              <a:rPr sz="1000">
+                <a:solidFill>
+                  <a:srgbClr val="8A939B"/>
+                </a:solidFill>
+                <a:hlinkClick r:id="rId3"/>
+              </a:rPr>
+              <a:t>cuinotes.com</a:t>
+            </a:r>
+            <a:r>
+              <a:rPr sz="1000">
+                <a:solidFill>
+                  <a:srgbClr val="8A939B"/>
+                </a:solidFill>
+              </a:rPr>
+              <a:t>  ·  5</a:t>
+            </a:r>
           </a:p>
         </p:txBody>
       </p:sp>
@@ -11731,6 +11187,10 @@
           </a:solidFill>
           <a:ln/>
         </p:spPr>
+        <p:txBody>
+          <a:bodyPr/>
+          <a:p/>
+        </p:txBody>
       </p:sp>
       <p:sp>
         <p:nvSpPr>
@@ -11836,79 +11296,44 @@
       </p:sp>
       <p:sp>
         <p:nvSpPr>
-          <p:cNvPr id="6" name="Text 4"/>
-          <p:cNvSpPr txBox="1"/>
-          <p:nvPr/>
-        </p:nvSpPr>
-        <p:spPr>
-          <a:xfrm>
-            <a:off x="640080" y="6446520"/>
-            <a:ext cx="8686800" cy="292608"/>
-          </a:xfrm>
-          <a:prstGeom prst="rect">
-            <a:avLst/>
-          </a:prstGeom>
-          <a:noFill/>
-          <a:ln/>
-        </p:spPr>
-        <p:txBody>
-          <a:bodyPr wrap="square" lIns="0" tIns="0" rIns="0" bIns="0" rtlCol="0" anchor="ctr"/>
-          <a:lstStyle/>
-          <a:p>
-            <a:pPr algn="l" indent="0" marL="0">
-              <a:buNone/>
-            </a:pPr>
-            <a:r>
-              <a:rPr lang="en-US" sz="900" dirty="0">
-                <a:solidFill>
-                  <a:srgbClr val="5D5D72"/>
-                </a:solidFill>
-                <a:latin typeface="Calibri" pitchFamily="34" charset="0"/>
-                <a:ea typeface="Calibri" pitchFamily="34" charset="-122"/>
-                <a:cs typeface="Calibri" pitchFamily="34" charset="-120"/>
-              </a:rPr>
-              <a:t>Usman Akram  •  COMSATS University Islamabad</a:t>
-            </a:r>
-            <a:endParaRPr lang="en-US" sz="900" dirty="0"/>
-          </a:p>
-        </p:txBody>
-      </p:sp>
-      <p:sp>
-        <p:nvSpPr>
-          <p:cNvPr id="7" name="Text 5"/>
-          <p:cNvSpPr txBox="1"/>
-          <p:nvPr/>
-        </p:nvSpPr>
-        <p:spPr>
-          <a:xfrm>
-            <a:off x="11155680" y="6446520"/>
-            <a:ext cx="457200" cy="292608"/>
-          </a:xfrm>
-          <a:prstGeom prst="rect">
-            <a:avLst/>
-          </a:prstGeom>
-          <a:noFill/>
-          <a:ln/>
-        </p:spPr>
-        <p:txBody>
-          <a:bodyPr wrap="square" lIns="0" tIns="0" rIns="0" bIns="0" rtlCol="0" anchor="ctr"/>
-          <a:lstStyle/>
-          <a:p>
-            <a:pPr algn="r" indent="0" marL="0">
-              <a:buNone/>
-            </a:pPr>
-            <a:r>
-              <a:rPr lang="en-US" sz="900" dirty="0">
-                <a:solidFill>
-                  <a:srgbClr val="5D5D72"/>
-                </a:solidFill>
-                <a:latin typeface="Calibri" pitchFamily="34" charset="0"/>
-                <a:ea typeface="Calibri" pitchFamily="34" charset="-122"/>
-                <a:cs typeface="Calibri" pitchFamily="34" charset="-120"/>
-              </a:rPr>
-              <a:t>6</a:t>
-            </a:r>
-            <a:endParaRPr lang="en-US" sz="900" dirty="0"/>
+          <p:cNvPr id="8" name="cuinotes-footer-mark"/>
+          <p:cNvSpPr txBox="1"/>
+          <p:nvPr/>
+        </p:nvSpPr>
+        <p:spPr>
+          <a:xfrm>
+            <a:off x="9951720" y="6455664"/>
+            <a:ext cx="2011680" cy="292608"/>
+          </a:xfrm>
+          <a:prstGeom prst="rect">
+            <a:avLst/>
+          </a:prstGeom>
+          <a:noFill/>
+        </p:spPr>
+        <p:txBody>
+          <a:bodyPr wrap="none" lIns="0" rIns="0" tIns="0" bIns="0">
+            <a:spAutoFit/>
+          </a:bodyPr>
+          <a:lstStyle/>
+          <a:p>
+            <a:pPr algn="r"/>
+            <a:r>
+              <a:rPr sz="1000">
+                <a:solidFill>
+                  <a:srgbClr val="8A939B"/>
+                </a:solidFill>
+                <a:hlinkClick r:id="rId3"/>
+              </a:rPr>
+              <a:t>cuinotes.com</a:t>
+            </a:r>
+            <a:r>
+              <a:rPr sz="1000">
+                <a:solidFill>
+                  <a:srgbClr val="8A939B"/>
+                </a:solidFill>
+              </a:rPr>
+              <a:t>  ·  6</a:t>
+            </a:r>
           </a:p>
         </p:txBody>
       </p:sp>
@@ -12043,6 +11468,10 @@
           </a:solidFill>
           <a:ln/>
         </p:spPr>
+        <p:txBody>
+          <a:bodyPr/>
+          <a:p/>
+        </p:txBody>
       </p:sp>
       <p:sp>
         <p:nvSpPr>
@@ -12226,79 +11655,44 @@
       </p:sp>
       <p:sp>
         <p:nvSpPr>
-          <p:cNvPr id="6" name="Text 4"/>
-          <p:cNvSpPr txBox="1"/>
-          <p:nvPr/>
-        </p:nvSpPr>
-        <p:spPr>
-          <a:xfrm>
-            <a:off x="640080" y="6446520"/>
-            <a:ext cx="8686800" cy="292608"/>
-          </a:xfrm>
-          <a:prstGeom prst="rect">
-            <a:avLst/>
-          </a:prstGeom>
-          <a:noFill/>
-          <a:ln/>
-        </p:spPr>
-        <p:txBody>
-          <a:bodyPr wrap="square" lIns="0" tIns="0" rIns="0" bIns="0" rtlCol="0" anchor="ctr"/>
-          <a:lstStyle/>
-          <a:p>
-            <a:pPr algn="l" indent="0" marL="0">
-              <a:buNone/>
-            </a:pPr>
-            <a:r>
-              <a:rPr lang="en-US" sz="900" dirty="0">
-                <a:solidFill>
-                  <a:srgbClr val="5D5D72"/>
-                </a:solidFill>
-                <a:latin typeface="Calibri" pitchFamily="34" charset="0"/>
-                <a:ea typeface="Calibri" pitchFamily="34" charset="-122"/>
-                <a:cs typeface="Calibri" pitchFamily="34" charset="-120"/>
-              </a:rPr>
-              <a:t>Usman Akram  •  COMSATS University Islamabad</a:t>
-            </a:r>
-            <a:endParaRPr lang="en-US" sz="900" dirty="0"/>
-          </a:p>
-        </p:txBody>
-      </p:sp>
-      <p:sp>
-        <p:nvSpPr>
-          <p:cNvPr id="7" name="Text 5"/>
-          <p:cNvSpPr txBox="1"/>
-          <p:nvPr/>
-        </p:nvSpPr>
-        <p:spPr>
-          <a:xfrm>
-            <a:off x="11155680" y="6446520"/>
-            <a:ext cx="457200" cy="292608"/>
-          </a:xfrm>
-          <a:prstGeom prst="rect">
-            <a:avLst/>
-          </a:prstGeom>
-          <a:noFill/>
-          <a:ln/>
-        </p:spPr>
-        <p:txBody>
-          <a:bodyPr wrap="square" lIns="0" tIns="0" rIns="0" bIns="0" rtlCol="0" anchor="ctr"/>
-          <a:lstStyle/>
-          <a:p>
-            <a:pPr algn="r" indent="0" marL="0">
-              <a:buNone/>
-            </a:pPr>
-            <a:r>
-              <a:rPr lang="en-US" sz="900" dirty="0">
-                <a:solidFill>
-                  <a:srgbClr val="5D5D72"/>
-                </a:solidFill>
-                <a:latin typeface="Calibri" pitchFamily="34" charset="0"/>
-                <a:ea typeface="Calibri" pitchFamily="34" charset="-122"/>
-                <a:cs typeface="Calibri" pitchFamily="34" charset="-120"/>
-              </a:rPr>
-              <a:t>7</a:t>
-            </a:r>
-            <a:endParaRPr lang="en-US" sz="900" dirty="0"/>
+          <p:cNvPr id="8" name="cuinotes-footer-mark"/>
+          <p:cNvSpPr txBox="1"/>
+          <p:nvPr/>
+        </p:nvSpPr>
+        <p:spPr>
+          <a:xfrm>
+            <a:off x="9951720" y="6455664"/>
+            <a:ext cx="2011680" cy="292608"/>
+          </a:xfrm>
+          <a:prstGeom prst="rect">
+            <a:avLst/>
+          </a:prstGeom>
+          <a:noFill/>
+        </p:spPr>
+        <p:txBody>
+          <a:bodyPr wrap="none" lIns="0" rIns="0" tIns="0" bIns="0">
+            <a:spAutoFit/>
+          </a:bodyPr>
+          <a:lstStyle/>
+          <a:p>
+            <a:pPr algn="r"/>
+            <a:r>
+              <a:rPr sz="1000">
+                <a:solidFill>
+                  <a:srgbClr val="8A939B"/>
+                </a:solidFill>
+                <a:hlinkClick r:id="rId3"/>
+              </a:rPr>
+              <a:t>cuinotes.com</a:t>
+            </a:r>
+            <a:r>
+              <a:rPr sz="1000">
+                <a:solidFill>
+                  <a:srgbClr val="8A939B"/>
+                </a:solidFill>
+              </a:rPr>
+              <a:t>  ·  7</a:t>
+            </a:r>
           </a:p>
         </p:txBody>
       </p:sp>
@@ -12996,79 +12390,44 @@
       </p:graphicFrame>
       <p:sp>
         <p:nvSpPr>
-          <p:cNvPr id="5" name="Text 2"/>
-          <p:cNvSpPr txBox="1"/>
-          <p:nvPr/>
-        </p:nvSpPr>
-        <p:spPr>
-          <a:xfrm>
-            <a:off x="640080" y="6446520"/>
-            <a:ext cx="8686800" cy="292608"/>
-          </a:xfrm>
-          <a:prstGeom prst="rect">
-            <a:avLst/>
-          </a:prstGeom>
-          <a:noFill/>
-          <a:ln/>
-        </p:spPr>
-        <p:txBody>
-          <a:bodyPr wrap="square" lIns="0" tIns="0" rIns="0" bIns="0" rtlCol="0" anchor="ctr"/>
-          <a:lstStyle/>
-          <a:p>
-            <a:pPr algn="l" indent="0" marL="0">
-              <a:buNone/>
-            </a:pPr>
-            <a:r>
-              <a:rPr lang="en-US" sz="900" dirty="0">
-                <a:solidFill>
-                  <a:srgbClr val="5D5D72"/>
-                </a:solidFill>
-                <a:latin typeface="Calibri" pitchFamily="34" charset="0"/>
-                <a:ea typeface="Calibri" pitchFamily="34" charset="-122"/>
-                <a:cs typeface="Calibri" pitchFamily="34" charset="-120"/>
-              </a:rPr>
-              <a:t>Usman Akram  •  COMSATS University Islamabad</a:t>
-            </a:r>
-            <a:endParaRPr lang="en-US" sz="900" dirty="0"/>
-          </a:p>
-        </p:txBody>
-      </p:sp>
-      <p:sp>
-        <p:nvSpPr>
-          <p:cNvPr id="6" name="Text 3"/>
-          <p:cNvSpPr txBox="1"/>
-          <p:nvPr/>
-        </p:nvSpPr>
-        <p:spPr>
-          <a:xfrm>
-            <a:off x="11155680" y="6446520"/>
-            <a:ext cx="457200" cy="292608"/>
-          </a:xfrm>
-          <a:prstGeom prst="rect">
-            <a:avLst/>
-          </a:prstGeom>
-          <a:noFill/>
-          <a:ln/>
-        </p:spPr>
-        <p:txBody>
-          <a:bodyPr wrap="square" lIns="0" tIns="0" rIns="0" bIns="0" rtlCol="0" anchor="ctr"/>
-          <a:lstStyle/>
-          <a:p>
-            <a:pPr algn="r" indent="0" marL="0">
-              <a:buNone/>
-            </a:pPr>
-            <a:r>
-              <a:rPr lang="en-US" sz="900" dirty="0">
-                <a:solidFill>
-                  <a:srgbClr val="5D5D72"/>
-                </a:solidFill>
-                <a:latin typeface="Calibri" pitchFamily="34" charset="0"/>
-                <a:ea typeface="Calibri" pitchFamily="34" charset="-122"/>
-                <a:cs typeface="Calibri" pitchFamily="34" charset="-120"/>
-              </a:rPr>
-              <a:t>8</a:t>
-            </a:r>
-            <a:endParaRPr lang="en-US" sz="900" dirty="0"/>
+          <p:cNvPr id="10" name="cuinotes-footer-mark"/>
+          <p:cNvSpPr txBox="1"/>
+          <p:nvPr/>
+        </p:nvSpPr>
+        <p:spPr>
+          <a:xfrm>
+            <a:off x="9951720" y="6455664"/>
+            <a:ext cx="2011680" cy="292608"/>
+          </a:xfrm>
+          <a:prstGeom prst="rect">
+            <a:avLst/>
+          </a:prstGeom>
+          <a:noFill/>
+        </p:spPr>
+        <p:txBody>
+          <a:bodyPr wrap="none" lIns="0" rIns="0" tIns="0" bIns="0">
+            <a:spAutoFit/>
+          </a:bodyPr>
+          <a:lstStyle/>
+          <a:p>
+            <a:pPr algn="r"/>
+            <a:r>
+              <a:rPr sz="1000">
+                <a:solidFill>
+                  <a:srgbClr val="8A939B"/>
+                </a:solidFill>
+                <a:hlinkClick r:id="rId3"/>
+              </a:rPr>
+              <a:t>cuinotes.com</a:t>
+            </a:r>
+            <a:r>
+              <a:rPr sz="1000">
+                <a:solidFill>
+                  <a:srgbClr val="8A939B"/>
+                </a:solidFill>
+              </a:rPr>
+              <a:t>  ·  8</a:t>
+            </a:r>
           </a:p>
         </p:txBody>
       </p:sp>
@@ -13203,6 +12562,10 @@
           </a:solidFill>
           <a:ln/>
         </p:spPr>
+        <p:txBody>
+          <a:bodyPr/>
+          <a:p/>
+        </p:txBody>
       </p:sp>
       <p:sp>
         <p:nvSpPr>
@@ -13268,79 +12631,44 @@
       </p:sp>
       <p:sp>
         <p:nvSpPr>
-          <p:cNvPr id="6" name="Text 4"/>
-          <p:cNvSpPr txBox="1"/>
-          <p:nvPr/>
-        </p:nvSpPr>
-        <p:spPr>
-          <a:xfrm>
-            <a:off x="640080" y="6446520"/>
-            <a:ext cx="8686800" cy="292608"/>
-          </a:xfrm>
-          <a:prstGeom prst="rect">
-            <a:avLst/>
-          </a:prstGeom>
-          <a:noFill/>
-          <a:ln/>
-        </p:spPr>
-        <p:txBody>
-          <a:bodyPr wrap="square" lIns="0" tIns="0" rIns="0" bIns="0" rtlCol="0" anchor="ctr"/>
-          <a:lstStyle/>
-          <a:p>
-            <a:pPr algn="l" indent="0" marL="0">
-              <a:buNone/>
-            </a:pPr>
-            <a:r>
-              <a:rPr lang="en-US" sz="900" dirty="0">
-                <a:solidFill>
-                  <a:srgbClr val="5D5D72"/>
-                </a:solidFill>
-                <a:latin typeface="Calibri" pitchFamily="34" charset="0"/>
-                <a:ea typeface="Calibri" pitchFamily="34" charset="-122"/>
-                <a:cs typeface="Calibri" pitchFamily="34" charset="-120"/>
-              </a:rPr>
-              <a:t>Usman Akram  •  COMSATS University Islamabad</a:t>
-            </a:r>
-            <a:endParaRPr lang="en-US" sz="900" dirty="0"/>
-          </a:p>
-        </p:txBody>
-      </p:sp>
-      <p:sp>
-        <p:nvSpPr>
-          <p:cNvPr id="7" name="Text 5"/>
-          <p:cNvSpPr txBox="1"/>
-          <p:nvPr/>
-        </p:nvSpPr>
-        <p:spPr>
-          <a:xfrm>
-            <a:off x="11155680" y="6446520"/>
-            <a:ext cx="457200" cy="292608"/>
-          </a:xfrm>
-          <a:prstGeom prst="rect">
-            <a:avLst/>
-          </a:prstGeom>
-          <a:noFill/>
-          <a:ln/>
-        </p:spPr>
-        <p:txBody>
-          <a:bodyPr wrap="square" lIns="0" tIns="0" rIns="0" bIns="0" rtlCol="0" anchor="ctr"/>
-          <a:lstStyle/>
-          <a:p>
-            <a:pPr algn="r" indent="0" marL="0">
-              <a:buNone/>
-            </a:pPr>
-            <a:r>
-              <a:rPr lang="en-US" sz="900" dirty="0">
-                <a:solidFill>
-                  <a:srgbClr val="5D5D72"/>
-                </a:solidFill>
-                <a:latin typeface="Calibri" pitchFamily="34" charset="0"/>
-                <a:ea typeface="Calibri" pitchFamily="34" charset="-122"/>
-                <a:cs typeface="Calibri" pitchFamily="34" charset="-120"/>
-              </a:rPr>
-              <a:t>9</a:t>
-            </a:r>
-            <a:endParaRPr lang="en-US" sz="900" dirty="0"/>
+          <p:cNvPr id="8" name="cuinotes-footer-mark"/>
+          <p:cNvSpPr txBox="1"/>
+          <p:nvPr/>
+        </p:nvSpPr>
+        <p:spPr>
+          <a:xfrm>
+            <a:off x="9951720" y="6455664"/>
+            <a:ext cx="2011680" cy="292608"/>
+          </a:xfrm>
+          <a:prstGeom prst="rect">
+            <a:avLst/>
+          </a:prstGeom>
+          <a:noFill/>
+        </p:spPr>
+        <p:txBody>
+          <a:bodyPr wrap="none" lIns="0" rIns="0" tIns="0" bIns="0">
+            <a:spAutoFit/>
+          </a:bodyPr>
+          <a:lstStyle/>
+          <a:p>
+            <a:pPr algn="r"/>
+            <a:r>
+              <a:rPr sz="1000">
+                <a:solidFill>
+                  <a:srgbClr val="8A939B"/>
+                </a:solidFill>
+                <a:hlinkClick r:id="rId3"/>
+              </a:rPr>
+              <a:t>cuinotes.com</a:t>
+            </a:r>
+            <a:r>
+              <a:rPr sz="1000">
+                <a:solidFill>
+                  <a:srgbClr val="8A939B"/>
+                </a:solidFill>
+              </a:rPr>
+              <a:t>  ·  9</a:t>
+            </a:r>
           </a:p>
         </p:txBody>
       </p:sp>

--- a/slides/CSC336-Lecture-14-Regular-Expressions-and-JSON.pptx
+++ b/slides/CSC336-Lecture-14-Regular-Expressions-and-JSON.pptx
@@ -3271,9 +3271,13 @@
             </a:avLst>
           </a:prstGeom>
           <a:solidFill>
-            <a:srgbClr val="1E1E4C"/>
+            <a:srgbClr val="F7F8F9"/>
           </a:solidFill>
-          <a:ln/>
+          <a:ln w="9525">
+            <a:solidFill>
+              <a:srgbClr val="D0D5DD"/>
+            </a:solidFill>
+          </a:ln>
         </p:spPr>
         <p:txBody>
           <a:bodyPr/>
@@ -3310,7 +3314,7 @@
             <a:r>
               <a:rPr lang="en-US" sz="1400" dirty="0">
                 <a:solidFill>
-                  <a:srgbClr val="C9D3F5"/>
+                  <a:srgbClr val="1F2429"/>
                 </a:solidFill>
                 <a:latin typeface="Courier New" pitchFamily="34" charset="0"/>
                 <a:ea typeface="Courier New" pitchFamily="34" charset="-122"/>
@@ -3330,7 +3334,7 @@
             <a:r>
               <a:rPr lang="en-US" sz="1400" dirty="0">
                 <a:solidFill>
-                  <a:srgbClr val="C9D3F5"/>
+                  <a:srgbClr val="1F2429"/>
                 </a:solidFill>
                 <a:latin typeface="Courier New" pitchFamily="34" charset="0"/>
                 <a:ea typeface="Courier New" pitchFamily="34" charset="-122"/>
@@ -3350,7 +3354,7 @@
             <a:r>
               <a:rPr lang="en-US" sz="1400" dirty="0">
                 <a:solidFill>
-                  <a:srgbClr val="C9D3F5"/>
+                  <a:srgbClr val="1F2429"/>
                 </a:solidFill>
                 <a:latin typeface="Courier New" pitchFamily="34" charset="0"/>
                 <a:ea typeface="Courier New" pitchFamily="34" charset="-122"/>
@@ -3379,7 +3383,7 @@
             <a:r>
               <a:rPr lang="en-US" sz="1400" dirty="0">
                 <a:solidFill>
-                  <a:srgbClr val="C9D3F5"/>
+                  <a:srgbClr val="1F2429"/>
                 </a:solidFill>
                 <a:latin typeface="Courier New" pitchFamily="34" charset="0"/>
                 <a:ea typeface="Courier New" pitchFamily="34" charset="-122"/>
@@ -3399,7 +3403,7 @@
             <a:r>
               <a:rPr lang="en-US" sz="1400" dirty="0">
                 <a:solidFill>
-                  <a:srgbClr val="C9D3F5"/>
+                  <a:srgbClr val="1F2429"/>
                 </a:solidFill>
                 <a:latin typeface="Courier New" pitchFamily="34" charset="0"/>
                 <a:ea typeface="Courier New" pitchFamily="34" charset="-122"/>
@@ -3419,7 +3423,7 @@
             <a:r>
               <a:rPr lang="en-US" sz="1400" dirty="0">
                 <a:solidFill>
-                  <a:srgbClr val="C9D3F5"/>
+                  <a:srgbClr val="1F2429"/>
                 </a:solidFill>
                 <a:latin typeface="Courier New" pitchFamily="34" charset="0"/>
                 <a:ea typeface="Courier New" pitchFamily="34" charset="-122"/>
@@ -3439,7 +3443,7 @@
             <a:r>
               <a:rPr lang="en-US" sz="1400" dirty="0">
                 <a:solidFill>
-                  <a:srgbClr val="C9D3F5"/>
+                  <a:srgbClr val="1F2429"/>
                 </a:solidFill>
                 <a:latin typeface="Courier New" pitchFamily="34" charset="0"/>
                 <a:ea typeface="Courier New" pitchFamily="34" charset="-122"/>
@@ -3459,7 +3463,7 @@
             <a:r>
               <a:rPr lang="en-US" sz="1400" dirty="0">
                 <a:solidFill>
-                  <a:srgbClr val="C9D3F5"/>
+                  <a:srgbClr val="1F2429"/>
                 </a:solidFill>
                 <a:latin typeface="Courier New" pitchFamily="34" charset="0"/>
                 <a:ea typeface="Courier New" pitchFamily="34" charset="-122"/>
@@ -3641,9 +3645,13 @@
             </a:avLst>
           </a:prstGeom>
           <a:solidFill>
-            <a:srgbClr val="1E1E4C"/>
+            <a:srgbClr val="F7F8F9"/>
           </a:solidFill>
-          <a:ln/>
+          <a:ln w="9525">
+            <a:solidFill>
+              <a:srgbClr val="D0D5DD"/>
+            </a:solidFill>
+          </a:ln>
         </p:spPr>
         <p:txBody>
           <a:bodyPr/>
@@ -3680,7 +3688,7 @@
             <a:r>
               <a:rPr lang="en-US" sz="1400" dirty="0">
                 <a:solidFill>
-                  <a:srgbClr val="C9D3F5"/>
+                  <a:srgbClr val="1F2429"/>
                 </a:solidFill>
                 <a:latin typeface="Courier New" pitchFamily="34" charset="0"/>
                 <a:ea typeface="Courier New" pitchFamily="34" charset="-122"/>
@@ -3700,7 +3708,7 @@
             <a:r>
               <a:rPr lang="en-US" sz="1400" dirty="0">
                 <a:solidFill>
-                  <a:srgbClr val="C9D3F5"/>
+                  <a:srgbClr val="1F2429"/>
                 </a:solidFill>
                 <a:latin typeface="Courier New" pitchFamily="34" charset="0"/>
                 <a:ea typeface="Courier New" pitchFamily="34" charset="-122"/>
@@ -3720,7 +3728,7 @@
             <a:r>
               <a:rPr lang="en-US" sz="1400" dirty="0">
                 <a:solidFill>
-                  <a:srgbClr val="C9D3F5"/>
+                  <a:srgbClr val="1F2429"/>
                 </a:solidFill>
                 <a:latin typeface="Courier New" pitchFamily="34" charset="0"/>
                 <a:ea typeface="Courier New" pitchFamily="34" charset="-122"/>
@@ -3941,9 +3949,13 @@
             </a:avLst>
           </a:prstGeom>
           <a:solidFill>
-            <a:srgbClr val="1E1E4C"/>
+            <a:srgbClr val="F7F8F9"/>
           </a:solidFill>
-          <a:ln/>
+          <a:ln w="9525">
+            <a:solidFill>
+              <a:srgbClr val="D0D5DD"/>
+            </a:solidFill>
+          </a:ln>
         </p:spPr>
         <p:txBody>
           <a:bodyPr/>
@@ -3980,7 +3992,7 @@
             <a:r>
               <a:rPr lang="en-US" sz="1400" dirty="0">
                 <a:solidFill>
-                  <a:srgbClr val="C9D3F5"/>
+                  <a:srgbClr val="1F2429"/>
                 </a:solidFill>
                 <a:latin typeface="Courier New" pitchFamily="34" charset="0"/>
                 <a:ea typeface="Courier New" pitchFamily="34" charset="-122"/>
@@ -4000,7 +4012,7 @@
             <a:r>
               <a:rPr lang="en-US" sz="1400" dirty="0">
                 <a:solidFill>
-                  <a:srgbClr val="C9D3F5"/>
+                  <a:srgbClr val="1F2429"/>
                 </a:solidFill>
                 <a:latin typeface="Courier New" pitchFamily="34" charset="0"/>
                 <a:ea typeface="Courier New" pitchFamily="34" charset="-122"/>
@@ -4029,7 +4041,7 @@
             <a:r>
               <a:rPr lang="en-US" sz="1400" dirty="0">
                 <a:solidFill>
-                  <a:srgbClr val="C9D3F5"/>
+                  <a:srgbClr val="1F2429"/>
                 </a:solidFill>
                 <a:latin typeface="Courier New" pitchFamily="34" charset="0"/>
                 <a:ea typeface="Courier New" pitchFamily="34" charset="-122"/>
@@ -4049,7 +4061,7 @@
             <a:r>
               <a:rPr lang="en-US" sz="1400" dirty="0">
                 <a:solidFill>
-                  <a:srgbClr val="C9D3F5"/>
+                  <a:srgbClr val="1F2429"/>
                 </a:solidFill>
                 <a:latin typeface="Courier New" pitchFamily="34" charset="0"/>
                 <a:ea typeface="Courier New" pitchFamily="34" charset="-122"/>
@@ -4069,7 +4081,7 @@
             <a:r>
               <a:rPr lang="en-US" sz="1400" dirty="0">
                 <a:solidFill>
-                  <a:srgbClr val="C9D3F5"/>
+                  <a:srgbClr val="1F2429"/>
                 </a:solidFill>
                 <a:latin typeface="Courier New" pitchFamily="34" charset="0"/>
                 <a:ea typeface="Courier New" pitchFamily="34" charset="-122"/>
@@ -4098,7 +4110,7 @@
             <a:r>
               <a:rPr lang="en-US" sz="1400" dirty="0">
                 <a:solidFill>
-                  <a:srgbClr val="C9D3F5"/>
+                  <a:srgbClr val="1F2429"/>
                 </a:solidFill>
                 <a:latin typeface="Courier New" pitchFamily="34" charset="0"/>
                 <a:ea typeface="Courier New" pitchFamily="34" charset="-122"/>
@@ -4118,7 +4130,7 @@
             <a:r>
               <a:rPr lang="en-US" sz="1400" dirty="0">
                 <a:solidFill>
-                  <a:srgbClr val="C9D3F5"/>
+                  <a:srgbClr val="1F2429"/>
                 </a:solidFill>
                 <a:latin typeface="Courier New" pitchFamily="34" charset="0"/>
                 <a:ea typeface="Courier New" pitchFamily="34" charset="-122"/>
@@ -4300,9 +4312,13 @@
             </a:avLst>
           </a:prstGeom>
           <a:solidFill>
-            <a:srgbClr val="1E1E4C"/>
+            <a:srgbClr val="F7F8F9"/>
           </a:solidFill>
-          <a:ln/>
+          <a:ln w="9525">
+            <a:solidFill>
+              <a:srgbClr val="D0D5DD"/>
+            </a:solidFill>
+          </a:ln>
         </p:spPr>
         <p:txBody>
           <a:bodyPr/>
@@ -4339,7 +4355,7 @@
             <a:r>
               <a:rPr lang="en-US" sz="1269" dirty="0">
                 <a:solidFill>
-                  <a:srgbClr val="C9D3F5"/>
+                  <a:srgbClr val="1F2429"/>
                 </a:solidFill>
                 <a:latin typeface="Courier New" pitchFamily="34" charset="0"/>
                 <a:ea typeface="Courier New" pitchFamily="34" charset="-122"/>
@@ -4359,7 +4375,7 @@
             <a:r>
               <a:rPr lang="en-US" sz="1269" dirty="0">
                 <a:solidFill>
-                  <a:srgbClr val="C9D3F5"/>
+                  <a:srgbClr val="1F2429"/>
                 </a:solidFill>
                 <a:latin typeface="Courier New" pitchFamily="34" charset="0"/>
                 <a:ea typeface="Courier New" pitchFamily="34" charset="-122"/>
@@ -4379,7 +4395,7 @@
             <a:r>
               <a:rPr lang="en-US" sz="1269" dirty="0">
                 <a:solidFill>
-                  <a:srgbClr val="C9D3F5"/>
+                  <a:srgbClr val="1F2429"/>
                 </a:solidFill>
                 <a:latin typeface="Courier New" pitchFamily="34" charset="0"/>
                 <a:ea typeface="Courier New" pitchFamily="34" charset="-122"/>
@@ -4399,7 +4415,7 @@
             <a:r>
               <a:rPr lang="en-US" sz="1269" dirty="0">
                 <a:solidFill>
-                  <a:srgbClr val="C9D3F5"/>
+                  <a:srgbClr val="1F2429"/>
                 </a:solidFill>
                 <a:latin typeface="Courier New" pitchFamily="34" charset="0"/>
                 <a:ea typeface="Courier New" pitchFamily="34" charset="-122"/>
@@ -4419,7 +4435,7 @@
             <a:r>
               <a:rPr lang="en-US" sz="1269" dirty="0">
                 <a:solidFill>
-                  <a:srgbClr val="C9D3F5"/>
+                  <a:srgbClr val="1F2429"/>
                 </a:solidFill>
                 <a:latin typeface="Courier New" pitchFamily="34" charset="0"/>
                 <a:ea typeface="Courier New" pitchFamily="34" charset="-122"/>
@@ -4439,7 +4455,7 @@
             <a:r>
               <a:rPr lang="en-US" sz="1269" dirty="0">
                 <a:solidFill>
-                  <a:srgbClr val="C9D3F5"/>
+                  <a:srgbClr val="1F2429"/>
                 </a:solidFill>
                 <a:latin typeface="Courier New" pitchFamily="34" charset="0"/>
                 <a:ea typeface="Courier New" pitchFamily="34" charset="-122"/>
@@ -4468,7 +4484,7 @@
             <a:r>
               <a:rPr lang="en-US" sz="1269" dirty="0">
                 <a:solidFill>
-                  <a:srgbClr val="C9D3F5"/>
+                  <a:srgbClr val="1F2429"/>
                 </a:solidFill>
                 <a:latin typeface="Courier New" pitchFamily="34" charset="0"/>
                 <a:ea typeface="Courier New" pitchFamily="34" charset="-122"/>
@@ -4488,7 +4504,7 @@
             <a:r>
               <a:rPr lang="en-US" sz="1269" dirty="0">
                 <a:solidFill>
-                  <a:srgbClr val="C9D3F5"/>
+                  <a:srgbClr val="1F2429"/>
                 </a:solidFill>
                 <a:latin typeface="Courier New" pitchFamily="34" charset="0"/>
                 <a:ea typeface="Courier New" pitchFamily="34" charset="-122"/>
@@ -4508,7 +4524,7 @@
             <a:r>
               <a:rPr lang="en-US" sz="1269" dirty="0">
                 <a:solidFill>
-                  <a:srgbClr val="C9D3F5"/>
+                  <a:srgbClr val="1F2429"/>
                 </a:solidFill>
                 <a:latin typeface="Courier New" pitchFamily="34" charset="0"/>
                 <a:ea typeface="Courier New" pitchFamily="34" charset="-122"/>
@@ -4528,7 +4544,7 @@
             <a:r>
               <a:rPr lang="en-US" sz="1269" dirty="0">
                 <a:solidFill>
-                  <a:srgbClr val="C9D3F5"/>
+                  <a:srgbClr val="1F2429"/>
                 </a:solidFill>
                 <a:latin typeface="Courier New" pitchFamily="34" charset="0"/>
                 <a:ea typeface="Courier New" pitchFamily="34" charset="-122"/>
@@ -4548,7 +4564,7 @@
             <a:r>
               <a:rPr lang="en-US" sz="1269" dirty="0">
                 <a:solidFill>
-                  <a:srgbClr val="C9D3F5"/>
+                  <a:srgbClr val="1F2429"/>
                 </a:solidFill>
                 <a:latin typeface="Courier New" pitchFamily="34" charset="0"/>
                 <a:ea typeface="Courier New" pitchFamily="34" charset="-122"/>
@@ -4568,7 +4584,7 @@
             <a:r>
               <a:rPr lang="en-US" sz="1269" dirty="0">
                 <a:solidFill>
-                  <a:srgbClr val="C9D3F5"/>
+                  <a:srgbClr val="1F2429"/>
                 </a:solidFill>
                 <a:latin typeface="Courier New" pitchFamily="34" charset="0"/>
                 <a:ea typeface="Courier New" pitchFamily="34" charset="-122"/>
@@ -4588,7 +4604,7 @@
             <a:r>
               <a:rPr lang="en-US" sz="1269" dirty="0">
                 <a:solidFill>
-                  <a:srgbClr val="C9D3F5"/>
+                  <a:srgbClr val="1F2429"/>
                 </a:solidFill>
                 <a:latin typeface="Courier New" pitchFamily="34" charset="0"/>
                 <a:ea typeface="Courier New" pitchFamily="34" charset="-122"/>
@@ -4770,9 +4786,13 @@
             </a:avLst>
           </a:prstGeom>
           <a:solidFill>
-            <a:srgbClr val="1E1E4C"/>
+            <a:srgbClr val="F7F8F9"/>
           </a:solidFill>
-          <a:ln/>
+          <a:ln w="9525">
+            <a:solidFill>
+              <a:srgbClr val="D0D5DD"/>
+            </a:solidFill>
+          </a:ln>
         </p:spPr>
         <p:txBody>
           <a:bodyPr/>
@@ -4809,7 +4829,7 @@
             <a:r>
               <a:rPr lang="en-US" sz="1400" dirty="0">
                 <a:solidFill>
-                  <a:srgbClr val="C9D3F5"/>
+                  <a:srgbClr val="1F2429"/>
                 </a:solidFill>
                 <a:latin typeface="Courier New" pitchFamily="34" charset="0"/>
                 <a:ea typeface="Courier New" pitchFamily="34" charset="-122"/>
@@ -4829,7 +4849,7 @@
             <a:r>
               <a:rPr lang="en-US" sz="1400" dirty="0">
                 <a:solidFill>
-                  <a:srgbClr val="C9D3F5"/>
+                  <a:srgbClr val="1F2429"/>
                 </a:solidFill>
                 <a:latin typeface="Courier New" pitchFamily="34" charset="0"/>
                 <a:ea typeface="Courier New" pitchFamily="34" charset="-122"/>
@@ -4849,7 +4869,7 @@
             <a:r>
               <a:rPr lang="en-US" sz="1400" dirty="0">
                 <a:solidFill>
-                  <a:srgbClr val="C9D3F5"/>
+                  <a:srgbClr val="1F2429"/>
                 </a:solidFill>
                 <a:latin typeface="Courier New" pitchFamily="34" charset="0"/>
                 <a:ea typeface="Courier New" pitchFamily="34" charset="-122"/>
@@ -4869,7 +4889,7 @@
             <a:r>
               <a:rPr lang="en-US" sz="1400" dirty="0">
                 <a:solidFill>
-                  <a:srgbClr val="C9D3F5"/>
+                  <a:srgbClr val="1F2429"/>
                 </a:solidFill>
                 <a:latin typeface="Courier New" pitchFamily="34" charset="0"/>
                 <a:ea typeface="Courier New" pitchFamily="34" charset="-122"/>
@@ -4889,7 +4909,7 @@
             <a:r>
               <a:rPr lang="en-US" sz="1400" dirty="0">
                 <a:solidFill>
-                  <a:srgbClr val="C9D3F5"/>
+                  <a:srgbClr val="1F2429"/>
                 </a:solidFill>
                 <a:latin typeface="Courier New" pitchFamily="34" charset="0"/>
                 <a:ea typeface="Courier New" pitchFamily="34" charset="-122"/>
@@ -5063,7 +5083,7 @@
         <p:spPr>
           <a:xfrm>
             <a:off x="640080" y="1965960"/>
-            <a:ext cx="10911535" cy="1828800"/>
+            <a:ext cx="10911535" cy="3657600"/>
           </a:xfrm>
           <a:prstGeom prst="roundRect">
             <a:avLst>
@@ -5094,7 +5114,7 @@
         <p:spPr>
           <a:xfrm>
             <a:off x="868680" y="2103120"/>
-            <a:ext cx="10454335" cy="274320"/>
+            <a:ext cx="10454335" cy="400000"/>
           </a:xfrm>
           <a:prstGeom prst="rect">
             <a:avLst/>
@@ -5110,7 +5130,7 @@
               <a:buNone/>
             </a:pPr>
             <a:r>
-              <a:rPr lang="en-US" sz="1000" b="1" spc="200" kern="0" dirty="0">
+              <a:rPr lang="en-US" sz="1800" b="1" spc="200" kern="0" dirty="0">
                 <a:solidFill>
                   <a:srgbClr val="8A3A12"/>
                 </a:solidFill>
@@ -5120,7 +5140,7 @@
               </a:rPr>
               <a:t>WARNING</a:t>
             </a:r>
-            <a:endParaRPr lang="en-US" sz="1000" dirty="0"/>
+            <a:endParaRPr lang="en-US" sz="1800" dirty="0"/>
           </a:p>
         </p:txBody>
       </p:sp>
@@ -5132,24 +5152,24 @@
         </p:nvSpPr>
         <p:spPr>
           <a:xfrm>
-            <a:off x="868680" y="2404872"/>
-            <a:ext cx="10454335" cy="1234440"/>
-          </a:xfrm>
-          <a:prstGeom prst="rect">
-            <a:avLst/>
-          </a:prstGeom>
-          <a:noFill/>
-          <a:ln/>
-        </p:spPr>
-        <p:txBody>
-          <a:bodyPr wrap="square" lIns="0" tIns="0" rIns="0" bIns="0" rtlCol="0" anchor="t"/>
-          <a:lstStyle/>
-          <a:p>
-            <a:pPr indent="0" marL="0">
-              <a:buNone/>
-            </a:pPr>
-            <a:r>
-              <a:rPr lang="en-US" sz="1250" dirty="0">
+            <a:off x="868680" y="2795960"/>
+            <a:ext cx="10454335" cy="2800000"/>
+          </a:xfrm>
+          <a:prstGeom prst="rect">
+            <a:avLst/>
+          </a:prstGeom>
+          <a:noFill/>
+          <a:ln/>
+        </p:spPr>
+        <p:txBody>
+          <a:bodyPr wrap="square" lIns="0" tIns="0" rIns="0" bIns="0" rtlCol="0" anchor="ctr"/>
+          <a:lstStyle/>
+          <a:p>
+            <a:pPr indent="0" marL="0">
+              <a:buNone/>
+            </a:pPr>
+            <a:r>
+              <a:rPr lang="en-US" sz="2800" dirty="0">
                 <a:solidFill>
                   <a:srgbClr val="26262F"/>
                 </a:solidFill>
@@ -5159,7 +5179,7 @@
               </a:rPr>
               <a:t>A regex can confirm that student@comsats.edu.pk LOOKS LIKE an email address, but it cannot confirm the mailbox actually exists. Always pair client-side shape validation with real server-side verification for anything important.</a:t>
             </a:r>
-            <a:endParaRPr lang="en-US" sz="1250" dirty="0"/>
+            <a:endParaRPr lang="en-US" sz="2800" dirty="0"/>
           </a:p>
         </p:txBody>
       </p:sp>
@@ -5325,7 +5345,7 @@
         <p:spPr>
           <a:xfrm>
             <a:off x="640080" y="1965960"/>
-            <a:ext cx="10911535" cy="1463040"/>
+            <a:ext cx="10911535" cy="3657600"/>
           </a:xfrm>
           <a:prstGeom prst="roundRect">
             <a:avLst>
@@ -5356,7 +5376,7 @@
         <p:spPr>
           <a:xfrm>
             <a:off x="868680" y="2103120"/>
-            <a:ext cx="10454335" cy="274320"/>
+            <a:ext cx="10454335" cy="400000"/>
           </a:xfrm>
           <a:prstGeom prst="rect">
             <a:avLst/>
@@ -5372,7 +5392,7 @@
               <a:buNone/>
             </a:pPr>
             <a:r>
-              <a:rPr lang="en-US" sz="1000" b="1" spc="200" kern="0" dirty="0">
+              <a:rPr lang="en-US" sz="1800" b="1" spc="200" kern="0" dirty="0">
                 <a:solidFill>
                   <a:srgbClr val="1F7A46"/>
                 </a:solidFill>
@@ -5382,7 +5402,7 @@
               </a:rPr>
               <a:t>TIP</a:t>
             </a:r>
-            <a:endParaRPr lang="en-US" sz="1000" dirty="0"/>
+            <a:endParaRPr lang="en-US" sz="1800" dirty="0"/>
           </a:p>
         </p:txBody>
       </p:sp>
@@ -5394,24 +5414,24 @@
         </p:nvSpPr>
         <p:spPr>
           <a:xfrm>
-            <a:off x="868680" y="2404872"/>
-            <a:ext cx="10454335" cy="868680"/>
-          </a:xfrm>
-          <a:prstGeom prst="rect">
-            <a:avLst/>
-          </a:prstGeom>
-          <a:noFill/>
-          <a:ln/>
-        </p:spPr>
-        <p:txBody>
-          <a:bodyPr wrap="square" lIns="0" tIns="0" rIns="0" bIns="0" rtlCol="0" anchor="t"/>
-          <a:lstStyle/>
-          <a:p>
-            <a:pPr indent="0" marL="0">
-              <a:buNone/>
-            </a:pPr>
-            <a:r>
-              <a:rPr lang="en-US" sz="1250" dirty="0">
+            <a:off x="868680" y="2795960"/>
+            <a:ext cx="10454335" cy="2653600"/>
+          </a:xfrm>
+          <a:prstGeom prst="rect">
+            <a:avLst/>
+          </a:prstGeom>
+          <a:noFill/>
+          <a:ln/>
+        </p:spPr>
+        <p:txBody>
+          <a:bodyPr wrap="square" lIns="0" tIns="0" rIns="0" bIns="0" rtlCol="0" anchor="ctr"/>
+          <a:lstStyle/>
+          <a:p>
+            <a:pPr indent="0" marL="0">
+              <a:buNone/>
+            </a:pPr>
+            <a:r>
+              <a:rPr lang="en-US" sz="2800" dirty="0">
                 <a:solidFill>
                   <a:srgbClr val="26262F"/>
                 </a:solidFill>
@@ -5421,7 +5441,7 @@
               </a:rPr>
               <a:t>Tools like regex101.com let you build and test a pattern against sample strings with live highlighting -- extremely useful while you're still learning the syntax.</a:t>
             </a:r>
-            <a:endParaRPr lang="en-US" sz="1250" dirty="0"/>
+            <a:endParaRPr lang="en-US" sz="2800" dirty="0"/>
           </a:p>
         </p:txBody>
       </p:sp>
@@ -5595,9 +5615,13 @@
             </a:avLst>
           </a:prstGeom>
           <a:solidFill>
-            <a:srgbClr val="1E1E4C"/>
+            <a:srgbClr val="F7F8F9"/>
           </a:solidFill>
-          <a:ln/>
+          <a:ln w="9525">
+            <a:solidFill>
+              <a:srgbClr val="D0D5DD"/>
+            </a:solidFill>
+          </a:ln>
         </p:spPr>
         <p:txBody>
           <a:bodyPr/>
@@ -5634,7 +5658,7 @@
             <a:r>
               <a:rPr lang="en-US" sz="1400" dirty="0">
                 <a:solidFill>
-                  <a:srgbClr val="C9D3F5"/>
+                  <a:srgbClr val="1F2429"/>
                 </a:solidFill>
                 <a:latin typeface="Courier New" pitchFamily="34" charset="0"/>
                 <a:ea typeface="Courier New" pitchFamily="34" charset="-122"/>
@@ -5654,7 +5678,7 @@
             <a:r>
               <a:rPr lang="en-US" sz="1400" dirty="0">
                 <a:solidFill>
-                  <a:srgbClr val="C9D3F5"/>
+                  <a:srgbClr val="1F2429"/>
                 </a:solidFill>
                 <a:latin typeface="Courier New" pitchFamily="34" charset="0"/>
                 <a:ea typeface="Courier New" pitchFamily="34" charset="-122"/>
@@ -5674,7 +5698,7 @@
             <a:r>
               <a:rPr lang="en-US" sz="1400" dirty="0">
                 <a:solidFill>
-                  <a:srgbClr val="C9D3F5"/>
+                  <a:srgbClr val="1F2429"/>
                 </a:solidFill>
                 <a:latin typeface="Courier New" pitchFamily="34" charset="0"/>
                 <a:ea typeface="Courier New" pitchFamily="34" charset="-122"/>
@@ -5694,7 +5718,7 @@
             <a:r>
               <a:rPr lang="en-US" sz="1400" dirty="0">
                 <a:solidFill>
-                  <a:srgbClr val="C9D3F5"/>
+                  <a:srgbClr val="1F2429"/>
                 </a:solidFill>
                 <a:latin typeface="Courier New" pitchFamily="34" charset="0"/>
                 <a:ea typeface="Courier New" pitchFamily="34" charset="-122"/>
@@ -5714,7 +5738,7 @@
             <a:r>
               <a:rPr lang="en-US" sz="1400" dirty="0">
                 <a:solidFill>
-                  <a:srgbClr val="C9D3F5"/>
+                  <a:srgbClr val="1F2429"/>
                 </a:solidFill>
                 <a:latin typeface="Courier New" pitchFamily="34" charset="0"/>
                 <a:ea typeface="Courier New" pitchFamily="34" charset="-122"/>
@@ -5734,7 +5758,7 @@
             <a:r>
               <a:rPr lang="en-US" sz="1400" dirty="0">
                 <a:solidFill>
-                  <a:srgbClr val="C9D3F5"/>
+                  <a:srgbClr val="1F2429"/>
                 </a:solidFill>
                 <a:latin typeface="Courier New" pitchFamily="34" charset="0"/>
                 <a:ea typeface="Courier New" pitchFamily="34" charset="-122"/>
@@ -5754,7 +5778,7 @@
             <a:r>
               <a:rPr lang="en-US" sz="1400" dirty="0">
                 <a:solidFill>
-                  <a:srgbClr val="C9D3F5"/>
+                  <a:srgbClr val="1F2429"/>
                 </a:solidFill>
                 <a:latin typeface="Courier New" pitchFamily="34" charset="0"/>
                 <a:ea typeface="Courier New" pitchFamily="34" charset="-122"/>
@@ -5774,7 +5798,7 @@
             <a:r>
               <a:rPr lang="en-US" sz="1400" dirty="0">
                 <a:solidFill>
-                  <a:srgbClr val="C9D3F5"/>
+                  <a:srgbClr val="1F2429"/>
                 </a:solidFill>
                 <a:latin typeface="Courier New" pitchFamily="34" charset="0"/>
                 <a:ea typeface="Courier New" pitchFamily="34" charset="-122"/>
@@ -7925,9 +7949,13 @@
             </a:avLst>
           </a:prstGeom>
           <a:solidFill>
-            <a:srgbClr val="1E1E4C"/>
+            <a:srgbClr val="F7F8F9"/>
           </a:solidFill>
-          <a:ln/>
+          <a:ln w="9525">
+            <a:solidFill>
+              <a:srgbClr val="D0D5DD"/>
+            </a:solidFill>
+          </a:ln>
         </p:spPr>
         <p:txBody>
           <a:bodyPr/>
@@ -7964,7 +7992,7 @@
             <a:r>
               <a:rPr lang="en-US" sz="1400" dirty="0">
                 <a:solidFill>
-                  <a:srgbClr val="C9D3F5"/>
+                  <a:srgbClr val="1F2429"/>
                 </a:solidFill>
                 <a:latin typeface="Courier New" pitchFamily="34" charset="0"/>
                 <a:ea typeface="Courier New" pitchFamily="34" charset="-122"/>
@@ -7984,7 +8012,7 @@
             <a:r>
               <a:rPr lang="en-US" sz="1400" dirty="0">
                 <a:solidFill>
-                  <a:srgbClr val="C9D3F5"/>
+                  <a:srgbClr val="1F2429"/>
                 </a:solidFill>
                 <a:latin typeface="Courier New" pitchFamily="34" charset="0"/>
                 <a:ea typeface="Courier New" pitchFamily="34" charset="-122"/>
@@ -8004,7 +8032,7 @@
             <a:r>
               <a:rPr lang="en-US" sz="1400" dirty="0">
                 <a:solidFill>
-                  <a:srgbClr val="C9D3F5"/>
+                  <a:srgbClr val="1F2429"/>
                 </a:solidFill>
                 <a:latin typeface="Courier New" pitchFamily="34" charset="0"/>
                 <a:ea typeface="Courier New" pitchFamily="34" charset="-122"/>
@@ -8024,7 +8052,7 @@
             <a:r>
               <a:rPr lang="en-US" sz="1400" dirty="0">
                 <a:solidFill>
-                  <a:srgbClr val="C9D3F5"/>
+                  <a:srgbClr val="1F2429"/>
                 </a:solidFill>
                 <a:latin typeface="Courier New" pitchFamily="34" charset="0"/>
                 <a:ea typeface="Courier New" pitchFamily="34" charset="-122"/>
@@ -8044,7 +8072,7 @@
             <a:r>
               <a:rPr lang="en-US" sz="1400" dirty="0">
                 <a:solidFill>
-                  <a:srgbClr val="C9D3F5"/>
+                  <a:srgbClr val="1F2429"/>
                 </a:solidFill>
                 <a:latin typeface="Courier New" pitchFamily="34" charset="0"/>
                 <a:ea typeface="Courier New" pitchFamily="34" charset="-122"/>
@@ -8073,7 +8101,7 @@
             <a:r>
               <a:rPr lang="en-US" sz="1400" dirty="0">
                 <a:solidFill>
-                  <a:srgbClr val="C9D3F5"/>
+                  <a:srgbClr val="1F2429"/>
                 </a:solidFill>
                 <a:latin typeface="Courier New" pitchFamily="34" charset="0"/>
                 <a:ea typeface="Courier New" pitchFamily="34" charset="-122"/>
@@ -8093,7 +8121,7 @@
             <a:r>
               <a:rPr lang="en-US" sz="1400" dirty="0">
                 <a:solidFill>
-                  <a:srgbClr val="C9D3F5"/>
+                  <a:srgbClr val="1F2429"/>
                 </a:solidFill>
                 <a:latin typeface="Courier New" pitchFamily="34" charset="0"/>
                 <a:ea typeface="Courier New" pitchFamily="34" charset="-122"/>
@@ -8113,7 +8141,7 @@
             <a:r>
               <a:rPr lang="en-US" sz="1400" dirty="0">
                 <a:solidFill>
-                  <a:srgbClr val="C9D3F5"/>
+                  <a:srgbClr val="1F2429"/>
                 </a:solidFill>
                 <a:latin typeface="Courier New" pitchFamily="34" charset="0"/>
                 <a:ea typeface="Courier New" pitchFamily="34" charset="-122"/>
@@ -8142,7 +8170,7 @@
             <a:r>
               <a:rPr lang="en-US" sz="1400" dirty="0">
                 <a:solidFill>
-                  <a:srgbClr val="C9D3F5"/>
+                  <a:srgbClr val="1F2429"/>
                 </a:solidFill>
                 <a:latin typeface="Courier New" pitchFamily="34" charset="0"/>
                 <a:ea typeface="Courier New" pitchFamily="34" charset="-122"/>
@@ -8162,7 +8190,7 @@
             <a:r>
               <a:rPr lang="en-US" sz="1400" dirty="0">
                 <a:solidFill>
-                  <a:srgbClr val="C9D3F5"/>
+                  <a:srgbClr val="1F2429"/>
                 </a:solidFill>
                 <a:latin typeface="Courier New" pitchFamily="34" charset="0"/>
                 <a:ea typeface="Courier New" pitchFamily="34" charset="-122"/>
@@ -8344,9 +8372,13 @@
             </a:avLst>
           </a:prstGeom>
           <a:solidFill>
-            <a:srgbClr val="1E1E4C"/>
+            <a:srgbClr val="F7F8F9"/>
           </a:solidFill>
-          <a:ln/>
+          <a:ln w="9525">
+            <a:solidFill>
+              <a:srgbClr val="D0D5DD"/>
+            </a:solidFill>
+          </a:ln>
         </p:spPr>
         <p:txBody>
           <a:bodyPr/>
@@ -8383,7 +8415,7 @@
             <a:r>
               <a:rPr lang="en-US" sz="1400" dirty="0">
                 <a:solidFill>
-                  <a:srgbClr val="C9D3F5"/>
+                  <a:srgbClr val="1F2429"/>
                 </a:solidFill>
                 <a:latin typeface="Courier New" pitchFamily="34" charset="0"/>
                 <a:ea typeface="Courier New" pitchFamily="34" charset="-122"/>
@@ -8403,7 +8435,7 @@
             <a:r>
               <a:rPr lang="en-US" sz="1400" dirty="0">
                 <a:solidFill>
-                  <a:srgbClr val="C9D3F5"/>
+                  <a:srgbClr val="1F2429"/>
                 </a:solidFill>
                 <a:latin typeface="Courier New" pitchFamily="34" charset="0"/>
                 <a:ea typeface="Courier New" pitchFamily="34" charset="-122"/>
@@ -8423,7 +8455,7 @@
             <a:r>
               <a:rPr lang="en-US" sz="1400" dirty="0">
                 <a:solidFill>
-                  <a:srgbClr val="C9D3F5"/>
+                  <a:srgbClr val="1F2429"/>
                 </a:solidFill>
                 <a:latin typeface="Courier New" pitchFamily="34" charset="0"/>
                 <a:ea typeface="Courier New" pitchFamily="34" charset="-122"/>
@@ -8443,7 +8475,7 @@
             <a:r>
               <a:rPr lang="en-US" sz="1400" dirty="0">
                 <a:solidFill>
-                  <a:srgbClr val="C9D3F5"/>
+                  <a:srgbClr val="1F2429"/>
                 </a:solidFill>
                 <a:latin typeface="Courier New" pitchFamily="34" charset="0"/>
                 <a:ea typeface="Courier New" pitchFamily="34" charset="-122"/>
@@ -8617,7 +8649,7 @@
         <p:spPr>
           <a:xfrm>
             <a:off x="640080" y="1965960"/>
-            <a:ext cx="10911535" cy="1463040"/>
+            <a:ext cx="10911535" cy="3657600"/>
           </a:xfrm>
           <a:prstGeom prst="roundRect">
             <a:avLst>
@@ -8648,7 +8680,7 @@
         <p:spPr>
           <a:xfrm>
             <a:off x="868680" y="2103120"/>
-            <a:ext cx="10454335" cy="274320"/>
+            <a:ext cx="10454335" cy="400000"/>
           </a:xfrm>
           <a:prstGeom prst="rect">
             <a:avLst/>
@@ -8664,7 +8696,7 @@
               <a:buNone/>
             </a:pPr>
             <a:r>
-              <a:rPr lang="en-US" sz="1000" b="1" spc="200" kern="0" dirty="0">
+              <a:rPr lang="en-US" sz="1800" b="1" spc="200" kern="0" dirty="0">
                 <a:solidFill>
                   <a:srgbClr val="8A3A12"/>
                 </a:solidFill>
@@ -8674,7 +8706,7 @@
               </a:rPr>
               <a:t>WARNING</a:t>
             </a:r>
-            <a:endParaRPr lang="en-US" sz="1000" dirty="0"/>
+            <a:endParaRPr lang="en-US" sz="1800" dirty="0"/>
           </a:p>
         </p:txBody>
       </p:sp>
@@ -8686,24 +8718,24 @@
         </p:nvSpPr>
         <p:spPr>
           <a:xfrm>
-            <a:off x="868680" y="2404872"/>
-            <a:ext cx="10454335" cy="868680"/>
-          </a:xfrm>
-          <a:prstGeom prst="rect">
-            <a:avLst/>
-          </a:prstGeom>
-          <a:noFill/>
-          <a:ln/>
-        </p:spPr>
-        <p:txBody>
-          <a:bodyPr wrap="square" lIns="0" tIns="0" rIns="0" bIns="0" rtlCol="0" anchor="t"/>
-          <a:lstStyle/>
-          <a:p>
-            <a:pPr indent="0" marL="0">
-              <a:buNone/>
-            </a:pPr>
-            <a:r>
-              <a:rPr lang="en-US" sz="1250" dirty="0">
+            <a:off x="868680" y="2795960"/>
+            <a:ext cx="10454335" cy="2667600"/>
+          </a:xfrm>
+          <a:prstGeom prst="rect">
+            <a:avLst/>
+          </a:prstGeom>
+          <a:noFill/>
+          <a:ln/>
+        </p:spPr>
+        <p:txBody>
+          <a:bodyPr wrap="square" lIns="0" tIns="0" rIns="0" bIns="0" rtlCol="0" anchor="ctr"/>
+          <a:lstStyle/>
+          <a:p>
+            <a:pPr indent="0" marL="0">
+              <a:buNone/>
+            </a:pPr>
+            <a:r>
+              <a:rPr lang="en-US" sz="2800" dirty="0">
                 <a:solidFill>
                   <a:srgbClr val="26262F"/>
                 </a:solidFill>
@@ -8713,7 +8745,7 @@
               </a:rPr>
               <a:t>JSON.parse throws a SyntaxError if the string is not valid JSON (single quotes, a trailing comma, etc). Always wrap JSON.parse on external data in a try...catch block.</a:t>
             </a:r>
-            <a:endParaRPr lang="en-US" sz="1250" dirty="0"/>
+            <a:endParaRPr lang="en-US" sz="2800" dirty="0"/>
           </a:p>
         </p:txBody>
       </p:sp>
@@ -8887,9 +8919,13 @@
             </a:avLst>
           </a:prstGeom>
           <a:solidFill>
-            <a:srgbClr val="1E1E4C"/>
+            <a:srgbClr val="F7F8F9"/>
           </a:solidFill>
-          <a:ln/>
+          <a:ln w="9525">
+            <a:solidFill>
+              <a:srgbClr val="D0D5DD"/>
+            </a:solidFill>
+          </a:ln>
         </p:spPr>
         <p:txBody>
           <a:bodyPr/>
@@ -8926,7 +8962,7 @@
             <a:r>
               <a:rPr lang="en-US" sz="1400" dirty="0">
                 <a:solidFill>
-                  <a:srgbClr val="C9D3F5"/>
+                  <a:srgbClr val="1F2429"/>
                 </a:solidFill>
                 <a:latin typeface="Courier New" pitchFamily="34" charset="0"/>
                 <a:ea typeface="Courier New" pitchFamily="34" charset="-122"/>
@@ -8946,7 +8982,7 @@
             <a:r>
               <a:rPr lang="en-US" sz="1400" dirty="0">
                 <a:solidFill>
-                  <a:srgbClr val="C9D3F5"/>
+                  <a:srgbClr val="1F2429"/>
                 </a:solidFill>
                 <a:latin typeface="Courier New" pitchFamily="34" charset="0"/>
                 <a:ea typeface="Courier New" pitchFamily="34" charset="-122"/>
@@ -8966,7 +9002,7 @@
             <a:r>
               <a:rPr lang="en-US" sz="1400" dirty="0">
                 <a:solidFill>
-                  <a:srgbClr val="C9D3F5"/>
+                  <a:srgbClr val="1F2429"/>
                 </a:solidFill>
                 <a:latin typeface="Courier New" pitchFamily="34" charset="0"/>
                 <a:ea typeface="Courier New" pitchFamily="34" charset="-122"/>
@@ -8986,7 +9022,7 @@
             <a:r>
               <a:rPr lang="en-US" sz="1400" dirty="0">
                 <a:solidFill>
-                  <a:srgbClr val="C9D3F5"/>
+                  <a:srgbClr val="1F2429"/>
                 </a:solidFill>
                 <a:latin typeface="Courier New" pitchFamily="34" charset="0"/>
                 <a:ea typeface="Courier New" pitchFamily="34" charset="-122"/>
@@ -9006,7 +9042,7 @@
             <a:r>
               <a:rPr lang="en-US" sz="1400" dirty="0">
                 <a:solidFill>
-                  <a:srgbClr val="C9D3F5"/>
+                  <a:srgbClr val="1F2429"/>
                 </a:solidFill>
                 <a:latin typeface="Courier New" pitchFamily="34" charset="0"/>
                 <a:ea typeface="Courier New" pitchFamily="34" charset="-122"/>
@@ -10094,9 +10130,13 @@
             </a:avLst>
           </a:prstGeom>
           <a:solidFill>
-            <a:srgbClr val="1E1E4C"/>
+            <a:srgbClr val="F7F8F9"/>
           </a:solidFill>
-          <a:ln/>
+          <a:ln w="9525">
+            <a:solidFill>
+              <a:srgbClr val="D0D5DD"/>
+            </a:solidFill>
+          </a:ln>
         </p:spPr>
         <p:txBody>
           <a:bodyPr/>
@@ -10133,7 +10173,7 @@
             <a:r>
               <a:rPr lang="en-US" sz="1400" dirty="0">
                 <a:solidFill>
-                  <a:srgbClr val="C9D3F5"/>
+                  <a:srgbClr val="1F2429"/>
                 </a:solidFill>
                 <a:latin typeface="Courier New" pitchFamily="34" charset="0"/>
                 <a:ea typeface="Courier New" pitchFamily="34" charset="-122"/>
@@ -10153,7 +10193,7 @@
             <a:r>
               <a:rPr lang="en-US" sz="1400" dirty="0">
                 <a:solidFill>
-                  <a:srgbClr val="C9D3F5"/>
+                  <a:srgbClr val="1F2429"/>
                 </a:solidFill>
                 <a:latin typeface="Courier New" pitchFamily="34" charset="0"/>
                 <a:ea typeface="Courier New" pitchFamily="34" charset="-122"/>
@@ -10173,7 +10213,7 @@
             <a:r>
               <a:rPr lang="en-US" sz="1400" dirty="0">
                 <a:solidFill>
-                  <a:srgbClr val="C9D3F5"/>
+                  <a:srgbClr val="1F2429"/>
                 </a:solidFill>
                 <a:latin typeface="Courier New" pitchFamily="34" charset="0"/>
                 <a:ea typeface="Courier New" pitchFamily="34" charset="-122"/>
@@ -10202,7 +10242,7 @@
             <a:r>
               <a:rPr lang="en-US" sz="1400" dirty="0">
                 <a:solidFill>
-                  <a:srgbClr val="C9D3F5"/>
+                  <a:srgbClr val="1F2429"/>
                 </a:solidFill>
                 <a:latin typeface="Courier New" pitchFamily="34" charset="0"/>
                 <a:ea typeface="Courier New" pitchFamily="34" charset="-122"/>
@@ -10222,7 +10262,7 @@
             <a:r>
               <a:rPr lang="en-US" sz="1400" dirty="0">
                 <a:solidFill>
-                  <a:srgbClr val="C9D3F5"/>
+                  <a:srgbClr val="1F2429"/>
                 </a:solidFill>
                 <a:latin typeface="Courier New" pitchFamily="34" charset="0"/>
                 <a:ea typeface="Courier New" pitchFamily="34" charset="-122"/>
@@ -10242,7 +10282,7 @@
             <a:r>
               <a:rPr lang="en-US" sz="1400" dirty="0">
                 <a:solidFill>
-                  <a:srgbClr val="C9D3F5"/>
+                  <a:srgbClr val="1F2429"/>
                 </a:solidFill>
                 <a:latin typeface="Courier New" pitchFamily="34" charset="0"/>
                 <a:ea typeface="Courier New" pitchFamily="34" charset="-122"/>
@@ -10463,9 +10503,13 @@
             </a:avLst>
           </a:prstGeom>
           <a:solidFill>
-            <a:srgbClr val="1E1E4C"/>
+            <a:srgbClr val="F7F8F9"/>
           </a:solidFill>
-          <a:ln/>
+          <a:ln w="9525">
+            <a:solidFill>
+              <a:srgbClr val="D0D5DD"/>
+            </a:solidFill>
+          </a:ln>
         </p:spPr>
         <p:txBody>
           <a:bodyPr/>
@@ -10502,7 +10546,7 @@
             <a:r>
               <a:rPr lang="en-US" sz="1400" dirty="0">
                 <a:solidFill>
-                  <a:srgbClr val="C9D3F5"/>
+                  <a:srgbClr val="1F2429"/>
                 </a:solidFill>
                 <a:latin typeface="Courier New" pitchFamily="34" charset="0"/>
                 <a:ea typeface="Courier New" pitchFamily="34" charset="-122"/>
@@ -10531,7 +10575,7 @@
             <a:r>
               <a:rPr lang="en-US" sz="1400" dirty="0">
                 <a:solidFill>
-                  <a:srgbClr val="C9D3F5"/>
+                  <a:srgbClr val="1F2429"/>
                 </a:solidFill>
                 <a:latin typeface="Courier New" pitchFamily="34" charset="0"/>
                 <a:ea typeface="Courier New" pitchFamily="34" charset="-122"/>
@@ -10551,7 +10595,7 @@
             <a:r>
               <a:rPr lang="en-US" sz="1400" dirty="0">
                 <a:solidFill>
-                  <a:srgbClr val="C9D3F5"/>
+                  <a:srgbClr val="1F2429"/>
                 </a:solidFill>
                 <a:latin typeface="Courier New" pitchFamily="34" charset="0"/>
                 <a:ea typeface="Courier New" pitchFamily="34" charset="-122"/>
@@ -10571,7 +10615,7 @@
             <a:r>
               <a:rPr lang="en-US" sz="1400" dirty="0">
                 <a:solidFill>
-                  <a:srgbClr val="C9D3F5"/>
+                  <a:srgbClr val="1F2429"/>
                 </a:solidFill>
                 <a:latin typeface="Courier New" pitchFamily="34" charset="0"/>
                 <a:ea typeface="Courier New" pitchFamily="34" charset="-122"/>
@@ -10591,7 +10635,7 @@
             <a:r>
               <a:rPr lang="en-US" sz="1400" dirty="0">
                 <a:solidFill>
-                  <a:srgbClr val="C9D3F5"/>
+                  <a:srgbClr val="1F2429"/>
                 </a:solidFill>
                 <a:latin typeface="Courier New" pitchFamily="34" charset="0"/>
                 <a:ea typeface="Courier New" pitchFamily="34" charset="-122"/>
@@ -10620,7 +10664,7 @@
             <a:r>
               <a:rPr lang="en-US" sz="1400" dirty="0">
                 <a:solidFill>
-                  <a:srgbClr val="C9D3F5"/>
+                  <a:srgbClr val="1F2429"/>
                 </a:solidFill>
                 <a:latin typeface="Courier New" pitchFamily="34" charset="0"/>
                 <a:ea typeface="Courier New" pitchFamily="34" charset="-122"/>
@@ -10640,7 +10684,7 @@
             <a:r>
               <a:rPr lang="en-US" sz="1400" dirty="0">
                 <a:solidFill>
-                  <a:srgbClr val="C9D3F5"/>
+                  <a:srgbClr val="1F2429"/>
                 </a:solidFill>
                 <a:latin typeface="Courier New" pitchFamily="34" charset="0"/>
                 <a:ea typeface="Courier New" pitchFamily="34" charset="-122"/>
@@ -10660,7 +10704,7 @@
             <a:r>
               <a:rPr lang="en-US" sz="1400" dirty="0">
                 <a:solidFill>
-                  <a:srgbClr val="C9D3F5"/>
+                  <a:srgbClr val="1F2429"/>
                 </a:solidFill>
                 <a:latin typeface="Courier New" pitchFamily="34" charset="0"/>
                 <a:ea typeface="Courier New" pitchFamily="34" charset="-122"/>
@@ -10680,7 +10724,7 @@
             <a:r>
               <a:rPr lang="en-US" sz="1400" dirty="0">
                 <a:solidFill>
-                  <a:srgbClr val="C9D3F5"/>
+                  <a:srgbClr val="1F2429"/>
                 </a:solidFill>
                 <a:latin typeface="Courier New" pitchFamily="34" charset="0"/>
                 <a:ea typeface="Courier New" pitchFamily="34" charset="-122"/>
@@ -10862,9 +10906,13 @@
             </a:avLst>
           </a:prstGeom>
           <a:solidFill>
-            <a:srgbClr val="1E1E4C"/>
+            <a:srgbClr val="F7F8F9"/>
           </a:solidFill>
-          <a:ln/>
+          <a:ln w="9525">
+            <a:solidFill>
+              <a:srgbClr val="D0D5DD"/>
+            </a:solidFill>
+          </a:ln>
         </p:spPr>
         <p:txBody>
           <a:bodyPr/>
@@ -10901,7 +10949,7 @@
             <a:r>
               <a:rPr lang="en-US" sz="1400" dirty="0">
                 <a:solidFill>
-                  <a:srgbClr val="C9D3F5"/>
+                  <a:srgbClr val="1F2429"/>
                 </a:solidFill>
                 <a:latin typeface="Courier New" pitchFamily="34" charset="0"/>
                 <a:ea typeface="Courier New" pitchFamily="34" charset="-122"/>
@@ -10921,7 +10969,7 @@
             <a:r>
               <a:rPr lang="en-US" sz="1400" dirty="0">
                 <a:solidFill>
-                  <a:srgbClr val="C9D3F5"/>
+                  <a:srgbClr val="1F2429"/>
                 </a:solidFill>
                 <a:latin typeface="Courier New" pitchFamily="34" charset="0"/>
                 <a:ea typeface="Courier New" pitchFamily="34" charset="-122"/>
@@ -10941,7 +10989,7 @@
             <a:r>
               <a:rPr lang="en-US" sz="1400" dirty="0">
                 <a:solidFill>
-                  <a:srgbClr val="C9D3F5"/>
+                  <a:srgbClr val="1F2429"/>
                 </a:solidFill>
                 <a:latin typeface="Courier New" pitchFamily="34" charset="0"/>
                 <a:ea typeface="Courier New" pitchFamily="34" charset="-122"/>
@@ -10961,7 +11009,7 @@
             <a:r>
               <a:rPr lang="en-US" sz="1400" dirty="0">
                 <a:solidFill>
-                  <a:srgbClr val="C9D3F5"/>
+                  <a:srgbClr val="1F2429"/>
                 </a:solidFill>
                 <a:latin typeface="Courier New" pitchFamily="34" charset="0"/>
                 <a:ea typeface="Courier New" pitchFamily="34" charset="-122"/>
@@ -10981,7 +11029,7 @@
             <a:r>
               <a:rPr lang="en-US" sz="1400" dirty="0">
                 <a:solidFill>
-                  <a:srgbClr val="C9D3F5"/>
+                  <a:srgbClr val="1F2429"/>
                 </a:solidFill>
                 <a:latin typeface="Courier New" pitchFamily="34" charset="0"/>
                 <a:ea typeface="Courier New" pitchFamily="34" charset="-122"/>
@@ -11001,7 +11049,7 @@
             <a:r>
               <a:rPr lang="en-US" sz="1400" dirty="0">
                 <a:solidFill>
-                  <a:srgbClr val="C9D3F5"/>
+                  <a:srgbClr val="1F2429"/>
                 </a:solidFill>
                 <a:latin typeface="Courier New" pitchFamily="34" charset="0"/>
                 <a:ea typeface="Courier New" pitchFamily="34" charset="-122"/>
@@ -11183,9 +11231,13 @@
             </a:avLst>
           </a:prstGeom>
           <a:solidFill>
-            <a:srgbClr val="1E1E4C"/>
+            <a:srgbClr val="F7F8F9"/>
           </a:solidFill>
-          <a:ln/>
+          <a:ln w="9525">
+            <a:solidFill>
+              <a:srgbClr val="D0D5DD"/>
+            </a:solidFill>
+          </a:ln>
         </p:spPr>
         <p:txBody>
           <a:bodyPr/>
@@ -11222,7 +11274,7 @@
             <a:r>
               <a:rPr lang="en-US" sz="1400" dirty="0">
                 <a:solidFill>
-                  <a:srgbClr val="C9D3F5"/>
+                  <a:srgbClr val="1F2429"/>
                 </a:solidFill>
                 <a:latin typeface="Courier New" pitchFamily="34" charset="0"/>
                 <a:ea typeface="Courier New" pitchFamily="34" charset="-122"/>
@@ -11242,7 +11294,7 @@
             <a:r>
               <a:rPr lang="en-US" sz="1400" dirty="0">
                 <a:solidFill>
-                  <a:srgbClr val="C9D3F5"/>
+                  <a:srgbClr val="1F2429"/>
                 </a:solidFill>
                 <a:latin typeface="Courier New" pitchFamily="34" charset="0"/>
                 <a:ea typeface="Courier New" pitchFamily="34" charset="-122"/>
@@ -11262,7 +11314,7 @@
             <a:r>
               <a:rPr lang="en-US" sz="1400" dirty="0">
                 <a:solidFill>
-                  <a:srgbClr val="C9D3F5"/>
+                  <a:srgbClr val="1F2429"/>
                 </a:solidFill>
                 <a:latin typeface="Courier New" pitchFamily="34" charset="0"/>
                 <a:ea typeface="Courier New" pitchFamily="34" charset="-122"/>
@@ -11282,7 +11334,7 @@
             <a:r>
               <a:rPr lang="en-US" sz="1400" dirty="0">
                 <a:solidFill>
-                  <a:srgbClr val="C9D3F5"/>
+                  <a:srgbClr val="1F2429"/>
                 </a:solidFill>
                 <a:latin typeface="Courier New" pitchFamily="34" charset="0"/>
                 <a:ea typeface="Courier New" pitchFamily="34" charset="-122"/>
@@ -11464,9 +11516,13 @@
             </a:avLst>
           </a:prstGeom>
           <a:solidFill>
-            <a:srgbClr val="1E1E4C"/>
+            <a:srgbClr val="F7F8F9"/>
           </a:solidFill>
-          <a:ln/>
+          <a:ln w="9525">
+            <a:solidFill>
+              <a:srgbClr val="D0D5DD"/>
+            </a:solidFill>
+          </a:ln>
         </p:spPr>
         <p:txBody>
           <a:bodyPr/>
@@ -11503,7 +11559,7 @@
             <a:r>
               <a:rPr lang="en-US" sz="1400" dirty="0">
                 <a:solidFill>
-                  <a:srgbClr val="C9D3F5"/>
+                  <a:srgbClr val="1F2429"/>
                 </a:solidFill>
                 <a:latin typeface="Courier New" pitchFamily="34" charset="0"/>
                 <a:ea typeface="Courier New" pitchFamily="34" charset="-122"/>
@@ -11523,7 +11579,7 @@
             <a:r>
               <a:rPr lang="en-US" sz="1400" dirty="0">
                 <a:solidFill>
-                  <a:srgbClr val="C9D3F5"/>
+                  <a:srgbClr val="1F2429"/>
                 </a:solidFill>
                 <a:latin typeface="Courier New" pitchFamily="34" charset="0"/>
                 <a:ea typeface="Courier New" pitchFamily="34" charset="-122"/>
@@ -11552,7 +11608,7 @@
             <a:r>
               <a:rPr lang="en-US" sz="1400" dirty="0">
                 <a:solidFill>
-                  <a:srgbClr val="C9D3F5"/>
+                  <a:srgbClr val="1F2429"/>
                 </a:solidFill>
                 <a:latin typeface="Courier New" pitchFamily="34" charset="0"/>
                 <a:ea typeface="Courier New" pitchFamily="34" charset="-122"/>
@@ -11572,7 +11628,7 @@
             <a:r>
               <a:rPr lang="en-US" sz="1400" dirty="0">
                 <a:solidFill>
-                  <a:srgbClr val="C9D3F5"/>
+                  <a:srgbClr val="1F2429"/>
                 </a:solidFill>
                 <a:latin typeface="Courier New" pitchFamily="34" charset="0"/>
                 <a:ea typeface="Courier New" pitchFamily="34" charset="-122"/>
@@ -11601,7 +11657,7 @@
             <a:r>
               <a:rPr lang="en-US" sz="1400" dirty="0">
                 <a:solidFill>
-                  <a:srgbClr val="C9D3F5"/>
+                  <a:srgbClr val="1F2429"/>
                 </a:solidFill>
                 <a:latin typeface="Courier New" pitchFamily="34" charset="0"/>
                 <a:ea typeface="Courier New" pitchFamily="34" charset="-122"/>
@@ -11621,7 +11677,7 @@
             <a:r>
               <a:rPr lang="en-US" sz="1400" dirty="0">
                 <a:solidFill>
-                  <a:srgbClr val="C9D3F5"/>
+                  <a:srgbClr val="1F2429"/>
                 </a:solidFill>
                 <a:latin typeface="Courier New" pitchFamily="34" charset="0"/>
                 <a:ea typeface="Courier New" pitchFamily="34" charset="-122"/>
@@ -11641,7 +11697,7 @@
             <a:r>
               <a:rPr lang="en-US" sz="1400" dirty="0">
                 <a:solidFill>
-                  <a:srgbClr val="C9D3F5"/>
+                  <a:srgbClr val="1F2429"/>
                 </a:solidFill>
                 <a:latin typeface="Courier New" pitchFamily="34" charset="0"/>
                 <a:ea typeface="Courier New" pitchFamily="34" charset="-122"/>
@@ -12558,9 +12614,13 @@
             </a:avLst>
           </a:prstGeom>
           <a:solidFill>
-            <a:srgbClr val="1E1E4C"/>
+            <a:srgbClr val="F7F8F9"/>
           </a:solidFill>
-          <a:ln/>
+          <a:ln w="9525">
+            <a:solidFill>
+              <a:srgbClr val="D0D5DD"/>
+            </a:solidFill>
+          </a:ln>
         </p:spPr>
         <p:txBody>
           <a:bodyPr/>
@@ -12597,7 +12657,7 @@
             <a:r>
               <a:rPr lang="en-US" sz="1400" dirty="0">
                 <a:solidFill>
-                  <a:srgbClr val="C9D3F5"/>
+                  <a:srgbClr val="1F2429"/>
                 </a:solidFill>
                 <a:latin typeface="Courier New" pitchFamily="34" charset="0"/>
                 <a:ea typeface="Courier New" pitchFamily="34" charset="-122"/>
@@ -12617,7 +12677,7 @@
             <a:r>
               <a:rPr lang="en-US" sz="1400" dirty="0">
                 <a:solidFill>
-                  <a:srgbClr val="C9D3F5"/>
+                  <a:srgbClr val="1F2429"/>
                 </a:solidFill>
                 <a:latin typeface="Courier New" pitchFamily="34" charset="0"/>
                 <a:ea typeface="Courier New" pitchFamily="34" charset="-122"/>

--- a/slides/CSC336-Lecture-14-Regular-Expressions-and-JSON.pptx
+++ b/slides/CSC336-Lecture-14-Regular-Expressions-and-JSON.pptx
@@ -21,6 +21,11 @@
     <p:sldId id="269" r:id="rId15"/>
     <p:sldId id="270" r:id="rId16"/>
     <p:sldId id="271" r:id="rId17"/>
+    <p:sldId id="280" r:id="rId31"/>
+    <p:sldId id="281" r:id="rId32"/>
+    <p:sldId id="282" r:id="rId33"/>
+    <p:sldId id="283" r:id="rId34"/>
+    <p:sldId id="284" r:id="rId35"/>
     <p:sldId id="272" r:id="rId18"/>
     <p:sldId id="273" r:id="rId19"/>
     <p:sldId id="274" r:id="rId20"/>
@@ -5887,7 +5892,7 @@
                   <a:srgbClr val="8A939B"/>
                 </a:solidFill>
               </a:rPr>
-              <a:t>  ·  17</a:t>
+              <a:t>  ·  22</a:t>
             </a:r>
           </a:p>
         </p:txBody>
@@ -6550,7 +6555,7 @@
                   <a:srgbClr val="8A939B"/>
                 </a:solidFill>
               </a:rPr>
-              <a:t>  ·  18</a:t>
+              <a:t>  ·  23</a:t>
             </a:r>
           </a:p>
         </p:txBody>
@@ -7154,7 +7159,7 @@
                   <a:srgbClr val="8A939B"/>
                 </a:solidFill>
               </a:rPr>
-              <a:t>  ·  19</a:t>
+              <a:t>  ·  24</a:t>
             </a:r>
           </a:p>
         </p:txBody>
@@ -7271,7 +7276,7 @@
       </p:sp>
       <p:sp>
         <p:nvSpPr>
-          <p:cNvPr id="4" name="Shape 2"/>
+          <p:cNvPr id="30" name="Shape 30"/>
           <p:cNvSpPr/>
           <p:nvPr/>
         </p:nvSpPr>
@@ -7295,7 +7300,7 @@
       </p:sp>
       <p:sp>
         <p:nvSpPr>
-          <p:cNvPr id="5" name="Text 3"/>
+          <p:cNvPr id="31" name="Text 31"/>
           <p:cNvSpPr txBox="1"/>
           <p:nvPr/>
         </p:nvSpPr>
@@ -7334,7 +7339,7 @@
       </p:sp>
       <p:sp>
         <p:nvSpPr>
-          <p:cNvPr id="6" name="Text 4"/>
+          <p:cNvPr id="32" name="Text 32"/>
           <p:cNvSpPr txBox="1"/>
           <p:nvPr/>
         </p:nvSpPr>
@@ -7373,13 +7378,13 @@
       </p:sp>
       <p:sp>
         <p:nvSpPr>
-          <p:cNvPr id="7" name="Shape 5"/>
+          <p:cNvPr id="33" name="Shape 33"/>
           <p:cNvSpPr/>
           <p:nvPr/>
         </p:nvSpPr>
         <p:spPr>
           <a:xfrm>
-            <a:off x="685800" y="2788920"/>
+            <a:off x="685800" y="2603760"/>
             <a:ext cx="457200" cy="457200"/>
           </a:xfrm>
           <a:prstGeom prst="ellipse">
@@ -7397,13 +7402,13 @@
       </p:sp>
       <p:sp>
         <p:nvSpPr>
-          <p:cNvPr id="8" name="Text 6"/>
-          <p:cNvSpPr txBox="1"/>
-          <p:nvPr/>
-        </p:nvSpPr>
-        <p:spPr>
-          <a:xfrm>
-            <a:off x="685800" y="2788920"/>
+          <p:cNvPr id="34" name="Text 34"/>
+          <p:cNvSpPr txBox="1"/>
+          <p:nvPr/>
+        </p:nvSpPr>
+        <p:spPr>
+          <a:xfrm>
+            <a:off x="685800" y="2603760"/>
             <a:ext cx="457200" cy="457200"/>
           </a:xfrm>
           <a:prstGeom prst="rect">
@@ -7436,13 +7441,13 @@
       </p:sp>
       <p:sp>
         <p:nvSpPr>
-          <p:cNvPr id="9" name="Text 7"/>
-          <p:cNvSpPr txBox="1"/>
-          <p:nvPr/>
-        </p:nvSpPr>
-        <p:spPr>
-          <a:xfrm>
-            <a:off x="1371600" y="2715768"/>
+          <p:cNvPr id="35" name="Text 35"/>
+          <p:cNvSpPr txBox="1"/>
+          <p:nvPr/>
+        </p:nvSpPr>
+        <p:spPr>
+          <a:xfrm>
+            <a:off x="1371600" y="2530608"/>
             <a:ext cx="10180015" cy="640080"/>
           </a:xfrm>
           <a:prstGeom prst="rect">
@@ -7475,13 +7480,13 @@
       </p:sp>
       <p:sp>
         <p:nvSpPr>
-          <p:cNvPr id="10" name="Shape 8"/>
+          <p:cNvPr id="36" name="Shape 36"/>
           <p:cNvSpPr/>
           <p:nvPr/>
         </p:nvSpPr>
         <p:spPr>
           <a:xfrm>
-            <a:off x="685800" y="3611880"/>
+            <a:off x="685800" y="3241560"/>
             <a:ext cx="457200" cy="457200"/>
           </a:xfrm>
           <a:prstGeom prst="ellipse">
@@ -7499,13 +7504,13 @@
       </p:sp>
       <p:sp>
         <p:nvSpPr>
-          <p:cNvPr id="11" name="Text 9"/>
-          <p:cNvSpPr txBox="1"/>
-          <p:nvPr/>
-        </p:nvSpPr>
-        <p:spPr>
-          <a:xfrm>
-            <a:off x="685800" y="3611880"/>
+          <p:cNvPr id="37" name="Text 37"/>
+          <p:cNvSpPr txBox="1"/>
+          <p:nvPr/>
+        </p:nvSpPr>
+        <p:spPr>
+          <a:xfrm>
+            <a:off x="685800" y="3241560"/>
             <a:ext cx="457200" cy="457200"/>
           </a:xfrm>
           <a:prstGeom prst="rect">
@@ -7538,13 +7543,13 @@
       </p:sp>
       <p:sp>
         <p:nvSpPr>
-          <p:cNvPr id="12" name="Text 10"/>
-          <p:cNvSpPr txBox="1"/>
-          <p:nvPr/>
-        </p:nvSpPr>
-        <p:spPr>
-          <a:xfrm>
-            <a:off x="1371600" y="3538728"/>
+          <p:cNvPr id="38" name="Text 38"/>
+          <p:cNvSpPr txBox="1"/>
+          <p:nvPr/>
+        </p:nvSpPr>
+        <p:spPr>
+          <a:xfrm>
+            <a:off x="1371600" y="3168408"/>
             <a:ext cx="10180015" cy="640080"/>
           </a:xfrm>
           <a:prstGeom prst="rect">
@@ -7577,13 +7582,13 @@
       </p:sp>
       <p:sp>
         <p:nvSpPr>
-          <p:cNvPr id="13" name="Shape 11"/>
+          <p:cNvPr id="39" name="Shape 39"/>
           <p:cNvSpPr/>
           <p:nvPr/>
         </p:nvSpPr>
         <p:spPr>
           <a:xfrm>
-            <a:off x="685800" y="4434840"/>
+            <a:off x="685800" y="3879360"/>
             <a:ext cx="457200" cy="457200"/>
           </a:xfrm>
           <a:prstGeom prst="ellipse">
@@ -7601,13 +7606,13 @@
       </p:sp>
       <p:sp>
         <p:nvSpPr>
-          <p:cNvPr id="14" name="Text 12"/>
-          <p:cNvSpPr txBox="1"/>
-          <p:nvPr/>
-        </p:nvSpPr>
-        <p:spPr>
-          <a:xfrm>
-            <a:off x="685800" y="4434840"/>
+          <p:cNvPr id="40" name="Text 40"/>
+          <p:cNvSpPr txBox="1"/>
+          <p:nvPr/>
+        </p:nvSpPr>
+        <p:spPr>
+          <a:xfrm>
+            <a:off x="685800" y="3879360"/>
             <a:ext cx="457200" cy="457200"/>
           </a:xfrm>
           <a:prstGeom prst="rect">
@@ -7640,13 +7645,13 @@
       </p:sp>
       <p:sp>
         <p:nvSpPr>
-          <p:cNvPr id="15" name="Text 13"/>
-          <p:cNvSpPr txBox="1"/>
-          <p:nvPr/>
-        </p:nvSpPr>
-        <p:spPr>
-          <a:xfrm>
-            <a:off x="1371600" y="4361688"/>
+          <p:cNvPr id="41" name="Text 41"/>
+          <p:cNvSpPr txBox="1"/>
+          <p:nvPr/>
+        </p:nvSpPr>
+        <p:spPr>
+          <a:xfrm>
+            <a:off x="1371600" y="3806208"/>
             <a:ext cx="10180015" cy="640080"/>
           </a:xfrm>
           <a:prstGeom prst="rect">
@@ -7679,13 +7684,13 @@
       </p:sp>
       <p:sp>
         <p:nvSpPr>
-          <p:cNvPr id="16" name="Shape 14"/>
+          <p:cNvPr id="42" name="Shape 42"/>
           <p:cNvSpPr/>
           <p:nvPr/>
         </p:nvSpPr>
         <p:spPr>
           <a:xfrm>
-            <a:off x="685800" y="5257800"/>
+            <a:off x="685800" y="4517160"/>
             <a:ext cx="457200" cy="457200"/>
           </a:xfrm>
           <a:prstGeom prst="ellipse">
@@ -7703,13 +7708,13 @@
       </p:sp>
       <p:sp>
         <p:nvSpPr>
-          <p:cNvPr id="17" name="Text 15"/>
-          <p:cNvSpPr txBox="1"/>
-          <p:nvPr/>
-        </p:nvSpPr>
-        <p:spPr>
-          <a:xfrm>
-            <a:off x="685800" y="5257800"/>
+          <p:cNvPr id="43" name="Text 43"/>
+          <p:cNvSpPr txBox="1"/>
+          <p:nvPr/>
+        </p:nvSpPr>
+        <p:spPr>
+          <a:xfrm>
+            <a:off x="685800" y="4517160"/>
             <a:ext cx="457200" cy="457200"/>
           </a:xfrm>
           <a:prstGeom prst="rect">
@@ -7742,13 +7747,217 @@
       </p:sp>
       <p:sp>
         <p:nvSpPr>
-          <p:cNvPr id="18" name="Text 16"/>
-          <p:cNvSpPr txBox="1"/>
-          <p:nvPr/>
-        </p:nvSpPr>
-        <p:spPr>
-          <a:xfrm>
-            <a:off x="1371600" y="5184648"/>
+          <p:cNvPr id="44" name="Text 44"/>
+          <p:cNvSpPr txBox="1"/>
+          <p:nvPr/>
+        </p:nvSpPr>
+        <p:spPr>
+          <a:xfrm>
+            <a:off x="1371600" y="4444008"/>
+            <a:ext cx="10180015" cy="640080"/>
+          </a:xfrm>
+          <a:prstGeom prst="rect">
+            <a:avLst/>
+          </a:prstGeom>
+          <a:noFill/>
+          <a:ln/>
+        </p:spPr>
+        <p:txBody>
+          <a:bodyPr wrap="square" lIns="0" tIns="0" rIns="0" bIns="0" rtlCol="0" anchor="ctr"/>
+          <a:lstStyle/>
+          <a:p>
+            <a:pPr indent="0" marL="0">
+              <a:buNone/>
+            </a:pPr>
+            <a:r>
+              <a:rPr lang="en-US" sz="1500" dirty="0">
+                <a:solidFill>
+                  <a:srgbClr val="26262F"/>
+                </a:solidFill>
+                <a:latin typeface="Calibri" pitchFamily="34" charset="0"/>
+                <a:ea typeface="Calibri" pitchFamily="34" charset="-122"/>
+                <a:cs typeface="Calibri" pitchFamily="34" charset="-120"/>
+              </a:rPr>
+              <a:t>Client-side vs. server-side validation -- why only one can be trusted</a:t>
+            </a:r>
+            <a:endParaRPr lang="en-US" sz="1500" dirty="0"/>
+          </a:p>
+        </p:txBody>
+      </p:sp>
+      <p:sp>
+        <p:nvSpPr>
+          <p:cNvPr id="45" name="Shape 45"/>
+          <p:cNvSpPr/>
+          <p:nvPr/>
+        </p:nvSpPr>
+        <p:spPr>
+          <a:xfrm>
+            <a:off x="685800" y="5154960"/>
+            <a:ext cx="457200" cy="457200"/>
+          </a:xfrm>
+          <a:prstGeom prst="ellipse">
+            <a:avLst/>
+          </a:prstGeom>
+          <a:solidFill>
+            <a:srgbClr val="FF8A3D"/>
+          </a:solidFill>
+          <a:ln/>
+        </p:spPr>
+        <p:txBody>
+          <a:bodyPr/>
+          <a:p/>
+        </p:txBody>
+      </p:sp>
+      <p:sp>
+        <p:nvSpPr>
+          <p:cNvPr id="46" name="Text 46"/>
+          <p:cNvSpPr txBox="1"/>
+          <p:nvPr/>
+        </p:nvSpPr>
+        <p:spPr>
+          <a:xfrm>
+            <a:off x="685800" y="5154960"/>
+            <a:ext cx="457200" cy="457200"/>
+          </a:xfrm>
+          <a:prstGeom prst="rect">
+            <a:avLst/>
+          </a:prstGeom>
+          <a:noFill/>
+          <a:ln/>
+        </p:spPr>
+        <p:txBody>
+          <a:bodyPr wrap="square" lIns="0" tIns="0" rIns="0" bIns="0" rtlCol="0" anchor="ctr"/>
+          <a:lstStyle/>
+          <a:p>
+            <a:pPr algn="ctr" indent="0" marL="0">
+              <a:buNone/>
+            </a:pPr>
+            <a:r>
+              <a:rPr lang="en-US" sz="1500" b="1" dirty="0">
+                <a:solidFill>
+                  <a:srgbClr val="FFFFFF"/>
+                </a:solidFill>
+                <a:latin typeface="Calibri" pitchFamily="34" charset="0"/>
+                <a:ea typeface="Calibri" pitchFamily="34" charset="-122"/>
+                <a:cs typeface="Calibri" pitchFamily="34" charset="-120"/>
+              </a:rPr>
+              <a:t>6</a:t>
+            </a:r>
+            <a:endParaRPr lang="en-US" sz="1500" dirty="0"/>
+          </a:p>
+        </p:txBody>
+      </p:sp>
+      <p:sp>
+        <p:nvSpPr>
+          <p:cNvPr id="47" name="Text 47"/>
+          <p:cNvSpPr txBox="1"/>
+          <p:nvPr/>
+        </p:nvSpPr>
+        <p:spPr>
+          <a:xfrm>
+            <a:off x="1371600" y="5081808"/>
+            <a:ext cx="10180015" cy="640080"/>
+          </a:xfrm>
+          <a:prstGeom prst="rect">
+            <a:avLst/>
+          </a:prstGeom>
+          <a:noFill/>
+          <a:ln/>
+        </p:spPr>
+        <p:txBody>
+          <a:bodyPr wrap="square" lIns="0" tIns="0" rIns="0" bIns="0" rtlCol="0" anchor="ctr"/>
+          <a:lstStyle/>
+          <a:p>
+            <a:pPr indent="0" marL="0">
+              <a:buNone/>
+            </a:pPr>
+            <a:r>
+              <a:rPr lang="en-US" sz="1500" dirty="0">
+                <a:solidFill>
+                  <a:srgbClr val="26262F"/>
+                </a:solidFill>
+                <a:latin typeface="Calibri" pitchFamily="34" charset="0"/>
+                <a:ea typeface="Calibri" pitchFamily="34" charset="-122"/>
+                <a:cs typeface="Calibri" pitchFamily="34" charset="-120"/>
+              </a:rPr>
+              <a:t>Schema validation with Joi, instead of hand-written regex</a:t>
+            </a:r>
+            <a:endParaRPr lang="en-US" sz="1500" dirty="0"/>
+          </a:p>
+        </p:txBody>
+      </p:sp>
+      <p:sp>
+        <p:nvSpPr>
+          <p:cNvPr id="48" name="Shape 48"/>
+          <p:cNvSpPr/>
+          <p:nvPr/>
+        </p:nvSpPr>
+        <p:spPr>
+          <a:xfrm>
+            <a:off x="685800" y="5792760"/>
+            <a:ext cx="457200" cy="457200"/>
+          </a:xfrm>
+          <a:prstGeom prst="ellipse">
+            <a:avLst/>
+          </a:prstGeom>
+          <a:solidFill>
+            <a:srgbClr val="FF8A3D"/>
+          </a:solidFill>
+          <a:ln/>
+        </p:spPr>
+        <p:txBody>
+          <a:bodyPr/>
+          <a:p/>
+        </p:txBody>
+      </p:sp>
+      <p:sp>
+        <p:nvSpPr>
+          <p:cNvPr id="49" name="Text 49"/>
+          <p:cNvSpPr txBox="1"/>
+          <p:nvPr/>
+        </p:nvSpPr>
+        <p:spPr>
+          <a:xfrm>
+            <a:off x="685800" y="5792760"/>
+            <a:ext cx="457200" cy="457200"/>
+          </a:xfrm>
+          <a:prstGeom prst="rect">
+            <a:avLst/>
+          </a:prstGeom>
+          <a:noFill/>
+          <a:ln/>
+        </p:spPr>
+        <p:txBody>
+          <a:bodyPr wrap="square" lIns="0" tIns="0" rIns="0" bIns="0" rtlCol="0" anchor="ctr"/>
+          <a:lstStyle/>
+          <a:p>
+            <a:pPr algn="ctr" indent="0" marL="0">
+              <a:buNone/>
+            </a:pPr>
+            <a:r>
+              <a:rPr lang="en-US" sz="1500" b="1" dirty="0">
+                <a:solidFill>
+                  <a:srgbClr val="FFFFFF"/>
+                </a:solidFill>
+                <a:latin typeface="Calibri" pitchFamily="34" charset="0"/>
+                <a:ea typeface="Calibri" pitchFamily="34" charset="-122"/>
+                <a:cs typeface="Calibri" pitchFamily="34" charset="-120"/>
+              </a:rPr>
+              <a:t>7</a:t>
+            </a:r>
+            <a:endParaRPr lang="en-US" sz="1500" dirty="0"/>
+          </a:p>
+        </p:txBody>
+      </p:sp>
+      <p:sp>
+        <p:nvSpPr>
+          <p:cNvPr id="50" name="Text 50"/>
+          <p:cNvSpPr txBox="1"/>
+          <p:nvPr/>
+        </p:nvSpPr>
+        <p:spPr>
+          <a:xfrm>
+            <a:off x="1371600" y="5719608"/>
             <a:ext cx="10180015" cy="640080"/>
           </a:xfrm>
           <a:prstGeom prst="rect">
@@ -8240,7 +8449,7 @@
                   <a:srgbClr val="8A939B"/>
                 </a:solidFill>
               </a:rPr>
-              <a:t>  ·  20</a:t>
+              <a:t>  ·  25</a:t>
             </a:r>
           </a:p>
         </p:txBody>
@@ -8525,7 +8734,7 @@
                   <a:srgbClr val="8A939B"/>
                 </a:solidFill>
               </a:rPr>
-              <a:t>  ·  21</a:t>
+              <a:t>  ·  26</a:t>
             </a:r>
           </a:p>
         </p:txBody>
@@ -8787,7 +8996,7 @@
                   <a:srgbClr val="8A939B"/>
                 </a:solidFill>
               </a:rPr>
-              <a:t>  ·  22</a:t>
+              <a:t>  ·  27</a:t>
             </a:r>
           </a:p>
         </p:txBody>
@@ -9131,7 +9340,7 @@
                   <a:srgbClr val="8A939B"/>
                 </a:solidFill>
               </a:rPr>
-              <a:t>  ·  23</a:t>
+              <a:t>  ·  28</a:t>
             </a:r>
           </a:p>
         </p:txBody>
@@ -9240,7 +9449,7 @@
                 <a:ea typeface="Cambria" pitchFamily="34" charset="-122"/>
                 <a:cs typeface="Cambria" pitchFamily="34" charset="-120"/>
               </a:rPr>
-              <a:t>Lecture 14 in Seven Points</a:t>
+              <a:t>Lecture 14 in Nine Points</a:t>
             </a:r>
             <a:endParaRPr lang="en-US" sz="3400" dirty="0"/>
           </a:p>
@@ -9248,7 +9457,7 @@
       </p:sp>
       <p:sp>
         <p:nvSpPr>
-          <p:cNvPr id="4" name="Shape 2"/>
+          <p:cNvPr id="40" name="Shape 40"/>
           <p:cNvSpPr/>
           <p:nvPr/>
         </p:nvSpPr>
@@ -9272,7 +9481,7 @@
       </p:sp>
       <p:sp>
         <p:nvSpPr>
-          <p:cNvPr id="5" name="Text 3"/>
+          <p:cNvPr id="41" name="Text 41"/>
           <p:cNvSpPr txBox="1"/>
           <p:nvPr/>
         </p:nvSpPr>
@@ -9311,7 +9520,7 @@
       </p:sp>
       <p:sp>
         <p:nvSpPr>
-          <p:cNvPr id="6" name="Text 4"/>
+          <p:cNvPr id="42" name="Text 42"/>
           <p:cNvSpPr txBox="1"/>
           <p:nvPr/>
         </p:nvSpPr>
@@ -9350,13 +9559,13 @@
       </p:sp>
       <p:sp>
         <p:nvSpPr>
-          <p:cNvPr id="7" name="Shape 5"/>
+          <p:cNvPr id="43" name="Shape 43"/>
           <p:cNvSpPr/>
           <p:nvPr/>
         </p:nvSpPr>
         <p:spPr>
           <a:xfrm>
-            <a:off x="822960" y="2860766"/>
+            <a:off x="822960" y="2726636"/>
             <a:ext cx="438912" cy="438912"/>
           </a:xfrm>
           <a:prstGeom prst="ellipse">
@@ -9374,13 +9583,13 @@
       </p:sp>
       <p:sp>
         <p:nvSpPr>
-          <p:cNvPr id="8" name="Text 6"/>
-          <p:cNvSpPr txBox="1"/>
-          <p:nvPr/>
-        </p:nvSpPr>
-        <p:spPr>
-          <a:xfrm>
-            <a:off x="822960" y="2860766"/>
+          <p:cNvPr id="44" name="Text 44"/>
+          <p:cNvSpPr txBox="1"/>
+          <p:nvPr/>
+        </p:nvSpPr>
+        <p:spPr>
+          <a:xfrm>
+            <a:off x="822960" y="2726636"/>
             <a:ext cx="438912" cy="438912"/>
           </a:xfrm>
           <a:prstGeom prst="rect">
@@ -9413,13 +9622,13 @@
       </p:sp>
       <p:sp>
         <p:nvSpPr>
-          <p:cNvPr id="9" name="Text 7"/>
-          <p:cNvSpPr txBox="1"/>
-          <p:nvPr/>
-        </p:nvSpPr>
-        <p:spPr>
-          <a:xfrm>
-            <a:off x="1463040" y="2769326"/>
+          <p:cNvPr id="45" name="Text 45"/>
+          <p:cNvSpPr txBox="1"/>
+          <p:nvPr/>
+        </p:nvSpPr>
+        <p:spPr>
+          <a:xfrm>
+            <a:off x="1463040" y="2635196"/>
             <a:ext cx="10058400" cy="529046"/>
           </a:xfrm>
           <a:prstGeom prst="rect">
@@ -9452,13 +9661,13 @@
       </p:sp>
       <p:sp>
         <p:nvSpPr>
-          <p:cNvPr id="10" name="Shape 8"/>
+          <p:cNvPr id="46" name="Shape 46"/>
           <p:cNvSpPr/>
           <p:nvPr/>
         </p:nvSpPr>
         <p:spPr>
           <a:xfrm>
-            <a:off x="822960" y="3435531"/>
+            <a:off x="822960" y="3167272"/>
             <a:ext cx="438912" cy="438912"/>
           </a:xfrm>
           <a:prstGeom prst="ellipse">
@@ -9476,13 +9685,13 @@
       </p:sp>
       <p:sp>
         <p:nvSpPr>
-          <p:cNvPr id="11" name="Text 9"/>
-          <p:cNvSpPr txBox="1"/>
-          <p:nvPr/>
-        </p:nvSpPr>
-        <p:spPr>
-          <a:xfrm>
-            <a:off x="822960" y="3435531"/>
+          <p:cNvPr id="47" name="Text 47"/>
+          <p:cNvSpPr txBox="1"/>
+          <p:nvPr/>
+        </p:nvSpPr>
+        <p:spPr>
+          <a:xfrm>
+            <a:off x="822960" y="3167272"/>
             <a:ext cx="438912" cy="438912"/>
           </a:xfrm>
           <a:prstGeom prst="rect">
@@ -9515,13 +9724,13 @@
       </p:sp>
       <p:sp>
         <p:nvSpPr>
-          <p:cNvPr id="12" name="Text 10"/>
-          <p:cNvSpPr txBox="1"/>
-          <p:nvPr/>
-        </p:nvSpPr>
-        <p:spPr>
-          <a:xfrm>
-            <a:off x="1463040" y="3344091"/>
+          <p:cNvPr id="48" name="Text 48"/>
+          <p:cNvSpPr txBox="1"/>
+          <p:nvPr/>
+        </p:nvSpPr>
+        <p:spPr>
+          <a:xfrm>
+            <a:off x="1463040" y="3075832"/>
             <a:ext cx="10058400" cy="529046"/>
           </a:xfrm>
           <a:prstGeom prst="rect">
@@ -9554,13 +9763,13 @@
       </p:sp>
       <p:sp>
         <p:nvSpPr>
-          <p:cNvPr id="13" name="Shape 11"/>
+          <p:cNvPr id="49" name="Shape 49"/>
           <p:cNvSpPr/>
           <p:nvPr/>
         </p:nvSpPr>
         <p:spPr>
           <a:xfrm>
-            <a:off x="822960" y="4010297"/>
+            <a:off x="822960" y="3607908"/>
             <a:ext cx="438912" cy="438912"/>
           </a:xfrm>
           <a:prstGeom prst="ellipse">
@@ -9578,13 +9787,13 @@
       </p:sp>
       <p:sp>
         <p:nvSpPr>
-          <p:cNvPr id="14" name="Text 12"/>
-          <p:cNvSpPr txBox="1"/>
-          <p:nvPr/>
-        </p:nvSpPr>
-        <p:spPr>
-          <a:xfrm>
-            <a:off x="822960" y="4010297"/>
+          <p:cNvPr id="50" name="Text 50"/>
+          <p:cNvSpPr txBox="1"/>
+          <p:nvPr/>
+        </p:nvSpPr>
+        <p:spPr>
+          <a:xfrm>
+            <a:off x="822960" y="3607908"/>
             <a:ext cx="438912" cy="438912"/>
           </a:xfrm>
           <a:prstGeom prst="rect">
@@ -9617,13 +9826,13 @@
       </p:sp>
       <p:sp>
         <p:nvSpPr>
-          <p:cNvPr id="15" name="Text 13"/>
-          <p:cNvSpPr txBox="1"/>
-          <p:nvPr/>
-        </p:nvSpPr>
-        <p:spPr>
-          <a:xfrm>
-            <a:off x="1463040" y="3918857"/>
+          <p:cNvPr id="51" name="Text 51"/>
+          <p:cNvSpPr txBox="1"/>
+          <p:nvPr/>
+        </p:nvSpPr>
+        <p:spPr>
+          <a:xfrm>
+            <a:off x="1463040" y="3516468"/>
             <a:ext cx="10058400" cy="529046"/>
           </a:xfrm>
           <a:prstGeom prst="rect">
@@ -9656,13 +9865,13 @@
       </p:sp>
       <p:sp>
         <p:nvSpPr>
-          <p:cNvPr id="16" name="Shape 14"/>
+          <p:cNvPr id="52" name="Shape 52"/>
           <p:cNvSpPr/>
           <p:nvPr/>
         </p:nvSpPr>
         <p:spPr>
           <a:xfrm>
-            <a:off x="822960" y="4585063"/>
+            <a:off x="822960" y="4048544"/>
             <a:ext cx="438912" cy="438912"/>
           </a:xfrm>
           <a:prstGeom prst="ellipse">
@@ -9680,13 +9889,13 @@
       </p:sp>
       <p:sp>
         <p:nvSpPr>
-          <p:cNvPr id="17" name="Text 15"/>
-          <p:cNvSpPr txBox="1"/>
-          <p:nvPr/>
-        </p:nvSpPr>
-        <p:spPr>
-          <a:xfrm>
-            <a:off x="822960" y="4585063"/>
+          <p:cNvPr id="53" name="Text 53"/>
+          <p:cNvSpPr txBox="1"/>
+          <p:nvPr/>
+        </p:nvSpPr>
+        <p:spPr>
+          <a:xfrm>
+            <a:off x="822960" y="4048544"/>
             <a:ext cx="438912" cy="438912"/>
           </a:xfrm>
           <a:prstGeom prst="rect">
@@ -9719,13 +9928,13 @@
       </p:sp>
       <p:sp>
         <p:nvSpPr>
-          <p:cNvPr id="18" name="Text 16"/>
-          <p:cNvSpPr txBox="1"/>
-          <p:nvPr/>
-        </p:nvSpPr>
-        <p:spPr>
-          <a:xfrm>
-            <a:off x="1463040" y="4493623"/>
+          <p:cNvPr id="54" name="Text 54"/>
+          <p:cNvSpPr txBox="1"/>
+          <p:nvPr/>
+        </p:nvSpPr>
+        <p:spPr>
+          <a:xfrm>
+            <a:off x="1463040" y="3957104"/>
             <a:ext cx="10058400" cy="529046"/>
           </a:xfrm>
           <a:prstGeom prst="rect">
@@ -9758,13 +9967,13 @@
       </p:sp>
       <p:sp>
         <p:nvSpPr>
-          <p:cNvPr id="19" name="Shape 17"/>
+          <p:cNvPr id="55" name="Shape 55"/>
           <p:cNvSpPr/>
           <p:nvPr/>
         </p:nvSpPr>
         <p:spPr>
           <a:xfrm>
-            <a:off x="822960" y="5159829"/>
+            <a:off x="822960" y="4489180"/>
             <a:ext cx="438912" cy="438912"/>
           </a:xfrm>
           <a:prstGeom prst="ellipse">
@@ -9782,13 +9991,13 @@
       </p:sp>
       <p:sp>
         <p:nvSpPr>
-          <p:cNvPr id="20" name="Text 18"/>
-          <p:cNvSpPr txBox="1"/>
-          <p:nvPr/>
-        </p:nvSpPr>
-        <p:spPr>
-          <a:xfrm>
-            <a:off x="822960" y="5159829"/>
+          <p:cNvPr id="56" name="Text 56"/>
+          <p:cNvSpPr txBox="1"/>
+          <p:nvPr/>
+        </p:nvSpPr>
+        <p:spPr>
+          <a:xfrm>
+            <a:off x="822960" y="4489180"/>
             <a:ext cx="438912" cy="438912"/>
           </a:xfrm>
           <a:prstGeom prst="rect">
@@ -9821,13 +10030,13 @@
       </p:sp>
       <p:sp>
         <p:nvSpPr>
-          <p:cNvPr id="21" name="Text 19"/>
-          <p:cNvSpPr txBox="1"/>
-          <p:nvPr/>
-        </p:nvSpPr>
-        <p:spPr>
-          <a:xfrm>
-            <a:off x="1463040" y="5068389"/>
+          <p:cNvPr id="57" name="Text 57"/>
+          <p:cNvSpPr txBox="1"/>
+          <p:nvPr/>
+        </p:nvSpPr>
+        <p:spPr>
+          <a:xfrm>
+            <a:off x="1463040" y="4397740"/>
             <a:ext cx="10058400" cy="529046"/>
           </a:xfrm>
           <a:prstGeom prst="rect">
@@ -9852,7 +10061,7 @@
                 <a:ea typeface="Calibri" pitchFamily="34" charset="-122"/>
                 <a:cs typeface="Calibri" pitchFamily="34" charset="-120"/>
               </a:rPr>
-              <a:t>JSON is strict: double-quoted keys and strings only, no comments, no trailing commas, no functions.</a:t>
+              <a:t>Client-side validation is for instant UX feedback only -- it can be bypassed, so server-side validation is the only validation you can trust.</a:t>
             </a:r>
             <a:endParaRPr lang="en-US" sz="1250" dirty="0"/>
           </a:p>
@@ -9860,13 +10069,13 @@
       </p:sp>
       <p:sp>
         <p:nvSpPr>
-          <p:cNvPr id="22" name="Shape 20"/>
+          <p:cNvPr id="58" name="Shape 58"/>
           <p:cNvSpPr/>
           <p:nvPr/>
         </p:nvSpPr>
         <p:spPr>
           <a:xfrm>
-            <a:off x="822960" y="5734594"/>
+            <a:off x="822960" y="4929816"/>
             <a:ext cx="438912" cy="438912"/>
           </a:xfrm>
           <a:prstGeom prst="ellipse">
@@ -9884,13 +10093,13 @@
       </p:sp>
       <p:sp>
         <p:nvSpPr>
-          <p:cNvPr id="23" name="Text 21"/>
-          <p:cNvSpPr txBox="1"/>
-          <p:nvPr/>
-        </p:nvSpPr>
-        <p:spPr>
-          <a:xfrm>
-            <a:off x="822960" y="5734594"/>
+          <p:cNvPr id="59" name="Text 59"/>
+          <p:cNvSpPr txBox="1"/>
+          <p:nvPr/>
+        </p:nvSpPr>
+        <p:spPr>
+          <a:xfrm>
+            <a:off x="822960" y="4929816"/>
             <a:ext cx="438912" cy="438912"/>
           </a:xfrm>
           <a:prstGeom prst="rect">
@@ -9923,13 +10132,13 @@
       </p:sp>
       <p:sp>
         <p:nvSpPr>
-          <p:cNvPr id="24" name="Text 22"/>
-          <p:cNvSpPr txBox="1"/>
-          <p:nvPr/>
-        </p:nvSpPr>
-        <p:spPr>
-          <a:xfrm>
-            <a:off x="1463040" y="5643154"/>
+          <p:cNvPr id="60" name="Text 60"/>
+          <p:cNvSpPr txBox="1"/>
+          <p:nvPr/>
+        </p:nvSpPr>
+        <p:spPr>
+          <a:xfrm>
+            <a:off x="1463040" y="4838376"/>
             <a:ext cx="10058400" cy="529046"/>
           </a:xfrm>
           <a:prstGeom prst="rect">
@@ -9954,6 +10163,210 @@
                 <a:ea typeface="Calibri" pitchFamily="34" charset="-122"/>
                 <a:cs typeface="Calibri" pitchFamily="34" charset="-120"/>
               </a:rPr>
+              <a:t>Joi lets you describe a valid object as a declarative schema, with built-in validators and structured errors, instead of hand-written regex.</a:t>
+            </a:r>
+            <a:endParaRPr lang="en-US" sz="1250" dirty="0"/>
+          </a:p>
+        </p:txBody>
+      </p:sp>
+      <p:sp>
+        <p:nvSpPr>
+          <p:cNvPr id="61" name="Shape 61"/>
+          <p:cNvSpPr/>
+          <p:nvPr/>
+        </p:nvSpPr>
+        <p:spPr>
+          <a:xfrm>
+            <a:off x="822960" y="5370452"/>
+            <a:ext cx="438912" cy="438912"/>
+          </a:xfrm>
+          <a:prstGeom prst="ellipse">
+            <a:avLst/>
+          </a:prstGeom>
+          <a:solidFill>
+            <a:srgbClr val="FF8A3D"/>
+          </a:solidFill>
+          <a:ln/>
+        </p:spPr>
+        <p:txBody>
+          <a:bodyPr/>
+          <a:p/>
+        </p:txBody>
+      </p:sp>
+      <p:sp>
+        <p:nvSpPr>
+          <p:cNvPr id="62" name="Text 62"/>
+          <p:cNvSpPr txBox="1"/>
+          <p:nvPr/>
+        </p:nvSpPr>
+        <p:spPr>
+          <a:xfrm>
+            <a:off x="822960" y="5370452"/>
+            <a:ext cx="438912" cy="438912"/>
+          </a:xfrm>
+          <a:prstGeom prst="rect">
+            <a:avLst/>
+          </a:prstGeom>
+          <a:noFill/>
+          <a:ln/>
+        </p:spPr>
+        <p:txBody>
+          <a:bodyPr wrap="square" lIns="0" tIns="0" rIns="0" bIns="0" rtlCol="0" anchor="ctr"/>
+          <a:lstStyle/>
+          <a:p>
+            <a:pPr algn="ctr" indent="0" marL="0">
+              <a:buNone/>
+            </a:pPr>
+            <a:r>
+              <a:rPr lang="en-US" sz="1500" b="1" dirty="0">
+                <a:solidFill>
+                  <a:srgbClr val="FFFFFF"/>
+                </a:solidFill>
+                <a:latin typeface="Calibri" pitchFamily="34" charset="0"/>
+                <a:ea typeface="Calibri" pitchFamily="34" charset="-122"/>
+                <a:cs typeface="Calibri" pitchFamily="34" charset="-120"/>
+              </a:rPr>
+              <a:t>8</a:t>
+            </a:r>
+            <a:endParaRPr lang="en-US" sz="1500" dirty="0"/>
+          </a:p>
+        </p:txBody>
+      </p:sp>
+      <p:sp>
+        <p:nvSpPr>
+          <p:cNvPr id="63" name="Text 63"/>
+          <p:cNvSpPr txBox="1"/>
+          <p:nvPr/>
+        </p:nvSpPr>
+        <p:spPr>
+          <a:xfrm>
+            <a:off x="1463040" y="5279012"/>
+            <a:ext cx="10058400" cy="529046"/>
+          </a:xfrm>
+          <a:prstGeom prst="rect">
+            <a:avLst/>
+          </a:prstGeom>
+          <a:noFill/>
+          <a:ln/>
+        </p:spPr>
+        <p:txBody>
+          <a:bodyPr wrap="square" lIns="0" tIns="0" rIns="0" bIns="0" rtlCol="0" anchor="ctr"/>
+          <a:lstStyle/>
+          <a:p>
+            <a:pPr indent="0" marL="0">
+              <a:buNone/>
+            </a:pPr>
+            <a:r>
+              <a:rPr lang="en-US" sz="1250" dirty="0">
+                <a:solidFill>
+                  <a:srgbClr val="C9D3F5"/>
+                </a:solidFill>
+                <a:latin typeface="Calibri" pitchFamily="34" charset="0"/>
+                <a:ea typeface="Calibri" pitchFamily="34" charset="-122"/>
+                <a:cs typeface="Calibri" pitchFamily="34" charset="-120"/>
+              </a:rPr>
+              <a:t>JSON is strict: double-quoted keys and strings only, no comments, no trailing commas, no functions.</a:t>
+            </a:r>
+            <a:endParaRPr lang="en-US" sz="1250" dirty="0"/>
+          </a:p>
+        </p:txBody>
+      </p:sp>
+      <p:sp>
+        <p:nvSpPr>
+          <p:cNvPr id="64" name="Shape 64"/>
+          <p:cNvSpPr/>
+          <p:nvPr/>
+        </p:nvSpPr>
+        <p:spPr>
+          <a:xfrm>
+            <a:off x="822960" y="5811088"/>
+            <a:ext cx="438912" cy="438912"/>
+          </a:xfrm>
+          <a:prstGeom prst="ellipse">
+            <a:avLst/>
+          </a:prstGeom>
+          <a:solidFill>
+            <a:srgbClr val="FF8A3D"/>
+          </a:solidFill>
+          <a:ln/>
+        </p:spPr>
+        <p:txBody>
+          <a:bodyPr/>
+          <a:p/>
+        </p:txBody>
+      </p:sp>
+      <p:sp>
+        <p:nvSpPr>
+          <p:cNvPr id="65" name="Text 65"/>
+          <p:cNvSpPr txBox="1"/>
+          <p:nvPr/>
+        </p:nvSpPr>
+        <p:spPr>
+          <a:xfrm>
+            <a:off x="822960" y="5811088"/>
+            <a:ext cx="438912" cy="438912"/>
+          </a:xfrm>
+          <a:prstGeom prst="rect">
+            <a:avLst/>
+          </a:prstGeom>
+          <a:noFill/>
+          <a:ln/>
+        </p:spPr>
+        <p:txBody>
+          <a:bodyPr wrap="square" lIns="0" tIns="0" rIns="0" bIns="0" rtlCol="0" anchor="ctr"/>
+          <a:lstStyle/>
+          <a:p>
+            <a:pPr algn="ctr" indent="0" marL="0">
+              <a:buNone/>
+            </a:pPr>
+            <a:r>
+              <a:rPr lang="en-US" sz="1500" b="1" dirty="0">
+                <a:solidFill>
+                  <a:srgbClr val="FFFFFF"/>
+                </a:solidFill>
+                <a:latin typeface="Calibri" pitchFamily="34" charset="0"/>
+                <a:ea typeface="Calibri" pitchFamily="34" charset="-122"/>
+                <a:cs typeface="Calibri" pitchFamily="34" charset="-120"/>
+              </a:rPr>
+              <a:t>9</a:t>
+            </a:r>
+            <a:endParaRPr lang="en-US" sz="1500" dirty="0"/>
+          </a:p>
+        </p:txBody>
+      </p:sp>
+      <p:sp>
+        <p:nvSpPr>
+          <p:cNvPr id="66" name="Text 66"/>
+          <p:cNvSpPr txBox="1"/>
+          <p:nvPr/>
+        </p:nvSpPr>
+        <p:spPr>
+          <a:xfrm>
+            <a:off x="1463040" y="5719648"/>
+            <a:ext cx="10058400" cy="529046"/>
+          </a:xfrm>
+          <a:prstGeom prst="rect">
+            <a:avLst/>
+          </a:prstGeom>
+          <a:noFill/>
+          <a:ln/>
+        </p:spPr>
+        <p:txBody>
+          <a:bodyPr wrap="square" lIns="0" tIns="0" rIns="0" bIns="0" rtlCol="0" anchor="ctr"/>
+          <a:lstStyle/>
+          <a:p>
+            <a:pPr indent="0" marL="0">
+              <a:buNone/>
+            </a:pPr>
+            <a:r>
+              <a:rPr lang="en-US" sz="1250" dirty="0">
+                <a:solidFill>
+                  <a:srgbClr val="C9D3F5"/>
+                </a:solidFill>
+                <a:latin typeface="Calibri" pitchFamily="34" charset="0"/>
+                <a:ea typeface="Calibri" pitchFamily="34" charset="-122"/>
+                <a:cs typeface="Calibri" pitchFamily="34" charset="-120"/>
+              </a:rPr>
               <a:t>JSON.stringify converts a JS value to JSON text; JSON.parse converts it back -- always inside a try...catch for external data.</a:t>
             </a:r>
             <a:endParaRPr lang="en-US" sz="1250" dirty="0"/>
@@ -9998,7 +10411,2575 @@
                   <a:srgbClr val="8A939B"/>
                 </a:solidFill>
               </a:rPr>
-              <a:t>  ·  24</a:t>
+              <a:t>  ·  29</a:t>
+            </a:r>
+          </a:p>
+        </p:txBody>
+      </p:sp>
+    </p:spTree>
+  </p:cSld>
+  <p:clrMapOvr>
+    <a:masterClrMapping/>
+  </p:clrMapOvr>
+</p:sld>
+</file>
+
+<file path=ppt/slides/slide25.xml><?xml version="1.0" encoding="utf-8"?>
+<p:sld xmlns:a="http://schemas.openxmlformats.org/drawingml/2006/main" xmlns:r="http://schemas.openxmlformats.org/officeDocument/2006/relationships" xmlns:p="http://schemas.openxmlformats.org/presentationml/2006/main">
+  <p:cSld name="Slide 8">
+    <p:bg>
+      <p:bgPr>
+        <a:solidFill>
+          <a:srgbClr val="FFFFFF"/>
+        </a:solidFill>
+      </p:bgPr>
+    </p:bg>
+    <p:spTree>
+      <p:nvGrpSpPr>
+        <p:cNvPr id="1" name=""/>
+        <p:cNvGrpSpPr/>
+        <p:nvPr/>
+      </p:nvGrpSpPr>
+      <p:grpSpPr>
+        <a:xfrm>
+          <a:off x="0" y="0"/>
+          <a:ext cx="0" cy="0"/>
+          <a:chOff x="0" y="0"/>
+          <a:chExt cx="0" cy="0"/>
+        </a:xfrm>
+      </p:grpSpPr>
+      <p:sp>
+        <p:nvSpPr>
+          <p:cNvPr id="2" name="Text 0"/>
+          <p:cNvSpPr txBox="1"/>
+          <p:nvPr/>
+        </p:nvSpPr>
+        <p:spPr>
+          <a:xfrm>
+            <a:off x="640080" y="457200"/>
+            <a:ext cx="10058400" cy="365760"/>
+          </a:xfrm>
+          <a:prstGeom prst="rect">
+            <a:avLst/>
+          </a:prstGeom>
+          <a:noFill/>
+          <a:ln/>
+        </p:spPr>
+        <p:txBody>
+          <a:bodyPr wrap="square" lIns="0" tIns="0" rIns="0" bIns="0" rtlCol="0" anchor="ctr"/>
+          <a:lstStyle/>
+          <a:p>
+            <a:pPr algn="l" indent="0" marL="0">
+              <a:buNone/>
+            </a:pPr>
+            <a:r>
+              <a:rPr lang="en-US" sz="1300" b="1" spc="300" kern="0" dirty="0">
+                <a:solidFill>
+                  <a:srgbClr val="FF8A3D"/>
+                </a:solidFill>
+                <a:latin typeface="Calibri" pitchFamily="34" charset="0"/>
+                <a:ea typeface="Calibri" pitchFamily="34" charset="-122"/>
+                <a:cs typeface="Calibri" pitchFamily="34" charset="-120"/>
+              </a:rPr>
+              <a:t>FORM VALIDATION</a:t>
+            </a:r>
+            <a:endParaRPr lang="en-US" sz="1300" dirty="0"/>
+          </a:p>
+        </p:txBody>
+      </p:sp>
+      <p:sp>
+        <p:nvSpPr>
+          <p:cNvPr id="3" name="Text 1"/>
+          <p:cNvSpPr txBox="1"/>
+          <p:nvPr/>
+        </p:nvSpPr>
+        <p:spPr>
+          <a:xfrm>
+            <a:off x="640080" y="841248"/>
+            <a:ext cx="10881360" cy="914400"/>
+          </a:xfrm>
+          <a:prstGeom prst="rect">
+            <a:avLst/>
+          </a:prstGeom>
+          <a:noFill/>
+          <a:ln/>
+        </p:spPr>
+        <p:txBody>
+          <a:bodyPr wrap="square" lIns="0" tIns="0" rIns="0" bIns="0" rtlCol="0" anchor="ctr"/>
+          <a:lstStyle/>
+          <a:p>
+            <a:pPr algn="l" indent="0" marL="0">
+              <a:buNone/>
+            </a:pPr>
+            <a:r>
+              <a:rPr lang="en-US" sz="3400" b="1" dirty="0">
+                <a:solidFill>
+                  <a:srgbClr val="2B2B7A"/>
+                </a:solidFill>
+                <a:latin typeface="Cambria" pitchFamily="34" charset="0"/>
+                <a:ea typeface="Cambria" pitchFamily="34" charset="-122"/>
+                <a:cs typeface="Cambria" pitchFamily="34" charset="-120"/>
+              </a:rPr>
+              <a:t>Client-Side vs. Server-Side Validation</a:t>
+            </a:r>
+            <a:endParaRPr lang="en-US" sz="3400" dirty="0"/>
+          </a:p>
+        </p:txBody>
+      </p:sp>
+      <p:graphicFrame>
+        <p:nvGraphicFramePr>
+          <p:cNvPr id="9" name="Table 0"/>
+          <p:cNvGraphicFramePr>
+            <a:graphicFrameLocks noGrp="1"/>
+          </p:cNvGraphicFramePr>
+          <p:nvPr>
+            <p:extLst>
+              <p:ext uri="{D42A27DB-BD31-4B8C-83A1-F6EECF244321}">
+                <p14:modId xmlns:p14="http://schemas.microsoft.com/office/powerpoint/2010/main" val="1579011935"/>
+              </p:ext>
+            </p:extLst>
+          </p:nvPr>
+        </p:nvGraphicFramePr>
+        <p:xfrm>
+          <a:off x="640080" y="1965960"/>
+          <a:ext cx="10911535" cy="3383280"/>
+        </p:xfrm>
+        <a:graphic>
+          <a:graphicData uri="http://schemas.openxmlformats.org/drawingml/2006/table">
+            <a:tbl>
+              <a:tblPr/>
+              <a:tblGrid>
+                <a:gridCol w="2900000"/>
+                <a:gridCol w="4005767"/>
+                <a:gridCol w="4005768"/>
+              </a:tblGrid>
+              <a:tr h="640080">
+                <a:tc>
+                  <a:txBody>
+                    <a:bodyPr/>
+                    <a:lstStyle/>
+                    <a:p>
+                      <a:pPr algn="l" indent="0" marL="0">
+                        <a:buNone/>
+                      </a:pPr>
+                      <a:r>
+                        <a:rPr lang="en-US" sz="1200" b="1" dirty="0">
+                          <a:solidFill>
+                            <a:srgbClr val="FFFFFF"/>
+                          </a:solidFill>
+                          <a:latin typeface="Calibri" pitchFamily="34" charset="0"/>
+                          <a:ea typeface="Calibri" pitchFamily="34" charset="-122"/>
+                          <a:cs typeface="Calibri" pitchFamily="34" charset="-120"/>
+                        </a:rPr>
+                        <a:t/>
+                      </a:r>
+                      <a:endParaRPr lang="en-US" sz="1200" dirty="0">
+                        <a:latin typeface="Calibri" charset="0"/>
+                        <a:ea typeface="Calibri" charset="0"/>
+                        <a:cs typeface="Calibri" charset="0"/>
+                      </a:endParaRPr>
+                    </a:p>
+                  </a:txBody>
+                  <a:tcPr marL="91440" marR="91440" marT="45720" marB="45720" anchor="ctr">
+                    <a:lnL w="12700" cap="flat" cmpd="sng" algn="ctr">
+                      <a:solidFill>
+                        <a:srgbClr val="D8D8E6"/>
+                      </a:solidFill>
+                      <a:prstDash val="solid"/>
+                      <a:round/>
+                      <a:headEnd type="none" w="med" len="med"/>
+                      <a:tailEnd type="none" w="med" len="med"/>
+                    </a:lnL>
+                    <a:lnR w="12700" cap="flat" cmpd="sng" algn="ctr">
+                      <a:solidFill>
+                        <a:srgbClr val="D8D8E6"/>
+                      </a:solidFill>
+                      <a:prstDash val="solid"/>
+                      <a:round/>
+                      <a:headEnd type="none" w="med" len="med"/>
+                      <a:tailEnd type="none" w="med" len="med"/>
+                    </a:lnR>
+                    <a:lnT w="12700" cap="flat" cmpd="sng" algn="ctr">
+                      <a:solidFill>
+                        <a:srgbClr val="D8D8E6"/>
+                      </a:solidFill>
+                      <a:prstDash val="solid"/>
+                      <a:round/>
+                      <a:headEnd type="none" w="med" len="med"/>
+                      <a:tailEnd type="none" w="med" len="med"/>
+                    </a:lnT>
+                    <a:lnB w="12700" cap="flat" cmpd="sng" algn="ctr">
+                      <a:solidFill>
+                        <a:srgbClr val="D8D8E6"/>
+                      </a:solidFill>
+                      <a:prstDash val="solid"/>
+                      <a:round/>
+                      <a:headEnd type="none" w="med" len="med"/>
+                      <a:tailEnd type="none" w="med" len="med"/>
+                    </a:lnB>
+                    <a:solidFill>
+                      <a:srgbClr val="2B2B7A"/>
+                    </a:solidFill>
+                  </a:tcPr>
+                </a:tc>
+                <a:tc>
+                  <a:txBody>
+                    <a:bodyPr/>
+                    <a:lstStyle/>
+                    <a:p>
+                      <a:pPr algn="ctr" indent="0" marL="0">
+                        <a:buNone/>
+                      </a:pPr>
+                      <a:r>
+                        <a:rPr lang="en-US" sz="1200" b="1" dirty="0">
+                          <a:solidFill>
+                            <a:srgbClr val="FFFFFF"/>
+                          </a:solidFill>
+                          <a:latin typeface="Calibri" pitchFamily="34" charset="0"/>
+                          <a:ea typeface="Calibri" pitchFamily="34" charset="-122"/>
+                          <a:cs typeface="Calibri" pitchFamily="34" charset="-120"/>
+                        </a:rPr>
+                        <a:t>Client-Side</a:t>
+                      </a:r>
+                      <a:endParaRPr lang="en-US" sz="1200" dirty="0">
+                        <a:latin typeface="Calibri" charset="0"/>
+                        <a:ea typeface="Calibri" charset="0"/>
+                        <a:cs typeface="Calibri" charset="0"/>
+                      </a:endParaRPr>
+                    </a:p>
+                  </a:txBody>
+                  <a:tcPr marL="91440" marR="91440" marT="45720" marB="45720" anchor="ctr">
+                    <a:lnL w="12700" cap="flat" cmpd="sng" algn="ctr">
+                      <a:solidFill>
+                        <a:srgbClr val="D8D8E6"/>
+                      </a:solidFill>
+                      <a:prstDash val="solid"/>
+                      <a:round/>
+                      <a:headEnd type="none" w="med" len="med"/>
+                      <a:tailEnd type="none" w="med" len="med"/>
+                    </a:lnL>
+                    <a:lnR w="12700" cap="flat" cmpd="sng" algn="ctr">
+                      <a:solidFill>
+                        <a:srgbClr val="D8D8E6"/>
+                      </a:solidFill>
+                      <a:prstDash val="solid"/>
+                      <a:round/>
+                      <a:headEnd type="none" w="med" len="med"/>
+                      <a:tailEnd type="none" w="med" len="med"/>
+                    </a:lnR>
+                    <a:lnT w="12700" cap="flat" cmpd="sng" algn="ctr">
+                      <a:solidFill>
+                        <a:srgbClr val="D8D8E6"/>
+                      </a:solidFill>
+                      <a:prstDash val="solid"/>
+                      <a:round/>
+                      <a:headEnd type="none" w="med" len="med"/>
+                      <a:tailEnd type="none" w="med" len="med"/>
+                    </a:lnT>
+                    <a:lnB w="12700" cap="flat" cmpd="sng" algn="ctr">
+                      <a:solidFill>
+                        <a:srgbClr val="D8D8E6"/>
+                      </a:solidFill>
+                      <a:prstDash val="solid"/>
+                      <a:round/>
+                      <a:headEnd type="none" w="med" len="med"/>
+                      <a:tailEnd type="none" w="med" len="med"/>
+                    </a:lnB>
+                    <a:solidFill>
+                      <a:srgbClr val="2B2B7A"/>
+                    </a:solidFill>
+                  </a:tcPr>
+                </a:tc>
+                <a:tc>
+                  <a:txBody>
+                    <a:bodyPr/>
+                    <a:lstStyle/>
+                    <a:p>
+                      <a:pPr algn="ctr" indent="0" marL="0">
+                        <a:buNone/>
+                      </a:pPr>
+                      <a:r>
+                        <a:rPr lang="en-US" sz="1200" b="1" dirty="0">
+                          <a:solidFill>
+                            <a:srgbClr val="FFFFFF"/>
+                          </a:solidFill>
+                          <a:latin typeface="Calibri" pitchFamily="34" charset="0"/>
+                          <a:ea typeface="Calibri" pitchFamily="34" charset="-122"/>
+                          <a:cs typeface="Calibri" pitchFamily="34" charset="-120"/>
+                        </a:rPr>
+                        <a:t>Server-Side</a:t>
+                      </a:r>
+                      <a:endParaRPr lang="en-US" sz="1200" dirty="0">
+                        <a:latin typeface="Calibri" charset="0"/>
+                        <a:ea typeface="Calibri" charset="0"/>
+                        <a:cs typeface="Calibri" charset="0"/>
+                      </a:endParaRPr>
+                    </a:p>
+                  </a:txBody>
+                  <a:tcPr marL="91440" marR="91440" marT="45720" marB="45720" anchor="ctr">
+                    <a:lnL w="12700" cap="flat" cmpd="sng" algn="ctr">
+                      <a:solidFill>
+                        <a:srgbClr val="D8D8E6"/>
+                      </a:solidFill>
+                      <a:prstDash val="solid"/>
+                      <a:round/>
+                      <a:headEnd type="none" w="med" len="med"/>
+                      <a:tailEnd type="none" w="med" len="med"/>
+                    </a:lnL>
+                    <a:lnR w="12700" cap="flat" cmpd="sng" algn="ctr">
+                      <a:solidFill>
+                        <a:srgbClr val="D8D8E6"/>
+                      </a:solidFill>
+                      <a:prstDash val="solid"/>
+                      <a:round/>
+                      <a:headEnd type="none" w="med" len="med"/>
+                      <a:tailEnd type="none" w="med" len="med"/>
+                    </a:lnR>
+                    <a:lnT w="12700" cap="flat" cmpd="sng" algn="ctr">
+                      <a:solidFill>
+                        <a:srgbClr val="D8D8E6"/>
+                      </a:solidFill>
+                      <a:prstDash val="solid"/>
+                      <a:round/>
+                      <a:headEnd type="none" w="med" len="med"/>
+                      <a:tailEnd type="none" w="med" len="med"/>
+                    </a:lnT>
+                    <a:lnB w="12700" cap="flat" cmpd="sng" algn="ctr">
+                      <a:solidFill>
+                        <a:srgbClr val="D8D8E6"/>
+                      </a:solidFill>
+                      <a:prstDash val="solid"/>
+                      <a:round/>
+                      <a:headEnd type="none" w="med" len="med"/>
+                      <a:tailEnd type="none" w="med" len="med"/>
+                    </a:lnB>
+                    <a:solidFill>
+                      <a:srgbClr val="2B2B7A"/>
+                    </a:solidFill>
+                  </a:tcPr>
+                </a:tc>
+              </a:tr>
+              <a:tr h="914400">
+                <a:tc>
+                  <a:txBody>
+                    <a:bodyPr/>
+                    <a:lstStyle/>
+                    <a:p>
+                      <a:pPr algn="l" indent="0" marL="0">
+                        <a:buNone/>
+                      </a:pPr>
+                      <a:r>
+                        <a:rPr lang="en-US" sz="1200" b="1" dirty="0">
+                          <a:solidFill>
+                            <a:srgbClr val="26262F"/>
+                          </a:solidFill>
+                          <a:latin typeface="Calibri" pitchFamily="34" charset="0"/>
+                          <a:ea typeface="Calibri" pitchFamily="34" charset="-122"/>
+                          <a:cs typeface="Calibri" pitchFamily="34" charset="-120"/>
+                        </a:rPr>
+                        <a:t>Purpose</a:t>
+                      </a:r>
+                      <a:endParaRPr lang="en-US" sz="1200" dirty="0">
+                        <a:latin typeface="Calibri" charset="0"/>
+                        <a:ea typeface="Calibri" charset="0"/>
+                        <a:cs typeface="Calibri" charset="0"/>
+                      </a:endParaRPr>
+                    </a:p>
+                  </a:txBody>
+                  <a:tcPr marL="91440" marR="91440" marT="45720" marB="45720" anchor="ctr">
+                    <a:lnL w="12700" cap="flat" cmpd="sng" algn="ctr">
+                      <a:solidFill>
+                        <a:srgbClr val="D8D8E6"/>
+                      </a:solidFill>
+                      <a:prstDash val="solid"/>
+                      <a:round/>
+                      <a:headEnd type="none" w="med" len="med"/>
+                      <a:tailEnd type="none" w="med" len="med"/>
+                    </a:lnL>
+                    <a:lnR w="12700" cap="flat" cmpd="sng" algn="ctr">
+                      <a:solidFill>
+                        <a:srgbClr val="D8D8E6"/>
+                      </a:solidFill>
+                      <a:prstDash val="solid"/>
+                      <a:round/>
+                      <a:headEnd type="none" w="med" len="med"/>
+                      <a:tailEnd type="none" w="med" len="med"/>
+                    </a:lnR>
+                    <a:lnT w="12700" cap="flat" cmpd="sng" algn="ctr">
+                      <a:solidFill>
+                        <a:srgbClr val="D8D8E6"/>
+                      </a:solidFill>
+                      <a:prstDash val="solid"/>
+                      <a:round/>
+                      <a:headEnd type="none" w="med" len="med"/>
+                      <a:tailEnd type="none" w="med" len="med"/>
+                    </a:lnT>
+                    <a:lnB w="12700" cap="flat" cmpd="sng" algn="ctr">
+                      <a:solidFill>
+                        <a:srgbClr val="D8D8E6"/>
+                      </a:solidFill>
+                      <a:prstDash val="solid"/>
+                      <a:round/>
+                      <a:headEnd type="none" w="med" len="med"/>
+                      <a:tailEnd type="none" w="med" len="med"/>
+                    </a:lnB>
+                    <a:solidFill>
+                      <a:srgbClr val="FFFFFF"/>
+                    </a:solidFill>
+                  </a:tcPr>
+                </a:tc>
+                <a:tc>
+                  <a:txBody>
+                    <a:bodyPr/>
+                    <a:lstStyle/>
+                    <a:p>
+                      <a:pPr algn="l" indent="0" marL="0">
+                        <a:buNone/>
+                      </a:pPr>
+                      <a:r>
+                        <a:rPr lang="en-US" sz="1200" dirty="0">
+                          <a:solidFill>
+                            <a:srgbClr val="26262F"/>
+                          </a:solidFill>
+                          <a:latin typeface="Calibri" pitchFamily="34" charset="0"/>
+                          <a:ea typeface="Calibri" pitchFamily="34" charset="-122"/>
+                          <a:cs typeface="Calibri" pitchFamily="34" charset="-120"/>
+                        </a:rPr>
+                        <a:t>Instant feedback, better UX</a:t>
+                      </a:r>
+                      <a:endParaRPr lang="en-US" sz="1200" dirty="0">
+                        <a:latin typeface="Calibri" charset="0"/>
+                        <a:ea typeface="Calibri" charset="0"/>
+                        <a:cs typeface="Calibri" charset="0"/>
+                      </a:endParaRPr>
+                    </a:p>
+                  </a:txBody>
+                  <a:tcPr marL="91440" marR="91440" marT="45720" marB="45720" anchor="ctr">
+                    <a:lnL w="12700" cap="flat" cmpd="sng" algn="ctr">
+                      <a:solidFill>
+                        <a:srgbClr val="D8D8E6"/>
+                      </a:solidFill>
+                      <a:prstDash val="solid"/>
+                      <a:round/>
+                      <a:headEnd type="none" w="med" len="med"/>
+                      <a:tailEnd type="none" w="med" len="med"/>
+                    </a:lnL>
+                    <a:lnR w="12700" cap="flat" cmpd="sng" algn="ctr">
+                      <a:solidFill>
+                        <a:srgbClr val="D8D8E6"/>
+                      </a:solidFill>
+                      <a:prstDash val="solid"/>
+                      <a:round/>
+                      <a:headEnd type="none" w="med" len="med"/>
+                      <a:tailEnd type="none" w="med" len="med"/>
+                    </a:lnR>
+                    <a:lnT w="12700" cap="flat" cmpd="sng" algn="ctr">
+                      <a:solidFill>
+                        <a:srgbClr val="D8D8E6"/>
+                      </a:solidFill>
+                      <a:prstDash val="solid"/>
+                      <a:round/>
+                      <a:headEnd type="none" w="med" len="med"/>
+                      <a:tailEnd type="none" w="med" len="med"/>
+                    </a:lnT>
+                    <a:lnB w="12700" cap="flat" cmpd="sng" algn="ctr">
+                      <a:solidFill>
+                        <a:srgbClr val="D8D8E6"/>
+                      </a:solidFill>
+                      <a:prstDash val="solid"/>
+                      <a:round/>
+                      <a:headEnd type="none" w="med" len="med"/>
+                      <a:tailEnd type="none" w="med" len="med"/>
+                    </a:lnB>
+                    <a:solidFill>
+                      <a:srgbClr val="FFFFFF"/>
+                    </a:solidFill>
+                  </a:tcPr>
+                </a:tc>
+                <a:tc>
+                  <a:txBody>
+                    <a:bodyPr/>
+                    <a:lstStyle/>
+                    <a:p>
+                      <a:pPr algn="l" indent="0" marL="0">
+                        <a:buNone/>
+                      </a:pPr>
+                      <a:r>
+                        <a:rPr lang="en-US" sz="1200" dirty="0">
+                          <a:solidFill>
+                            <a:srgbClr val="26262F"/>
+                          </a:solidFill>
+                          <a:latin typeface="Calibri" pitchFamily="34" charset="0"/>
+                          <a:ea typeface="Calibri" pitchFamily="34" charset="-122"/>
+                          <a:cs typeface="Calibri" pitchFamily="34" charset="-120"/>
+                        </a:rPr>
+                        <a:t>The actual gate -- decides what's allowed in</a:t>
+                      </a:r>
+                      <a:endParaRPr lang="en-US" sz="1200" dirty="0">
+                        <a:latin typeface="Calibri" charset="0"/>
+                        <a:ea typeface="Calibri" charset="0"/>
+                        <a:cs typeface="Calibri" charset="0"/>
+                      </a:endParaRPr>
+                    </a:p>
+                  </a:txBody>
+                  <a:tcPr marL="91440" marR="91440" marT="45720" marB="45720" anchor="ctr">
+                    <a:lnL w="12700" cap="flat" cmpd="sng" algn="ctr">
+                      <a:solidFill>
+                        <a:srgbClr val="D8D8E6"/>
+                      </a:solidFill>
+                      <a:prstDash val="solid"/>
+                      <a:round/>
+                      <a:headEnd type="none" w="med" len="med"/>
+                      <a:tailEnd type="none" w="med" len="med"/>
+                    </a:lnL>
+                    <a:lnR w="12700" cap="flat" cmpd="sng" algn="ctr">
+                      <a:solidFill>
+                        <a:srgbClr val="D8D8E6"/>
+                      </a:solidFill>
+                      <a:prstDash val="solid"/>
+                      <a:round/>
+                      <a:headEnd type="none" w="med" len="med"/>
+                      <a:tailEnd type="none" w="med" len="med"/>
+                    </a:lnR>
+                    <a:lnT w="12700" cap="flat" cmpd="sng" algn="ctr">
+                      <a:solidFill>
+                        <a:srgbClr val="D8D8E6"/>
+                      </a:solidFill>
+                      <a:prstDash val="solid"/>
+                      <a:round/>
+                      <a:headEnd type="none" w="med" len="med"/>
+                      <a:tailEnd type="none" w="med" len="med"/>
+                    </a:lnT>
+                    <a:lnB w="12700" cap="flat" cmpd="sng" algn="ctr">
+                      <a:solidFill>
+                        <a:srgbClr val="D8D8E6"/>
+                      </a:solidFill>
+                      <a:prstDash val="solid"/>
+                      <a:round/>
+                      <a:headEnd type="none" w="med" len="med"/>
+                      <a:tailEnd type="none" w="med" len="med"/>
+                    </a:lnB>
+                    <a:solidFill>
+                      <a:srgbClr val="FFFFFF"/>
+                    </a:solidFill>
+                  </a:tcPr>
+                </a:tc>
+              </a:tr>
+              <a:tr h="914400">
+                <a:tc>
+                  <a:txBody>
+                    <a:bodyPr/>
+                    <a:lstStyle/>
+                    <a:p>
+                      <a:pPr algn="l" indent="0" marL="0">
+                        <a:buNone/>
+                      </a:pPr>
+                      <a:r>
+                        <a:rPr lang="en-US" sz="1200" b="1" dirty="0">
+                          <a:solidFill>
+                            <a:srgbClr val="26262F"/>
+                          </a:solidFill>
+                          <a:latin typeface="Calibri" pitchFamily="34" charset="0"/>
+                          <a:ea typeface="Calibri" pitchFamily="34" charset="-122"/>
+                          <a:cs typeface="Calibri" pitchFamily="34" charset="-120"/>
+                        </a:rPr>
+                        <a:t>Can It Be Bypassed?</a:t>
+                      </a:r>
+                      <a:endParaRPr lang="en-US" sz="1200" dirty="0">
+                        <a:latin typeface="Calibri" charset="0"/>
+                        <a:ea typeface="Calibri" charset="0"/>
+                        <a:cs typeface="Calibri" charset="0"/>
+                      </a:endParaRPr>
+                    </a:p>
+                  </a:txBody>
+                  <a:tcPr marL="91440" marR="91440" marT="45720" marB="45720" anchor="ctr">
+                    <a:lnL w="12700" cap="flat" cmpd="sng" algn="ctr">
+                      <a:solidFill>
+                        <a:srgbClr val="D8D8E6"/>
+                      </a:solidFill>
+                      <a:prstDash val="solid"/>
+                      <a:round/>
+                      <a:headEnd type="none" w="med" len="med"/>
+                      <a:tailEnd type="none" w="med" len="med"/>
+                    </a:lnL>
+                    <a:lnR w="12700" cap="flat" cmpd="sng" algn="ctr">
+                      <a:solidFill>
+                        <a:srgbClr val="D8D8E6"/>
+                      </a:solidFill>
+                      <a:prstDash val="solid"/>
+                      <a:round/>
+                      <a:headEnd type="none" w="med" len="med"/>
+                      <a:tailEnd type="none" w="med" len="med"/>
+                    </a:lnR>
+                    <a:lnT w="12700" cap="flat" cmpd="sng" algn="ctr">
+                      <a:solidFill>
+                        <a:srgbClr val="D8D8E6"/>
+                      </a:solidFill>
+                      <a:prstDash val="solid"/>
+                      <a:round/>
+                      <a:headEnd type="none" w="med" len="med"/>
+                      <a:tailEnd type="none" w="med" len="med"/>
+                    </a:lnT>
+                    <a:lnB w="12700" cap="flat" cmpd="sng" algn="ctr">
+                      <a:solidFill>
+                        <a:srgbClr val="D8D8E6"/>
+                      </a:solidFill>
+                      <a:prstDash val="solid"/>
+                      <a:round/>
+                      <a:headEnd type="none" w="med" len="med"/>
+                      <a:tailEnd type="none" w="med" len="med"/>
+                    </a:lnB>
+                    <a:solidFill>
+                      <a:srgbClr val="FFFFFF"/>
+                    </a:solidFill>
+                  </a:tcPr>
+                </a:tc>
+                <a:tc>
+                  <a:txBody>
+                    <a:bodyPr/>
+                    <a:lstStyle/>
+                    <a:p>
+                      <a:pPr algn="l" indent="0" marL="0">
+                        <a:buNone/>
+                      </a:pPr>
+                      <a:r>
+                        <a:rPr lang="en-US" sz="1200" dirty="0">
+                          <a:solidFill>
+                            <a:srgbClr val="26262F"/>
+                          </a:solidFill>
+                          <a:latin typeface="Calibri" pitchFamily="34" charset="0"/>
+                          <a:ea typeface="Calibri" pitchFamily="34" charset="-122"/>
+                          <a:cs typeface="Calibri" pitchFamily="34" charset="-120"/>
+                        </a:rPr>
+                        <a:t>Yes -- disabled JS, DevTools, a direct request</a:t>
+                      </a:r>
+                      <a:endParaRPr lang="en-US" sz="1200" dirty="0">
+                        <a:latin typeface="Calibri" charset="0"/>
+                        <a:ea typeface="Calibri" charset="0"/>
+                        <a:cs typeface="Calibri" charset="0"/>
+                      </a:endParaRPr>
+                    </a:p>
+                  </a:txBody>
+                  <a:tcPr marL="91440" marR="91440" marT="45720" marB="45720" anchor="ctr">
+                    <a:lnL w="12700" cap="flat" cmpd="sng" algn="ctr">
+                      <a:solidFill>
+                        <a:srgbClr val="D8D8E6"/>
+                      </a:solidFill>
+                      <a:prstDash val="solid"/>
+                      <a:round/>
+                      <a:headEnd type="none" w="med" len="med"/>
+                      <a:tailEnd type="none" w="med" len="med"/>
+                    </a:lnL>
+                    <a:lnR w="12700" cap="flat" cmpd="sng" algn="ctr">
+                      <a:solidFill>
+                        <a:srgbClr val="D8D8E6"/>
+                      </a:solidFill>
+                      <a:prstDash val="solid"/>
+                      <a:round/>
+                      <a:headEnd type="none" w="med" len="med"/>
+                      <a:tailEnd type="none" w="med" len="med"/>
+                    </a:lnR>
+                    <a:lnT w="12700" cap="flat" cmpd="sng" algn="ctr">
+                      <a:solidFill>
+                        <a:srgbClr val="D8D8E6"/>
+                      </a:solidFill>
+                      <a:prstDash val="solid"/>
+                      <a:round/>
+                      <a:headEnd type="none" w="med" len="med"/>
+                      <a:tailEnd type="none" w="med" len="med"/>
+                    </a:lnT>
+                    <a:lnB w="12700" cap="flat" cmpd="sng" algn="ctr">
+                      <a:solidFill>
+                        <a:srgbClr val="D8D8E6"/>
+                      </a:solidFill>
+                      <a:prstDash val="solid"/>
+                      <a:round/>
+                      <a:headEnd type="none" w="med" len="med"/>
+                      <a:tailEnd type="none" w="med" len="med"/>
+                    </a:lnB>
+                    <a:solidFill>
+                      <a:srgbClr val="FFFFFF"/>
+                    </a:solidFill>
+                  </a:tcPr>
+                </a:tc>
+                <a:tc>
+                  <a:txBody>
+                    <a:bodyPr/>
+                    <a:lstStyle/>
+                    <a:p>
+                      <a:pPr algn="l" indent="0" marL="0">
+                        <a:buNone/>
+                      </a:pPr>
+                      <a:r>
+                        <a:rPr lang="en-US" sz="1200" dirty="0">
+                          <a:solidFill>
+                            <a:srgbClr val="26262F"/>
+                          </a:solidFill>
+                          <a:latin typeface="Calibri" pitchFamily="34" charset="0"/>
+                          <a:ea typeface="Calibri" pitchFamily="34" charset="-122"/>
+                          <a:cs typeface="Calibri" pitchFamily="34" charset="-120"/>
+                        </a:rPr>
+                        <a:t>No -- it's your own server's code</a:t>
+                      </a:r>
+                      <a:endParaRPr lang="en-US" sz="1200" dirty="0">
+                        <a:latin typeface="Calibri" charset="0"/>
+                        <a:ea typeface="Calibri" charset="0"/>
+                        <a:cs typeface="Calibri" charset="0"/>
+                      </a:endParaRPr>
+                    </a:p>
+                  </a:txBody>
+                  <a:tcPr marL="91440" marR="91440" marT="45720" marB="45720" anchor="ctr">
+                    <a:lnL w="12700" cap="flat" cmpd="sng" algn="ctr">
+                      <a:solidFill>
+                        <a:srgbClr val="D8D8E6"/>
+                      </a:solidFill>
+                      <a:prstDash val="solid"/>
+                      <a:round/>
+                      <a:headEnd type="none" w="med" len="med"/>
+                      <a:tailEnd type="none" w="med" len="med"/>
+                    </a:lnL>
+                    <a:lnR w="12700" cap="flat" cmpd="sng" algn="ctr">
+                      <a:solidFill>
+                        <a:srgbClr val="D8D8E6"/>
+                      </a:solidFill>
+                      <a:prstDash val="solid"/>
+                      <a:round/>
+                      <a:headEnd type="none" w="med" len="med"/>
+                      <a:tailEnd type="none" w="med" len="med"/>
+                    </a:lnR>
+                    <a:lnT w="12700" cap="flat" cmpd="sng" algn="ctr">
+                      <a:solidFill>
+                        <a:srgbClr val="D8D8E6"/>
+                      </a:solidFill>
+                      <a:prstDash val="solid"/>
+                      <a:round/>
+                      <a:headEnd type="none" w="med" len="med"/>
+                      <a:tailEnd type="none" w="med" len="med"/>
+                    </a:lnT>
+                    <a:lnB w="12700" cap="flat" cmpd="sng" algn="ctr">
+                      <a:solidFill>
+                        <a:srgbClr val="D8D8E6"/>
+                      </a:solidFill>
+                      <a:prstDash val="solid"/>
+                      <a:round/>
+                      <a:headEnd type="none" w="med" len="med"/>
+                      <a:tailEnd type="none" w="med" len="med"/>
+                    </a:lnB>
+                    <a:solidFill>
+                      <a:srgbClr val="FFFFFF"/>
+                    </a:solidFill>
+                  </a:tcPr>
+                </a:tc>
+              </a:tr>
+              <a:tr h="914400">
+                <a:tc>
+                  <a:txBody>
+                    <a:bodyPr/>
+                    <a:lstStyle/>
+                    <a:p>
+                      <a:pPr algn="l" indent="0" marL="0">
+                        <a:buNone/>
+                      </a:pPr>
+                      <a:r>
+                        <a:rPr lang="en-US" sz="1200" b="1" dirty="0">
+                          <a:solidFill>
+                            <a:srgbClr val="26262F"/>
+                          </a:solidFill>
+                          <a:latin typeface="Calibri" pitchFamily="34" charset="0"/>
+                          <a:ea typeface="Calibri" pitchFamily="34" charset="-122"/>
+                          <a:cs typeface="Calibri" pitchFamily="34" charset="-120"/>
+                        </a:rPr>
+                        <a:t>Safe to Trust for Security?</a:t>
+                      </a:r>
+                      <a:endParaRPr lang="en-US" sz="1200" dirty="0">
+                        <a:latin typeface="Calibri" charset="0"/>
+                        <a:ea typeface="Calibri" charset="0"/>
+                        <a:cs typeface="Calibri" charset="0"/>
+                      </a:endParaRPr>
+                    </a:p>
+                  </a:txBody>
+                  <a:tcPr marL="91440" marR="91440" marT="45720" marB="45720" anchor="ctr">
+                    <a:lnL w="12700" cap="flat" cmpd="sng" algn="ctr">
+                      <a:solidFill>
+                        <a:srgbClr val="D8D8E6"/>
+                      </a:solidFill>
+                      <a:prstDash val="solid"/>
+                      <a:round/>
+                      <a:headEnd type="none" w="med" len="med"/>
+                      <a:tailEnd type="none" w="med" len="med"/>
+                    </a:lnL>
+                    <a:lnR w="12700" cap="flat" cmpd="sng" algn="ctr">
+                      <a:solidFill>
+                        <a:srgbClr val="D8D8E6"/>
+                      </a:solidFill>
+                      <a:prstDash val="solid"/>
+                      <a:round/>
+                      <a:headEnd type="none" w="med" len="med"/>
+                      <a:tailEnd type="none" w="med" len="med"/>
+                    </a:lnR>
+                    <a:lnT w="12700" cap="flat" cmpd="sng" algn="ctr">
+                      <a:solidFill>
+                        <a:srgbClr val="D8D8E6"/>
+                      </a:solidFill>
+                      <a:prstDash val="solid"/>
+                      <a:round/>
+                      <a:headEnd type="none" w="med" len="med"/>
+                      <a:tailEnd type="none" w="med" len="med"/>
+                    </a:lnT>
+                    <a:lnB w="12700" cap="flat" cmpd="sng" algn="ctr">
+                      <a:solidFill>
+                        <a:srgbClr val="D8D8E6"/>
+                      </a:solidFill>
+                      <a:prstDash val="solid"/>
+                      <a:round/>
+                      <a:headEnd type="none" w="med" len="med"/>
+                      <a:tailEnd type="none" w="med" len="med"/>
+                    </a:lnB>
+                    <a:solidFill>
+                      <a:srgbClr val="FFFFFF"/>
+                    </a:solidFill>
+                  </a:tcPr>
+                </a:tc>
+                <a:tc>
+                  <a:txBody>
+                    <a:bodyPr/>
+                    <a:lstStyle/>
+                    <a:p>
+                      <a:pPr algn="l" indent="0" marL="0">
+                        <a:buNone/>
+                      </a:pPr>
+                      <a:r>
+                        <a:rPr lang="en-US" sz="1200" dirty="0">
+                          <a:solidFill>
+                            <a:srgbClr val="26262F"/>
+                          </a:solidFill>
+                          <a:latin typeface="Calibri" pitchFamily="34" charset="0"/>
+                          <a:ea typeface="Calibri" pitchFamily="34" charset="-122"/>
+                          <a:cs typeface="Calibri" pitchFamily="34" charset="-120"/>
+                        </a:rPr>
+                        <a:t>Never</a:t>
+                      </a:r>
+                      <a:endParaRPr lang="en-US" sz="1200" dirty="0">
+                        <a:latin typeface="Calibri" charset="0"/>
+                        <a:ea typeface="Calibri" charset="0"/>
+                        <a:cs typeface="Calibri" charset="0"/>
+                      </a:endParaRPr>
+                    </a:p>
+                  </a:txBody>
+                  <a:tcPr marL="91440" marR="91440" marT="45720" marB="45720" anchor="ctr">
+                    <a:lnL w="12700" cap="flat" cmpd="sng" algn="ctr">
+                      <a:solidFill>
+                        <a:srgbClr val="D8D8E6"/>
+                      </a:solidFill>
+                      <a:prstDash val="solid"/>
+                      <a:round/>
+                      <a:headEnd type="none" w="med" len="med"/>
+                      <a:tailEnd type="none" w="med" len="med"/>
+                    </a:lnL>
+                    <a:lnR w="12700" cap="flat" cmpd="sng" algn="ctr">
+                      <a:solidFill>
+                        <a:srgbClr val="D8D8E6"/>
+                      </a:solidFill>
+                      <a:prstDash val="solid"/>
+                      <a:round/>
+                      <a:headEnd type="none" w="med" len="med"/>
+                      <a:tailEnd type="none" w="med" len="med"/>
+                    </a:lnR>
+                    <a:lnT w="12700" cap="flat" cmpd="sng" algn="ctr">
+                      <a:solidFill>
+                        <a:srgbClr val="D8D8E6"/>
+                      </a:solidFill>
+                      <a:prstDash val="solid"/>
+                      <a:round/>
+                      <a:headEnd type="none" w="med" len="med"/>
+                      <a:tailEnd type="none" w="med" len="med"/>
+                    </a:lnT>
+                    <a:lnB w="12700" cap="flat" cmpd="sng" algn="ctr">
+                      <a:solidFill>
+                        <a:srgbClr val="D8D8E6"/>
+                      </a:solidFill>
+                      <a:prstDash val="solid"/>
+                      <a:round/>
+                      <a:headEnd type="none" w="med" len="med"/>
+                      <a:tailEnd type="none" w="med" len="med"/>
+                    </a:lnB>
+                    <a:solidFill>
+                      <a:srgbClr val="FFFFFF"/>
+                    </a:solidFill>
+                  </a:tcPr>
+                </a:tc>
+                <a:tc>
+                  <a:txBody>
+                    <a:bodyPr/>
+                    <a:lstStyle/>
+                    <a:p>
+                      <a:pPr algn="l" indent="0" marL="0">
+                        <a:buNone/>
+                      </a:pPr>
+                      <a:r>
+                        <a:rPr lang="en-US" sz="1200" dirty="0">
+                          <a:solidFill>
+                            <a:srgbClr val="26262F"/>
+                          </a:solidFill>
+                          <a:latin typeface="Calibri" pitchFamily="34" charset="0"/>
+                          <a:ea typeface="Calibri" pitchFamily="34" charset="-122"/>
+                          <a:cs typeface="Calibri" pitchFamily="34" charset="-120"/>
+                        </a:rPr>
+                        <a:t>Yes -- the only validation you can trust</a:t>
+                      </a:r>
+                      <a:endParaRPr lang="en-US" sz="1200" dirty="0">
+                        <a:latin typeface="Calibri" charset="0"/>
+                        <a:ea typeface="Calibri" charset="0"/>
+                        <a:cs typeface="Calibri" charset="0"/>
+                      </a:endParaRPr>
+                    </a:p>
+                  </a:txBody>
+                  <a:tcPr marL="91440" marR="91440" marT="45720" marB="45720" anchor="ctr">
+                    <a:lnL w="12700" cap="flat" cmpd="sng" algn="ctr">
+                      <a:solidFill>
+                        <a:srgbClr val="D8D8E6"/>
+                      </a:solidFill>
+                      <a:prstDash val="solid"/>
+                      <a:round/>
+                      <a:headEnd type="none" w="med" len="med"/>
+                      <a:tailEnd type="none" w="med" len="med"/>
+                    </a:lnL>
+                    <a:lnR w="12700" cap="flat" cmpd="sng" algn="ctr">
+                      <a:solidFill>
+                        <a:srgbClr val="D8D8E6"/>
+                      </a:solidFill>
+                      <a:prstDash val="solid"/>
+                      <a:round/>
+                      <a:headEnd type="none" w="med" len="med"/>
+                      <a:tailEnd type="none" w="med" len="med"/>
+                    </a:lnR>
+                    <a:lnT w="12700" cap="flat" cmpd="sng" algn="ctr">
+                      <a:solidFill>
+                        <a:srgbClr val="D8D8E6"/>
+                      </a:solidFill>
+                      <a:prstDash val="solid"/>
+                      <a:round/>
+                      <a:headEnd type="none" w="med" len="med"/>
+                      <a:tailEnd type="none" w="med" len="med"/>
+                    </a:lnT>
+                    <a:lnB w="12700" cap="flat" cmpd="sng" algn="ctr">
+                      <a:solidFill>
+                        <a:srgbClr val="D8D8E6"/>
+                      </a:solidFill>
+                      <a:prstDash val="solid"/>
+                      <a:round/>
+                      <a:headEnd type="none" w="med" len="med"/>
+                      <a:tailEnd type="none" w="med" len="med"/>
+                    </a:lnB>
+                    <a:solidFill>
+                      <a:srgbClr val="FFFFFF"/>
+                    </a:solidFill>
+                  </a:tcPr>
+                </a:tc>
+              </a:tr>
+            </a:tbl>
+          </a:graphicData>
+        </a:graphic>
+      </p:graphicFrame>
+      <p:sp>
+        <p:nvSpPr>
+          <p:cNvPr id="10" name="cuinotes-footer-mark"/>
+          <p:cNvSpPr txBox="1"/>
+          <p:nvPr/>
+        </p:nvSpPr>
+        <p:spPr>
+          <a:xfrm>
+            <a:off x="9951720" y="6455664"/>
+            <a:ext cx="2011680" cy="292608"/>
+          </a:xfrm>
+          <a:prstGeom prst="rect">
+            <a:avLst/>
+          </a:prstGeom>
+          <a:noFill/>
+        </p:spPr>
+        <p:txBody>
+          <a:bodyPr wrap="none" lIns="0" rIns="0" tIns="0" bIns="0">
+            <a:spAutoFit/>
+          </a:bodyPr>
+          <a:lstStyle/>
+          <a:p>
+            <a:pPr algn="r"/>
+            <a:r>
+              <a:rPr sz="1000">
+                <a:solidFill>
+                  <a:srgbClr val="8A939B"/>
+                </a:solidFill>
+                <a:hlinkClick r:id="rId3"/>
+              </a:rPr>
+              <a:t>cuinotes.com</a:t>
+            </a:r>
+            <a:r>
+              <a:rPr sz="1000">
+                <a:solidFill>
+                  <a:srgbClr val="8A939B"/>
+                </a:solidFill>
+              </a:rPr>
+              <a:t>  ·  17</a:t>
+            </a:r>
+          </a:p>
+        </p:txBody>
+      </p:sp>
+    </p:spTree>
+  </p:cSld>
+  <p:clrMapOvr>
+    <a:masterClrMapping/>
+  </p:clrMapOvr>
+</p:sld>
+</file>
+
+<file path=ppt/slides/slide26.xml><?xml version="1.0" encoding="utf-8"?>
+<p:sld xmlns:a="http://schemas.openxmlformats.org/drawingml/2006/main" xmlns:r="http://schemas.openxmlformats.org/officeDocument/2006/relationships" xmlns:p="http://schemas.openxmlformats.org/presentationml/2006/main">
+  <p:cSld name="Slide 15">
+    <p:bg>
+      <p:bgPr>
+        <a:solidFill>
+          <a:srgbClr val="FFFFFF"/>
+        </a:solidFill>
+      </p:bgPr>
+    </p:bg>
+    <p:spTree>
+      <p:nvGrpSpPr>
+        <p:cNvPr id="1" name=""/>
+        <p:cNvGrpSpPr/>
+        <p:nvPr/>
+      </p:nvGrpSpPr>
+      <p:grpSpPr>
+        <a:xfrm>
+          <a:off x="0" y="0"/>
+          <a:ext cx="0" cy="0"/>
+          <a:chOff x="0" y="0"/>
+          <a:chExt cx="0" cy="0"/>
+        </a:xfrm>
+      </p:grpSpPr>
+      <p:sp>
+        <p:nvSpPr>
+          <p:cNvPr id="2" name="Text 0"/>
+          <p:cNvSpPr txBox="1"/>
+          <p:nvPr/>
+        </p:nvSpPr>
+        <p:spPr>
+          <a:xfrm>
+            <a:off x="640080" y="457200"/>
+            <a:ext cx="10058400" cy="365760"/>
+          </a:xfrm>
+          <a:prstGeom prst="rect">
+            <a:avLst/>
+          </a:prstGeom>
+          <a:noFill/>
+          <a:ln/>
+        </p:spPr>
+        <p:txBody>
+          <a:bodyPr wrap="square" lIns="0" tIns="0" rIns="0" bIns="0" rtlCol="0" anchor="ctr"/>
+          <a:lstStyle/>
+          <a:p>
+            <a:pPr algn="l" indent="0" marL="0">
+              <a:buNone/>
+            </a:pPr>
+            <a:r>
+              <a:rPr lang="en-US" sz="1300" b="1" spc="300" kern="0" dirty="0">
+                <a:solidFill>
+                  <a:srgbClr val="FF8A3D"/>
+                </a:solidFill>
+                <a:latin typeface="Calibri" pitchFamily="34" charset="0"/>
+                <a:ea typeface="Calibri" pitchFamily="34" charset="-122"/>
+                <a:cs typeface="Calibri" pitchFamily="34" charset="-120"/>
+              </a:rPr>
+              <a:t>FORM VALIDATION</a:t>
+            </a:r>
+            <a:endParaRPr lang="en-US" sz="1300" dirty="0"/>
+          </a:p>
+        </p:txBody>
+      </p:sp>
+      <p:sp>
+        <p:nvSpPr>
+          <p:cNvPr id="3" name="Text 1"/>
+          <p:cNvSpPr txBox="1"/>
+          <p:nvPr/>
+        </p:nvSpPr>
+        <p:spPr>
+          <a:xfrm>
+            <a:off x="640080" y="841248"/>
+            <a:ext cx="10881360" cy="914400"/>
+          </a:xfrm>
+          <a:prstGeom prst="rect">
+            <a:avLst/>
+          </a:prstGeom>
+          <a:noFill/>
+          <a:ln/>
+        </p:spPr>
+        <p:txBody>
+          <a:bodyPr wrap="square" lIns="0" tIns="0" rIns="0" bIns="0" rtlCol="0" anchor="ctr"/>
+          <a:lstStyle/>
+          <a:p>
+            <a:pPr algn="l" indent="0" marL="0">
+              <a:buNone/>
+            </a:pPr>
+            <a:r>
+              <a:rPr lang="en-US" sz="3400" b="1" dirty="0">
+                <a:solidFill>
+                  <a:srgbClr val="2B2B7A"/>
+                </a:solidFill>
+                <a:latin typeface="Cambria" pitchFamily="34" charset="0"/>
+                <a:ea typeface="Cambria" pitchFamily="34" charset="-122"/>
+                <a:cs typeface="Cambria" pitchFamily="34" charset="-120"/>
+              </a:rPr>
+              <a:t>Never Trust the Client</a:t>
+            </a:r>
+            <a:endParaRPr lang="en-US" sz="3400" dirty="0"/>
+          </a:p>
+        </p:txBody>
+      </p:sp>
+      <p:sp>
+        <p:nvSpPr>
+          <p:cNvPr id="4" name="Shape 2"/>
+          <p:cNvSpPr/>
+          <p:nvPr/>
+        </p:nvSpPr>
+        <p:spPr>
+          <a:xfrm>
+            <a:off x="640080" y="1965960"/>
+            <a:ext cx="10911535" cy="3657600"/>
+          </a:xfrm>
+          <a:prstGeom prst="roundRect">
+            <a:avLst>
+              <a:gd name="adj" fmla="val 3000"/>
+            </a:avLst>
+          </a:prstGeom>
+          <a:solidFill>
+            <a:srgbClr val="FDECE0"/>
+          </a:solidFill>
+          <a:ln w="12700">
+            <a:solidFill>
+              <a:srgbClr val="FF8A3D"/>
+            </a:solidFill>
+            <a:prstDash val="solid"/>
+          </a:ln>
+        </p:spPr>
+        <p:txBody>
+          <a:bodyPr/>
+          <a:p/>
+        </p:txBody>
+      </p:sp>
+      <p:sp>
+        <p:nvSpPr>
+          <p:cNvPr id="5" name="Text 3"/>
+          <p:cNvSpPr txBox="1"/>
+          <p:nvPr/>
+        </p:nvSpPr>
+        <p:spPr>
+          <a:xfrm>
+            <a:off x="868680" y="2103120"/>
+            <a:ext cx="10454335" cy="400000"/>
+          </a:xfrm>
+          <a:prstGeom prst="rect">
+            <a:avLst/>
+          </a:prstGeom>
+          <a:noFill/>
+          <a:ln/>
+        </p:spPr>
+        <p:txBody>
+          <a:bodyPr wrap="square" lIns="0" tIns="0" rIns="0" bIns="0" rtlCol="0" anchor="ctr"/>
+          <a:lstStyle/>
+          <a:p>
+            <a:pPr indent="0" marL="0">
+              <a:buNone/>
+            </a:pPr>
+            <a:r>
+              <a:rPr lang="en-US" sz="1800" b="1" spc="200" kern="0" dirty="0">
+                <a:solidFill>
+                  <a:srgbClr val="8A3A12"/>
+                </a:solidFill>
+                <a:latin typeface="Calibri" pitchFamily="34" charset="0"/>
+                <a:ea typeface="Calibri" pitchFamily="34" charset="-122"/>
+                <a:cs typeface="Calibri" pitchFamily="34" charset="-120"/>
+              </a:rPr>
+              <a:t>WARNING</a:t>
+            </a:r>
+            <a:endParaRPr lang="en-US" sz="1800" dirty="0"/>
+          </a:p>
+        </p:txBody>
+      </p:sp>
+      <p:sp>
+        <p:nvSpPr>
+          <p:cNvPr id="6" name="Text 4"/>
+          <p:cNvSpPr txBox="1"/>
+          <p:nvPr/>
+        </p:nvSpPr>
+        <p:spPr>
+          <a:xfrm>
+            <a:off x="868680" y="2795960"/>
+            <a:ext cx="10454335" cy="2800000"/>
+          </a:xfrm>
+          <a:prstGeom prst="rect">
+            <a:avLst/>
+          </a:prstGeom>
+          <a:noFill/>
+          <a:ln/>
+        </p:spPr>
+        <p:txBody>
+          <a:bodyPr wrap="square" lIns="0" tIns="0" rIns="0" bIns="0" rtlCol="0" anchor="ctr"/>
+          <a:lstStyle/>
+          <a:p>
+            <a:pPr indent="0" marL="0">
+              <a:buNone/>
+            </a:pPr>
+            <a:r>
+              <a:rPr lang="en-US" sz="2800" dirty="0">
+                <a:solidFill>
+                  <a:srgbClr val="26262F"/>
+                </a:solidFill>
+                <a:latin typeface="Calibri" pitchFamily="34" charset="0"/>
+                <a:ea typeface="Calibri" pitchFamily="34" charset="-122"/>
+                <a:cs typeface="Calibri" pitchFamily="34" charset="-120"/>
+              </a:rPr>
+              <a:t>Any data arriving at your server could have come from anywhere -- your own form, a modified copy of it, or a request built by hand with no browser involved at all. Client-side validation is a courtesy for UX. Server-side validation, re-checking the exact same rules independently, is what actually protects your data.</a:t>
+            </a:r>
+            <a:endParaRPr lang="en-US" sz="2800" dirty="0"/>
+          </a:p>
+        </p:txBody>
+      </p:sp>
+      <p:sp>
+        <p:nvSpPr>
+          <p:cNvPr id="9" name="cuinotes-footer-mark"/>
+          <p:cNvSpPr txBox="1"/>
+          <p:nvPr/>
+        </p:nvSpPr>
+        <p:spPr>
+          <a:xfrm>
+            <a:off x="9951720" y="6455664"/>
+            <a:ext cx="2011680" cy="292608"/>
+          </a:xfrm>
+          <a:prstGeom prst="rect">
+            <a:avLst/>
+          </a:prstGeom>
+          <a:noFill/>
+        </p:spPr>
+        <p:txBody>
+          <a:bodyPr wrap="none" lIns="0" rIns="0" tIns="0" bIns="0">
+            <a:spAutoFit/>
+          </a:bodyPr>
+          <a:lstStyle/>
+          <a:p>
+            <a:pPr algn="r"/>
+            <a:r>
+              <a:rPr sz="1000">
+                <a:solidFill>
+                  <a:srgbClr val="8A939B"/>
+                </a:solidFill>
+                <a:hlinkClick r:id="rId3"/>
+              </a:rPr>
+              <a:t>cuinotes.com</a:t>
+            </a:r>
+            <a:r>
+              <a:rPr sz="1000">
+                <a:solidFill>
+                  <a:srgbClr val="8A939B"/>
+                </a:solidFill>
+              </a:rPr>
+              <a:t>  ·  18</a:t>
+            </a:r>
+          </a:p>
+        </p:txBody>
+      </p:sp>
+    </p:spTree>
+  </p:cSld>
+  <p:clrMapOvr>
+    <a:masterClrMapping/>
+  </p:clrMapOvr>
+</p:sld>
+</file>
+
+<file path=ppt/slides/slide27.xml><?xml version="1.0" encoding="utf-8"?>
+<p:sld xmlns:a="http://schemas.openxmlformats.org/drawingml/2006/main" xmlns:r="http://schemas.openxmlformats.org/officeDocument/2006/relationships" xmlns:p="http://schemas.openxmlformats.org/presentationml/2006/main">
+  <p:cSld name="Slide 17">
+    <p:bg>
+      <p:bgPr>
+        <a:solidFill>
+          <a:srgbClr val="FFFFFF"/>
+        </a:solidFill>
+      </p:bgPr>
+    </p:bg>
+    <p:spTree>
+      <p:nvGrpSpPr>
+        <p:cNvPr id="1" name=""/>
+        <p:cNvGrpSpPr/>
+        <p:nvPr/>
+      </p:nvGrpSpPr>
+      <p:grpSpPr>
+        <a:xfrm>
+          <a:off x="0" y="0"/>
+          <a:ext cx="0" cy="0"/>
+          <a:chOff x="0" y="0"/>
+          <a:chExt cx="0" cy="0"/>
+        </a:xfrm>
+      </p:grpSpPr>
+      <p:sp>
+        <p:nvSpPr>
+          <p:cNvPr id="2" name="Text 0"/>
+          <p:cNvSpPr txBox="1"/>
+          <p:nvPr/>
+        </p:nvSpPr>
+        <p:spPr>
+          <a:xfrm>
+            <a:off x="640080" y="457200"/>
+            <a:ext cx="10058400" cy="365760"/>
+          </a:xfrm>
+          <a:prstGeom prst="rect">
+            <a:avLst/>
+          </a:prstGeom>
+          <a:noFill/>
+          <a:ln/>
+        </p:spPr>
+        <p:txBody>
+          <a:bodyPr wrap="square" lIns="0" tIns="0" rIns="0" bIns="0" rtlCol="0" anchor="ctr"/>
+          <a:lstStyle/>
+          <a:p>
+            <a:pPr algn="l" indent="0" marL="0">
+              <a:buNone/>
+            </a:pPr>
+            <a:r>
+              <a:rPr lang="en-US" sz="1300" b="1" spc="300" kern="0" dirty="0">
+                <a:solidFill>
+                  <a:srgbClr val="FF8A3D"/>
+                </a:solidFill>
+                <a:latin typeface="Calibri" pitchFamily="34" charset="0"/>
+                <a:ea typeface="Calibri" pitchFamily="34" charset="-122"/>
+                <a:cs typeface="Calibri" pitchFamily="34" charset="-120"/>
+              </a:rPr>
+              <a:t>VALIDATION WITH JOI</a:t>
+            </a:r>
+            <a:endParaRPr lang="en-US" sz="1300" dirty="0"/>
+          </a:p>
+        </p:txBody>
+      </p:sp>
+      <p:sp>
+        <p:nvSpPr>
+          <p:cNvPr id="3" name="Text 1"/>
+          <p:cNvSpPr txBox="1"/>
+          <p:nvPr/>
+        </p:nvSpPr>
+        <p:spPr>
+          <a:xfrm>
+            <a:off x="640080" y="841248"/>
+            <a:ext cx="10881360" cy="914400"/>
+          </a:xfrm>
+          <a:prstGeom prst="rect">
+            <a:avLst/>
+          </a:prstGeom>
+          <a:noFill/>
+          <a:ln/>
+        </p:spPr>
+        <p:txBody>
+          <a:bodyPr wrap="square" lIns="0" tIns="0" rIns="0" bIns="0" rtlCol="0" anchor="ctr"/>
+          <a:lstStyle/>
+          <a:p>
+            <a:pPr algn="l" indent="0" marL="0">
+              <a:buNone/>
+            </a:pPr>
+            <a:r>
+              <a:rPr lang="en-US" sz="3400" b="1" dirty="0">
+                <a:solidFill>
+                  <a:srgbClr val="2B2B7A"/>
+                </a:solidFill>
+                <a:latin typeface="Cambria" pitchFamily="34" charset="0"/>
+                <a:ea typeface="Cambria" pitchFamily="34" charset="-122"/>
+                <a:cs typeface="Cambria" pitchFamily="34" charset="-120"/>
+              </a:rPr>
+              <a:t>Schema Validation with Joi</a:t>
+            </a:r>
+            <a:endParaRPr lang="en-US" sz="3400" dirty="0"/>
+          </a:p>
+        </p:txBody>
+      </p:sp>
+      <p:sp>
+        <p:nvSpPr>
+          <p:cNvPr id="4" name="Shape 2"/>
+          <p:cNvSpPr/>
+          <p:nvPr/>
+        </p:nvSpPr>
+        <p:spPr>
+          <a:xfrm>
+            <a:off x="640080" y="1965960"/>
+            <a:ext cx="10911535" cy="2682240"/>
+          </a:xfrm>
+          <a:prstGeom prst="roundRect">
+            <a:avLst>
+              <a:gd name="adj" fmla="val 2727"/>
+            </a:avLst>
+          </a:prstGeom>
+          <a:solidFill>
+            <a:srgbClr val="F7F8F9"/>
+          </a:solidFill>
+          <a:ln w="9525">
+            <a:solidFill>
+              <a:srgbClr val="D0D5DD"/>
+            </a:solidFill>
+          </a:ln>
+        </p:spPr>
+        <p:txBody>
+          <a:bodyPr/>
+          <a:p/>
+        </p:txBody>
+      </p:sp>
+      <p:sp>
+        <p:nvSpPr>
+          <p:cNvPr id="5" name="Text 3"/>
+          <p:cNvSpPr txBox="1"/>
+          <p:nvPr/>
+        </p:nvSpPr>
+        <p:spPr>
+          <a:xfrm>
+            <a:off x="960120" y="2194560"/>
+            <a:ext cx="10271455" cy="2225040"/>
+          </a:xfrm>
+          <a:prstGeom prst="rect">
+            <a:avLst/>
+          </a:prstGeom>
+          <a:noFill/>
+          <a:ln/>
+        </p:spPr>
+        <p:txBody>
+          <a:bodyPr wrap="square" lIns="0" tIns="0" rIns="0" bIns="0" rtlCol="0" anchor="t"/>
+          <a:lstStyle/>
+          <a:p>
+            <a:pPr indent="0" marL="0">
+              <a:lnSpc>
+                <a:spcPct val="125000"/>
+              </a:lnSpc>
+              <a:buNone/>
+            </a:pPr>
+            <a:r>
+              <a:rPr lang="en-US" sz="1400" dirty="0">
+                <a:solidFill>
+                  <a:srgbClr val="1F2429"/>
+                </a:solidFill>
+                <a:latin typeface="Courier New" pitchFamily="34" charset="0"/>
+                <a:ea typeface="Courier New" pitchFamily="34" charset="-122"/>
+                <a:cs typeface="Courier New" pitchFamily="34" charset="-120"/>
+              </a:rPr>
+              <a:t>const Joi = require("joi");</a:t>
+            </a:r>
+            <a:endParaRPr lang="en-US" sz="1400" dirty="0"/>
+          </a:p>
+          <a:p>
+            <a:pPr indent="0" marL="0">
+              <a:lnSpc>
+                <a:spcPct val="125000"/>
+              </a:lnSpc>
+              <a:buNone/>
+            </a:pPr>
+            <a:endParaRPr lang="en-US" sz="1400" dirty="0"/>
+          </a:p>
+          <a:p>
+            <a:pPr indent="0" marL="0">
+              <a:lnSpc>
+                <a:spcPct val="125000"/>
+              </a:lnSpc>
+              <a:buNone/>
+            </a:pPr>
+            <a:r>
+              <a:rPr lang="en-US" sz="1400" dirty="0">
+                <a:solidFill>
+                  <a:srgbClr val="1F2429"/>
+                </a:solidFill>
+                <a:latin typeface="Courier New" pitchFamily="34" charset="0"/>
+                <a:ea typeface="Courier New" pitchFamily="34" charset="-122"/>
+                <a:cs typeface="Courier New" pitchFamily="34" charset="-120"/>
+              </a:rPr>
+              <a:t>const schema = Joi.object({</a:t>
+            </a:r>
+            <a:endParaRPr lang="en-US" sz="1400" dirty="0"/>
+          </a:p>
+          <a:p>
+            <a:pPr indent="0" marL="0">
+              <a:lnSpc>
+                <a:spcPct val="125000"/>
+              </a:lnSpc>
+              <a:buNone/>
+            </a:pPr>
+            <a:r>
+              <a:rPr lang="en-US" sz="1400" dirty="0">
+                <a:solidFill>
+                  <a:srgbClr val="1F2429"/>
+                </a:solidFill>
+                <a:latin typeface="Courier New" pitchFamily="34" charset="0"/>
+                <a:ea typeface="Courier New" pitchFamily="34" charset="-122"/>
+                <a:cs typeface="Courier New" pitchFamily="34" charset="-120"/>
+              </a:rPr>
+              <a:t>  name: Joi.string().required(),</a:t>
+            </a:r>
+            <a:endParaRPr lang="en-US" sz="1400" dirty="0"/>
+          </a:p>
+          <a:p>
+            <a:pPr indent="0" marL="0">
+              <a:lnSpc>
+                <a:spcPct val="125000"/>
+              </a:lnSpc>
+              <a:buNone/>
+            </a:pPr>
+            <a:r>
+              <a:rPr lang="en-US" sz="1400" dirty="0">
+                <a:solidFill>
+                  <a:srgbClr val="1F2429"/>
+                </a:solidFill>
+                <a:latin typeface="Courier New" pitchFamily="34" charset="0"/>
+                <a:ea typeface="Courier New" pitchFamily="34" charset="-122"/>
+                <a:cs typeface="Courier New" pitchFamily="34" charset="-120"/>
+              </a:rPr>
+              <a:t>  email: Joi.string().email().required(),</a:t>
+            </a:r>
+            <a:endParaRPr lang="en-US" sz="1400" dirty="0"/>
+          </a:p>
+          <a:p>
+            <a:pPr indent="0" marL="0">
+              <a:lnSpc>
+                <a:spcPct val="125000"/>
+              </a:lnSpc>
+              <a:buNone/>
+            </a:pPr>
+            <a:r>
+              <a:rPr lang="en-US" sz="1400" dirty="0">
+                <a:solidFill>
+                  <a:srgbClr val="1F2429"/>
+                </a:solidFill>
+                <a:latin typeface="Courier New" pitchFamily="34" charset="0"/>
+                <a:ea typeface="Courier New" pitchFamily="34" charset="-122"/>
+                <a:cs typeface="Courier New" pitchFamily="34" charset="-120"/>
+              </a:rPr>
+              <a:t>  password: Joi.string().min(8).required(),</a:t>
+            </a:r>
+            <a:endParaRPr lang="en-US" sz="1400" dirty="0"/>
+          </a:p>
+          <a:p>
+            <a:pPr indent="0" marL="0">
+              <a:lnSpc>
+                <a:spcPct val="125000"/>
+              </a:lnSpc>
+              <a:buNone/>
+            </a:pPr>
+            <a:r>
+              <a:rPr lang="en-US" sz="1400" dirty="0">
+                <a:solidFill>
+                  <a:srgbClr val="1F2429"/>
+                </a:solidFill>
+                <a:latin typeface="Courier New" pitchFamily="34" charset="0"/>
+                <a:ea typeface="Courier New" pitchFamily="34" charset="-122"/>
+                <a:cs typeface="Courier New" pitchFamily="34" charset="-120"/>
+              </a:rPr>
+              <a:t>});</a:t>
+            </a:r>
+            <a:endParaRPr lang="en-US" sz="1400" dirty="0"/>
+          </a:p>
+        </p:txBody>
+      </p:sp>
+      <p:sp>
+        <p:nvSpPr>
+          <p:cNvPr id="6" name="Text 4"/>
+          <p:cNvSpPr txBox="1"/>
+          <p:nvPr/>
+        </p:nvSpPr>
+        <p:spPr>
+          <a:xfrm>
+            <a:off x="640080" y="4876800"/>
+            <a:ext cx="10911535" cy="1386840"/>
+          </a:xfrm>
+          <a:prstGeom prst="rect">
+            <a:avLst/>
+          </a:prstGeom>
+          <a:noFill/>
+          <a:ln/>
+        </p:spPr>
+        <p:txBody>
+          <a:bodyPr wrap="square" lIns="0" tIns="0" rIns="0" bIns="0" rtlCol="0" anchor="t"/>
+          <a:lstStyle/>
+          <a:p>
+            <a:pPr indent="0" marL="0">
+              <a:buNone/>
+            </a:pPr>
+            <a:r>
+              <a:rPr lang="en-US" sz="1300" dirty="0">
+                <a:solidFill>
+                  <a:srgbClr val="26262F"/>
+                </a:solidFill>
+                <a:latin typeface="Calibri" pitchFamily="34" charset="0"/>
+                <a:ea typeface="Calibri" pitchFamily="34" charset="-122"/>
+                <a:cs typeface="Calibri" pitchFamily="34" charset="-120"/>
+              </a:rPr>
+              <a:t>Joi (npm install joi) lets you describe a valid object as a schema, declaratively -- instead of hand-writing if statements and regex for every field.</a:t>
+            </a:r>
+            <a:endParaRPr lang="en-US" sz="1300" dirty="0"/>
+          </a:p>
+        </p:txBody>
+      </p:sp>
+      <p:sp>
+        <p:nvSpPr>
+          <p:cNvPr id="9" name="cuinotes-footer-mark"/>
+          <p:cNvSpPr txBox="1"/>
+          <p:nvPr/>
+        </p:nvSpPr>
+        <p:spPr>
+          <a:xfrm>
+            <a:off x="9951720" y="6455664"/>
+            <a:ext cx="2011680" cy="292608"/>
+          </a:xfrm>
+          <a:prstGeom prst="rect">
+            <a:avLst/>
+          </a:prstGeom>
+          <a:noFill/>
+        </p:spPr>
+        <p:txBody>
+          <a:bodyPr wrap="none" lIns="0" rIns="0" tIns="0" bIns="0">
+            <a:spAutoFit/>
+          </a:bodyPr>
+          <a:lstStyle/>
+          <a:p>
+            <a:pPr algn="r"/>
+            <a:r>
+              <a:rPr sz="1000">
+                <a:solidFill>
+                  <a:srgbClr val="8A939B"/>
+                </a:solidFill>
+                <a:hlinkClick r:id="rId3"/>
+              </a:rPr>
+              <a:t>cuinotes.com</a:t>
+            </a:r>
+            <a:r>
+              <a:rPr sz="1000">
+                <a:solidFill>
+                  <a:srgbClr val="8A939B"/>
+                </a:solidFill>
+              </a:rPr>
+              <a:t>  ·  19</a:t>
+            </a:r>
+          </a:p>
+        </p:txBody>
+      </p:sp>
+    </p:spTree>
+  </p:cSld>
+  <p:clrMapOvr>
+    <a:masterClrMapping/>
+  </p:clrMapOvr>
+</p:sld>
+</file>
+
+<file path=ppt/slides/slide28.xml><?xml version="1.0" encoding="utf-8"?>
+<p:sld xmlns:a="http://schemas.openxmlformats.org/drawingml/2006/main" xmlns:r="http://schemas.openxmlformats.org/officeDocument/2006/relationships" xmlns:p="http://schemas.openxmlformats.org/presentationml/2006/main">
+  <p:cSld name="Slide 18">
+    <p:bg>
+      <p:bgPr>
+        <a:solidFill>
+          <a:srgbClr val="FFFFFF"/>
+        </a:solidFill>
+      </p:bgPr>
+    </p:bg>
+    <p:spTree>
+      <p:nvGrpSpPr>
+        <p:cNvPr id="1" name=""/>
+        <p:cNvGrpSpPr/>
+        <p:nvPr/>
+      </p:nvGrpSpPr>
+      <p:grpSpPr>
+        <a:xfrm>
+          <a:off x="0" y="0"/>
+          <a:ext cx="0" cy="0"/>
+          <a:chOff x="0" y="0"/>
+          <a:chExt cx="0" cy="0"/>
+        </a:xfrm>
+      </p:grpSpPr>
+      <p:sp>
+        <p:nvSpPr>
+          <p:cNvPr id="2" name="Text 0"/>
+          <p:cNvSpPr txBox="1"/>
+          <p:nvPr/>
+        </p:nvSpPr>
+        <p:spPr>
+          <a:xfrm>
+            <a:off x="640080" y="457200"/>
+            <a:ext cx="10058400" cy="365760"/>
+          </a:xfrm>
+          <a:prstGeom prst="rect">
+            <a:avLst/>
+          </a:prstGeom>
+          <a:noFill/>
+          <a:ln/>
+        </p:spPr>
+        <p:txBody>
+          <a:bodyPr wrap="square" lIns="0" tIns="0" rIns="0" bIns="0" rtlCol="0" anchor="ctr"/>
+          <a:lstStyle/>
+          <a:p>
+            <a:pPr algn="l" indent="0" marL="0">
+              <a:buNone/>
+            </a:pPr>
+            <a:r>
+              <a:rPr lang="en-US" sz="1300" b="1" spc="300" kern="0" dirty="0">
+                <a:solidFill>
+                  <a:srgbClr val="FF8A3D"/>
+                </a:solidFill>
+                <a:latin typeface="Calibri" pitchFamily="34" charset="0"/>
+                <a:ea typeface="Calibri" pitchFamily="34" charset="-122"/>
+                <a:cs typeface="Calibri" pitchFamily="34" charset="-120"/>
+              </a:rPr>
+              <a:t>VALIDATION WITH JOI</a:t>
+            </a:r>
+            <a:endParaRPr lang="en-US" sz="1300" dirty="0"/>
+          </a:p>
+        </p:txBody>
+      </p:sp>
+      <p:sp>
+        <p:nvSpPr>
+          <p:cNvPr id="3" name="Text 1"/>
+          <p:cNvSpPr txBox="1"/>
+          <p:nvPr/>
+        </p:nvSpPr>
+        <p:spPr>
+          <a:xfrm>
+            <a:off x="640080" y="841248"/>
+            <a:ext cx="10881360" cy="914400"/>
+          </a:xfrm>
+          <a:prstGeom prst="rect">
+            <a:avLst/>
+          </a:prstGeom>
+          <a:noFill/>
+          <a:ln/>
+        </p:spPr>
+        <p:txBody>
+          <a:bodyPr wrap="square" lIns="0" tIns="0" rIns="0" bIns="0" rtlCol="0" anchor="ctr"/>
+          <a:lstStyle/>
+          <a:p>
+            <a:pPr algn="l" indent="0" marL="0">
+              <a:buNone/>
+            </a:pPr>
+            <a:r>
+              <a:rPr lang="en-US" sz="3400" b="1" dirty="0">
+                <a:solidFill>
+                  <a:srgbClr val="2B2B7A"/>
+                </a:solidFill>
+                <a:latin typeface="Cambria" pitchFamily="34" charset="0"/>
+                <a:ea typeface="Cambria" pitchFamily="34" charset="-122"/>
+                <a:cs typeface="Cambria" pitchFamily="34" charset="-120"/>
+              </a:rPr>
+              <a:t>Why Use Joi Instead of Writing It All by Hand</a:t>
+            </a:r>
+            <a:endParaRPr lang="en-US" sz="3400" dirty="0"/>
+          </a:p>
+        </p:txBody>
+      </p:sp>
+      <p:sp>
+        <p:nvSpPr>
+          <p:cNvPr id="4" name="Shape 2"/>
+          <p:cNvSpPr/>
+          <p:nvPr/>
+        </p:nvSpPr>
+        <p:spPr>
+          <a:xfrm>
+            <a:off x="685800" y="1965960"/>
+            <a:ext cx="457200" cy="457200"/>
+          </a:xfrm>
+          <a:prstGeom prst="ellipse">
+            <a:avLst/>
+          </a:prstGeom>
+          <a:solidFill>
+            <a:srgbClr val="FF8A3D"/>
+          </a:solidFill>
+          <a:ln/>
+        </p:spPr>
+        <p:txBody>
+          <a:bodyPr/>
+          <a:p/>
+        </p:txBody>
+      </p:sp>
+      <p:sp>
+        <p:nvSpPr>
+          <p:cNvPr id="5" name="Text 3"/>
+          <p:cNvSpPr txBox="1"/>
+          <p:nvPr/>
+        </p:nvSpPr>
+        <p:spPr>
+          <a:xfrm>
+            <a:off x="685800" y="1965960"/>
+            <a:ext cx="457200" cy="457200"/>
+          </a:xfrm>
+          <a:prstGeom prst="rect">
+            <a:avLst/>
+          </a:prstGeom>
+          <a:noFill/>
+          <a:ln/>
+        </p:spPr>
+        <p:txBody>
+          <a:bodyPr wrap="square" lIns="0" tIns="0" rIns="0" bIns="0" rtlCol="0" anchor="ctr"/>
+          <a:lstStyle/>
+          <a:p>
+            <a:pPr algn="ctr" indent="0" marL="0">
+              <a:buNone/>
+            </a:pPr>
+            <a:r>
+              <a:rPr lang="en-US" sz="1500" b="1" dirty="0">
+                <a:solidFill>
+                  <a:srgbClr val="FFFFFF"/>
+                </a:solidFill>
+                <a:latin typeface="Calibri" pitchFamily="34" charset="0"/>
+                <a:ea typeface="Calibri" pitchFamily="34" charset="-122"/>
+                <a:cs typeface="Calibri" pitchFamily="34" charset="-120"/>
+              </a:rPr>
+              <a:t>1</a:t>
+            </a:r>
+            <a:endParaRPr lang="en-US" sz="1500" dirty="0"/>
+          </a:p>
+        </p:txBody>
+      </p:sp>
+      <p:sp>
+        <p:nvSpPr>
+          <p:cNvPr id="6" name="Text 4"/>
+          <p:cNvSpPr txBox="1"/>
+          <p:nvPr/>
+        </p:nvSpPr>
+        <p:spPr>
+          <a:xfrm>
+            <a:off x="1371600" y="1892808"/>
+            <a:ext cx="10180015" cy="640080"/>
+          </a:xfrm>
+          <a:prstGeom prst="rect">
+            <a:avLst/>
+          </a:prstGeom>
+          <a:noFill/>
+          <a:ln/>
+        </p:spPr>
+        <p:txBody>
+          <a:bodyPr wrap="square" lIns="0" tIns="0" rIns="0" bIns="0" rtlCol="0" anchor="ctr"/>
+          <a:lstStyle/>
+          <a:p>
+            <a:pPr indent="0" marL="0">
+              <a:buNone/>
+            </a:pPr>
+            <a:r>
+              <a:rPr lang="en-US" sz="1500" dirty="0">
+                <a:solidFill>
+                  <a:srgbClr val="26262F"/>
+                </a:solidFill>
+                <a:latin typeface="Calibri" pitchFamily="34" charset="0"/>
+                <a:ea typeface="Calibri" pitchFamily="34" charset="-122"/>
+                <a:cs typeface="Calibri" pitchFamily="34" charset="-120"/>
+              </a:rPr>
+              <a:t>Readability -- Joi.string().email().required() says exactly what it checks, at a glance</a:t>
+            </a:r>
+            <a:endParaRPr lang="en-US" sz="1500" dirty="0"/>
+          </a:p>
+        </p:txBody>
+      </p:sp>
+      <p:sp>
+        <p:nvSpPr>
+          <p:cNvPr id="7" name="Shape 5"/>
+          <p:cNvSpPr/>
+          <p:nvPr/>
+        </p:nvSpPr>
+        <p:spPr>
+          <a:xfrm>
+            <a:off x="685800" y="2788920"/>
+            <a:ext cx="457200" cy="457200"/>
+          </a:xfrm>
+          <a:prstGeom prst="ellipse">
+            <a:avLst/>
+          </a:prstGeom>
+          <a:solidFill>
+            <a:srgbClr val="FF8A3D"/>
+          </a:solidFill>
+          <a:ln/>
+        </p:spPr>
+        <p:txBody>
+          <a:bodyPr/>
+          <a:p/>
+        </p:txBody>
+      </p:sp>
+      <p:sp>
+        <p:nvSpPr>
+          <p:cNvPr id="8" name="Text 6"/>
+          <p:cNvSpPr txBox="1"/>
+          <p:nvPr/>
+        </p:nvSpPr>
+        <p:spPr>
+          <a:xfrm>
+            <a:off x="685800" y="2788920"/>
+            <a:ext cx="457200" cy="457200"/>
+          </a:xfrm>
+          <a:prstGeom prst="rect">
+            <a:avLst/>
+          </a:prstGeom>
+          <a:noFill/>
+          <a:ln/>
+        </p:spPr>
+        <p:txBody>
+          <a:bodyPr wrap="square" lIns="0" tIns="0" rIns="0" bIns="0" rtlCol="0" anchor="ctr"/>
+          <a:lstStyle/>
+          <a:p>
+            <a:pPr algn="ctr" indent="0" marL="0">
+              <a:buNone/>
+            </a:pPr>
+            <a:r>
+              <a:rPr lang="en-US" sz="1500" b="1" dirty="0">
+                <a:solidFill>
+                  <a:srgbClr val="FFFFFF"/>
+                </a:solidFill>
+                <a:latin typeface="Calibri" pitchFamily="34" charset="0"/>
+                <a:ea typeface="Calibri" pitchFamily="34" charset="-122"/>
+                <a:cs typeface="Calibri" pitchFamily="34" charset="-120"/>
+              </a:rPr>
+              <a:t>2</a:t>
+            </a:r>
+            <a:endParaRPr lang="en-US" sz="1500" dirty="0"/>
+          </a:p>
+        </p:txBody>
+      </p:sp>
+      <p:sp>
+        <p:nvSpPr>
+          <p:cNvPr id="9" name="Text 7"/>
+          <p:cNvSpPr txBox="1"/>
+          <p:nvPr/>
+        </p:nvSpPr>
+        <p:spPr>
+          <a:xfrm>
+            <a:off x="1371600" y="2715768"/>
+            <a:ext cx="10180015" cy="640080"/>
+          </a:xfrm>
+          <a:prstGeom prst="rect">
+            <a:avLst/>
+          </a:prstGeom>
+          <a:noFill/>
+          <a:ln/>
+        </p:spPr>
+        <p:txBody>
+          <a:bodyPr wrap="square" lIns="0" tIns="0" rIns="0" bIns="0" rtlCol="0" anchor="ctr"/>
+          <a:lstStyle/>
+          <a:p>
+            <a:pPr indent="0" marL="0">
+              <a:buNone/>
+            </a:pPr>
+            <a:r>
+              <a:rPr lang="en-US" sz="1500" dirty="0">
+                <a:solidFill>
+                  <a:srgbClr val="26262F"/>
+                </a:solidFill>
+                <a:latin typeface="Calibri" pitchFamily="34" charset="0"/>
+                <a:ea typeface="Calibri" pitchFamily="34" charset="-122"/>
+                <a:cs typeface="Calibri" pitchFamily="34" charset="-120"/>
+              </a:rPr>
+              <a:t>One schema, one source of truth -- the same schema validates a form, an API body, and a seed script</a:t>
+            </a:r>
+            <a:endParaRPr lang="en-US" sz="1500" dirty="0"/>
+          </a:p>
+        </p:txBody>
+      </p:sp>
+      <p:sp>
+        <p:nvSpPr>
+          <p:cNvPr id="10" name="Shape 8"/>
+          <p:cNvSpPr/>
+          <p:nvPr/>
+        </p:nvSpPr>
+        <p:spPr>
+          <a:xfrm>
+            <a:off x="685800" y="3611880"/>
+            <a:ext cx="457200" cy="457200"/>
+          </a:xfrm>
+          <a:prstGeom prst="ellipse">
+            <a:avLst/>
+          </a:prstGeom>
+          <a:solidFill>
+            <a:srgbClr val="FF8A3D"/>
+          </a:solidFill>
+          <a:ln/>
+        </p:spPr>
+        <p:txBody>
+          <a:bodyPr/>
+          <a:p/>
+        </p:txBody>
+      </p:sp>
+      <p:sp>
+        <p:nvSpPr>
+          <p:cNvPr id="11" name="Text 9"/>
+          <p:cNvSpPr txBox="1"/>
+          <p:nvPr/>
+        </p:nvSpPr>
+        <p:spPr>
+          <a:xfrm>
+            <a:off x="685800" y="3611880"/>
+            <a:ext cx="457200" cy="457200"/>
+          </a:xfrm>
+          <a:prstGeom prst="rect">
+            <a:avLst/>
+          </a:prstGeom>
+          <a:noFill/>
+          <a:ln/>
+        </p:spPr>
+        <p:txBody>
+          <a:bodyPr wrap="square" lIns="0" tIns="0" rIns="0" bIns="0" rtlCol="0" anchor="ctr"/>
+          <a:lstStyle/>
+          <a:p>
+            <a:pPr algn="ctr" indent="0" marL="0">
+              <a:buNone/>
+            </a:pPr>
+            <a:r>
+              <a:rPr lang="en-US" sz="1500" b="1" dirty="0">
+                <a:solidFill>
+                  <a:srgbClr val="FFFFFF"/>
+                </a:solidFill>
+                <a:latin typeface="Calibri" pitchFamily="34" charset="0"/>
+                <a:ea typeface="Calibri" pitchFamily="34" charset="-122"/>
+                <a:cs typeface="Calibri" pitchFamily="34" charset="-120"/>
+              </a:rPr>
+              <a:t>3</a:t>
+            </a:r>
+            <a:endParaRPr lang="en-US" sz="1500" dirty="0"/>
+          </a:p>
+        </p:txBody>
+      </p:sp>
+      <p:sp>
+        <p:nvSpPr>
+          <p:cNvPr id="12" name="Text 10"/>
+          <p:cNvSpPr txBox="1"/>
+          <p:nvPr/>
+        </p:nvSpPr>
+        <p:spPr>
+          <a:xfrm>
+            <a:off x="1371600" y="3538728"/>
+            <a:ext cx="10180015" cy="640080"/>
+          </a:xfrm>
+          <a:prstGeom prst="rect">
+            <a:avLst/>
+          </a:prstGeom>
+          <a:noFill/>
+          <a:ln/>
+        </p:spPr>
+        <p:txBody>
+          <a:bodyPr wrap="square" lIns="0" tIns="0" rIns="0" bIns="0" rtlCol="0" anchor="ctr"/>
+          <a:lstStyle/>
+          <a:p>
+            <a:pPr indent="0" marL="0">
+              <a:buNone/>
+            </a:pPr>
+            <a:r>
+              <a:rPr lang="en-US" sz="1500" dirty="0">
+                <a:solidFill>
+                  <a:srgbClr val="26262F"/>
+                </a:solidFill>
+                <a:latin typeface="Calibri" pitchFamily="34" charset="0"/>
+                <a:ea typeface="Calibri" pitchFamily="34" charset="-122"/>
+                <a:cs typeface="Calibri" pitchFamily="34" charset="-120"/>
+              </a:rPr>
+              <a:t>Built-in validators like .email(), .min()/.max(), and .integer() -- no regex to write or test</a:t>
+            </a:r>
+            <a:endParaRPr lang="en-US" sz="1500" dirty="0"/>
+          </a:p>
+        </p:txBody>
+      </p:sp>
+      <p:sp>
+        <p:nvSpPr>
+          <p:cNvPr id="13" name="Shape 11"/>
+          <p:cNvSpPr/>
+          <p:nvPr/>
+        </p:nvSpPr>
+        <p:spPr>
+          <a:xfrm>
+            <a:off x="685800" y="4434840"/>
+            <a:ext cx="457200" cy="457200"/>
+          </a:xfrm>
+          <a:prstGeom prst="ellipse">
+            <a:avLst/>
+          </a:prstGeom>
+          <a:solidFill>
+            <a:srgbClr val="FF8A3D"/>
+          </a:solidFill>
+          <a:ln/>
+        </p:spPr>
+        <p:txBody>
+          <a:bodyPr/>
+          <a:p/>
+        </p:txBody>
+      </p:sp>
+      <p:sp>
+        <p:nvSpPr>
+          <p:cNvPr id="14" name="Text 12"/>
+          <p:cNvSpPr txBox="1"/>
+          <p:nvPr/>
+        </p:nvSpPr>
+        <p:spPr>
+          <a:xfrm>
+            <a:off x="685800" y="4434840"/>
+            <a:ext cx="457200" cy="457200"/>
+          </a:xfrm>
+          <a:prstGeom prst="rect">
+            <a:avLst/>
+          </a:prstGeom>
+          <a:noFill/>
+          <a:ln/>
+        </p:spPr>
+        <p:txBody>
+          <a:bodyPr wrap="square" lIns="0" tIns="0" rIns="0" bIns="0" rtlCol="0" anchor="ctr"/>
+          <a:lstStyle/>
+          <a:p>
+            <a:pPr algn="ctr" indent="0" marL="0">
+              <a:buNone/>
+            </a:pPr>
+            <a:r>
+              <a:rPr lang="en-US" sz="1500" b="1" dirty="0">
+                <a:solidFill>
+                  <a:srgbClr val="FFFFFF"/>
+                </a:solidFill>
+                <a:latin typeface="Calibri" pitchFamily="34" charset="0"/>
+                <a:ea typeface="Calibri" pitchFamily="34" charset="-122"/>
+                <a:cs typeface="Calibri" pitchFamily="34" charset="-120"/>
+              </a:rPr>
+              <a:t>4</a:t>
+            </a:r>
+            <a:endParaRPr lang="en-US" sz="1500" dirty="0"/>
+          </a:p>
+        </p:txBody>
+      </p:sp>
+      <p:sp>
+        <p:nvSpPr>
+          <p:cNvPr id="15" name="Text 13"/>
+          <p:cNvSpPr txBox="1"/>
+          <p:nvPr/>
+        </p:nvSpPr>
+        <p:spPr>
+          <a:xfrm>
+            <a:off x="1371600" y="4361688"/>
+            <a:ext cx="10180015" cy="640080"/>
+          </a:xfrm>
+          <a:prstGeom prst="rect">
+            <a:avLst/>
+          </a:prstGeom>
+          <a:noFill/>
+          <a:ln/>
+        </p:spPr>
+        <p:txBody>
+          <a:bodyPr wrap="square" lIns="0" tIns="0" rIns="0" bIns="0" rtlCol="0" anchor="ctr"/>
+          <a:lstStyle/>
+          <a:p>
+            <a:pPr indent="0" marL="0">
+              <a:buNone/>
+            </a:pPr>
+            <a:r>
+              <a:rPr lang="en-US" sz="1500" dirty="0">
+                <a:solidFill>
+                  <a:srgbClr val="26262F"/>
+                </a:solidFill>
+                <a:latin typeface="Calibri" pitchFamily="34" charset="0"/>
+                <a:ea typeface="Calibri" pitchFamily="34" charset="-122"/>
+                <a:cs typeface="Calibri" pitchFamily="34" charset="-120"/>
+              </a:rPr>
+              <a:t>Detailed, structured errors -- error.details lists every rule that failed, not just true/false</a:t>
+            </a:r>
+            <a:endParaRPr lang="en-US" sz="1500" dirty="0"/>
+          </a:p>
+        </p:txBody>
+      </p:sp>
+      <p:sp>
+        <p:nvSpPr>
+          <p:cNvPr id="16" name="Shape 14"/>
+          <p:cNvSpPr/>
+          <p:nvPr/>
+        </p:nvSpPr>
+        <p:spPr>
+          <a:xfrm>
+            <a:off x="685800" y="5257800"/>
+            <a:ext cx="457200" cy="457200"/>
+          </a:xfrm>
+          <a:prstGeom prst="ellipse">
+            <a:avLst/>
+          </a:prstGeom>
+          <a:solidFill>
+            <a:srgbClr val="FF8A3D"/>
+          </a:solidFill>
+          <a:ln/>
+        </p:spPr>
+        <p:txBody>
+          <a:bodyPr/>
+          <a:p/>
+        </p:txBody>
+      </p:sp>
+      <p:sp>
+        <p:nvSpPr>
+          <p:cNvPr id="17" name="Text 15"/>
+          <p:cNvSpPr txBox="1"/>
+          <p:nvPr/>
+        </p:nvSpPr>
+        <p:spPr>
+          <a:xfrm>
+            <a:off x="685800" y="5257800"/>
+            <a:ext cx="457200" cy="457200"/>
+          </a:xfrm>
+          <a:prstGeom prst="rect">
+            <a:avLst/>
+          </a:prstGeom>
+          <a:noFill/>
+          <a:ln/>
+        </p:spPr>
+        <p:txBody>
+          <a:bodyPr wrap="square" lIns="0" tIns="0" rIns="0" bIns="0" rtlCol="0" anchor="ctr"/>
+          <a:lstStyle/>
+          <a:p>
+            <a:pPr algn="ctr" indent="0" marL="0">
+              <a:buNone/>
+            </a:pPr>
+            <a:r>
+              <a:rPr lang="en-US" sz="1500" b="1" dirty="0">
+                <a:solidFill>
+                  <a:srgbClr val="FFFFFF"/>
+                </a:solidFill>
+                <a:latin typeface="Calibri" pitchFamily="34" charset="0"/>
+                <a:ea typeface="Calibri" pitchFamily="34" charset="-122"/>
+                <a:cs typeface="Calibri" pitchFamily="34" charset="-120"/>
+              </a:rPr>
+              <a:t>5</a:t>
+            </a:r>
+            <a:endParaRPr lang="en-US" sz="1500" dirty="0"/>
+          </a:p>
+        </p:txBody>
+      </p:sp>
+      <p:sp>
+        <p:nvSpPr>
+          <p:cNvPr id="18" name="Text 16"/>
+          <p:cNvSpPr txBox="1"/>
+          <p:nvPr/>
+        </p:nvSpPr>
+        <p:spPr>
+          <a:xfrm>
+            <a:off x="1371600" y="5184648"/>
+            <a:ext cx="10180015" cy="640080"/>
+          </a:xfrm>
+          <a:prstGeom prst="rect">
+            <a:avLst/>
+          </a:prstGeom>
+          <a:noFill/>
+          <a:ln/>
+        </p:spPr>
+        <p:txBody>
+          <a:bodyPr wrap="square" lIns="0" tIns="0" rIns="0" bIns="0" rtlCol="0" anchor="ctr"/>
+          <a:lstStyle/>
+          <a:p>
+            <a:pPr indent="0" marL="0">
+              <a:buNone/>
+            </a:pPr>
+            <a:r>
+              <a:rPr lang="en-US" sz="1500" dirty="0">
+                <a:solidFill>
+                  <a:srgbClr val="26262F"/>
+                </a:solidFill>
+                <a:latin typeface="Calibri" pitchFamily="34" charset="0"/>
+                <a:ea typeface="Calibri" pitchFamily="34" charset="-122"/>
+                <a:cs typeface="Calibri" pitchFamily="34" charset="-120"/>
+              </a:rPr>
+              <a:t>Handles nested objects and arrays naturally -- unlike a tangle of hand-written if statements</a:t>
+            </a:r>
+            <a:endParaRPr lang="en-US" sz="1500" dirty="0"/>
+          </a:p>
+        </p:txBody>
+      </p:sp>
+      <p:sp>
+        <p:nvSpPr>
+          <p:cNvPr id="21" name="cuinotes-footer-mark"/>
+          <p:cNvSpPr txBox="1"/>
+          <p:nvPr/>
+        </p:nvSpPr>
+        <p:spPr>
+          <a:xfrm>
+            <a:off x="9951720" y="6455664"/>
+            <a:ext cx="2011680" cy="292608"/>
+          </a:xfrm>
+          <a:prstGeom prst="rect">
+            <a:avLst/>
+          </a:prstGeom>
+          <a:noFill/>
+        </p:spPr>
+        <p:txBody>
+          <a:bodyPr wrap="none" lIns="0" rIns="0" tIns="0" bIns="0">
+            <a:spAutoFit/>
+          </a:bodyPr>
+          <a:lstStyle/>
+          <a:p>
+            <a:pPr algn="r"/>
+            <a:r>
+              <a:rPr sz="1000">
+                <a:solidFill>
+                  <a:srgbClr val="8A939B"/>
+                </a:solidFill>
+                <a:hlinkClick r:id="rId3"/>
+              </a:rPr>
+              <a:t>cuinotes.com</a:t>
+            </a:r>
+            <a:r>
+              <a:rPr sz="1000">
+                <a:solidFill>
+                  <a:srgbClr val="8A939B"/>
+                </a:solidFill>
+              </a:rPr>
+              <a:t>  ·  20</a:t>
+            </a:r>
+          </a:p>
+        </p:txBody>
+      </p:sp>
+    </p:spTree>
+  </p:cSld>
+  <p:clrMapOvr>
+    <a:masterClrMapping/>
+  </p:clrMapOvr>
+</p:sld>
+</file>
+
+<file path=ppt/slides/slide29.xml><?xml version="1.0" encoding="utf-8"?>
+<p:sld xmlns:a="http://schemas.openxmlformats.org/drawingml/2006/main" xmlns:r="http://schemas.openxmlformats.org/officeDocument/2006/relationships" xmlns:p="http://schemas.openxmlformats.org/presentationml/2006/main">
+  <p:cSld name="Slide 16">
+    <p:bg>
+      <p:bgPr>
+        <a:solidFill>
+          <a:srgbClr val="FFFFFF"/>
+        </a:solidFill>
+      </p:bgPr>
+    </p:bg>
+    <p:spTree>
+      <p:nvGrpSpPr>
+        <p:cNvPr id="1" name=""/>
+        <p:cNvGrpSpPr/>
+        <p:nvPr/>
+      </p:nvGrpSpPr>
+      <p:grpSpPr>
+        <a:xfrm>
+          <a:off x="0" y="0"/>
+          <a:ext cx="0" cy="0"/>
+          <a:chOff x="0" y="0"/>
+          <a:chExt cx="0" cy="0"/>
+        </a:xfrm>
+      </p:grpSpPr>
+      <p:sp>
+        <p:nvSpPr>
+          <p:cNvPr id="2" name="Text 0"/>
+          <p:cNvSpPr txBox="1"/>
+          <p:nvPr/>
+        </p:nvSpPr>
+        <p:spPr>
+          <a:xfrm>
+            <a:off x="640080" y="457200"/>
+            <a:ext cx="10058400" cy="365760"/>
+          </a:xfrm>
+          <a:prstGeom prst="rect">
+            <a:avLst/>
+          </a:prstGeom>
+          <a:noFill/>
+          <a:ln/>
+        </p:spPr>
+        <p:txBody>
+          <a:bodyPr wrap="square" lIns="0" tIns="0" rIns="0" bIns="0" rtlCol="0" anchor="ctr"/>
+          <a:lstStyle/>
+          <a:p>
+            <a:pPr algn="l" indent="0" marL="0">
+              <a:buNone/>
+            </a:pPr>
+            <a:r>
+              <a:rPr lang="en-US" sz="1300" b="1" spc="300" kern="0" dirty="0">
+                <a:solidFill>
+                  <a:srgbClr val="FF8A3D"/>
+                </a:solidFill>
+                <a:latin typeface="Calibri" pitchFamily="34" charset="0"/>
+                <a:ea typeface="Calibri" pitchFamily="34" charset="-122"/>
+                <a:cs typeface="Calibri" pitchFamily="34" charset="-120"/>
+              </a:rPr>
+              <a:t>VALIDATION WITH JOI</a:t>
+            </a:r>
+            <a:endParaRPr lang="en-US" sz="1300" dirty="0"/>
+          </a:p>
+        </p:txBody>
+      </p:sp>
+      <p:sp>
+        <p:nvSpPr>
+          <p:cNvPr id="3" name="Text 1"/>
+          <p:cNvSpPr txBox="1"/>
+          <p:nvPr/>
+        </p:nvSpPr>
+        <p:spPr>
+          <a:xfrm>
+            <a:off x="640080" y="841248"/>
+            <a:ext cx="10881360" cy="914400"/>
+          </a:xfrm>
+          <a:prstGeom prst="rect">
+            <a:avLst/>
+          </a:prstGeom>
+          <a:noFill/>
+          <a:ln/>
+        </p:spPr>
+        <p:txBody>
+          <a:bodyPr wrap="square" lIns="0" tIns="0" rIns="0" bIns="0" rtlCol="0" anchor="ctr"/>
+          <a:lstStyle/>
+          <a:p>
+            <a:pPr algn="l" indent="0" marL="0">
+              <a:buNone/>
+            </a:pPr>
+            <a:r>
+              <a:rPr lang="en-US" sz="3400" b="1" dirty="0">
+                <a:solidFill>
+                  <a:srgbClr val="2B2B7A"/>
+                </a:solidFill>
+                <a:latin typeface="Cambria" pitchFamily="34" charset="0"/>
+                <a:ea typeface="Cambria" pitchFamily="34" charset="-122"/>
+                <a:cs typeface="Cambria" pitchFamily="34" charset="-120"/>
+              </a:rPr>
+              <a:t>Where You'll Actually Use This</a:t>
+            </a:r>
+            <a:endParaRPr lang="en-US" sz="3400" dirty="0"/>
+          </a:p>
+        </p:txBody>
+      </p:sp>
+      <p:sp>
+        <p:nvSpPr>
+          <p:cNvPr id="4" name="Shape 2"/>
+          <p:cNvSpPr/>
+          <p:nvPr/>
+        </p:nvSpPr>
+        <p:spPr>
+          <a:xfrm>
+            <a:off x="640080" y="1965960"/>
+            <a:ext cx="10911535" cy="3657600"/>
+          </a:xfrm>
+          <a:prstGeom prst="roundRect">
+            <a:avLst>
+              <a:gd name="adj" fmla="val 3750"/>
+            </a:avLst>
+          </a:prstGeom>
+          <a:solidFill>
+            <a:srgbClr val="E6F6EE"/>
+          </a:solidFill>
+          <a:ln w="12700">
+            <a:solidFill>
+              <a:srgbClr val="3FA66B"/>
+            </a:solidFill>
+            <a:prstDash val="solid"/>
+          </a:ln>
+        </p:spPr>
+        <p:txBody>
+          <a:bodyPr/>
+          <a:p/>
+        </p:txBody>
+      </p:sp>
+      <p:sp>
+        <p:nvSpPr>
+          <p:cNvPr id="5" name="Text 3"/>
+          <p:cNvSpPr txBox="1"/>
+          <p:nvPr/>
+        </p:nvSpPr>
+        <p:spPr>
+          <a:xfrm>
+            <a:off x="868680" y="2103120"/>
+            <a:ext cx="10454335" cy="400000"/>
+          </a:xfrm>
+          <a:prstGeom prst="rect">
+            <a:avLst/>
+          </a:prstGeom>
+          <a:noFill/>
+          <a:ln/>
+        </p:spPr>
+        <p:txBody>
+          <a:bodyPr wrap="square" lIns="0" tIns="0" rIns="0" bIns="0" rtlCol="0" anchor="ctr"/>
+          <a:lstStyle/>
+          <a:p>
+            <a:pPr indent="0" marL="0">
+              <a:buNone/>
+            </a:pPr>
+            <a:r>
+              <a:rPr lang="en-US" sz="1800" b="1" spc="200" kern="0" dirty="0">
+                <a:solidFill>
+                  <a:srgbClr val="1F7A46"/>
+                </a:solidFill>
+                <a:latin typeface="Calibri" pitchFamily="34" charset="0"/>
+                <a:ea typeface="Calibri" pitchFamily="34" charset="-122"/>
+                <a:cs typeface="Calibri" pitchFamily="34" charset="-120"/>
+              </a:rPr>
+              <a:t>TIP</a:t>
+            </a:r>
+            <a:endParaRPr lang="en-US" sz="1800" dirty="0"/>
+          </a:p>
+        </p:txBody>
+      </p:sp>
+      <p:sp>
+        <p:nvSpPr>
+          <p:cNvPr id="6" name="Text 4"/>
+          <p:cNvSpPr txBox="1"/>
+          <p:nvPr/>
+        </p:nvSpPr>
+        <p:spPr>
+          <a:xfrm>
+            <a:off x="868680" y="2795960"/>
+            <a:ext cx="10454335" cy="2653600"/>
+          </a:xfrm>
+          <a:prstGeom prst="rect">
+            <a:avLst/>
+          </a:prstGeom>
+          <a:noFill/>
+          <a:ln/>
+        </p:spPr>
+        <p:txBody>
+          <a:bodyPr wrap="square" lIns="0" tIns="0" rIns="0" bIns="0" rtlCol="0" anchor="ctr"/>
+          <a:lstStyle/>
+          <a:p>
+            <a:pPr indent="0" marL="0">
+              <a:buNone/>
+            </a:pPr>
+            <a:r>
+              <a:rPr lang="en-US" sz="2800" dirty="0">
+                <a:solidFill>
+                  <a:srgbClr val="26262F"/>
+                </a:solidFill>
+                <a:latin typeface="Calibri" pitchFamily="34" charset="0"/>
+                <a:ea typeface="Calibri" pitchFamily="34" charset="-122"/>
+                <a:cs typeface="Calibri" pitchFamily="34" charset="-120"/>
+              </a:rPr>
+              <a:t>Joi's natural home is server-side, inside an Express route handler, validating req.body before any of it touches your database. You'll use it for real starting in Lecture 25: REST API Development and Authentication.</a:t>
+            </a:r>
+            <a:endParaRPr lang="en-US" sz="2800" dirty="0"/>
+          </a:p>
+        </p:txBody>
+      </p:sp>
+      <p:sp>
+        <p:nvSpPr>
+          <p:cNvPr id="9" name="cuinotes-footer-mark"/>
+          <p:cNvSpPr txBox="1"/>
+          <p:nvPr/>
+        </p:nvSpPr>
+        <p:spPr>
+          <a:xfrm>
+            <a:off x="9951720" y="6455664"/>
+            <a:ext cx="2011680" cy="292608"/>
+          </a:xfrm>
+          <a:prstGeom prst="rect">
+            <a:avLst/>
+          </a:prstGeom>
+          <a:noFill/>
+        </p:spPr>
+        <p:txBody>
+          <a:bodyPr wrap="none" lIns="0" rIns="0" tIns="0" bIns="0">
+            <a:spAutoFit/>
+          </a:bodyPr>
+          <a:lstStyle/>
+          <a:p>
+            <a:pPr algn="r"/>
+            <a:r>
+              <a:rPr sz="1000">
+                <a:solidFill>
+                  <a:srgbClr val="8A939B"/>
+                </a:solidFill>
+                <a:hlinkClick r:id="rId3"/>
+              </a:rPr>
+              <a:t>cuinotes.com</a:t>
+            </a:r>
+            <a:r>
+              <a:rPr sz="1000">
+                <a:solidFill>
+                  <a:srgbClr val="8A939B"/>
+                </a:solidFill>
+              </a:rPr>
+              <a:t>  ·  21</a:t>
             </a:r>
           </a:p>
         </p:txBody>
